--- a/PRISM_Executive_Briefing_with_Evidence.pptx
+++ b/PRISM_Executive_Briefing_with_Evidence.pptx
@@ -17,17 +17,18 @@
     <p:sldId id="265" r:id="rId11"/>
     <p:sldId id="266" r:id="rId12"/>
     <p:sldId id="267" r:id="rId13"/>
-    <p:sldId id="268" r:id="rId19"/>
     <p:sldId id="269" r:id="rId20"/>
     <p:sldId id="270" r:id="rId21"/>
     <p:sldId id="271" r:id="rId22"/>
     <p:sldId id="272" r:id="rId23"/>
     <p:sldId id="273" r:id="rId24"/>
     <p:sldId id="274" r:id="rId25"/>
+    <p:sldId id="268" r:id="rId14"/>
     <p:sldId id="275" r:id="rId26"/>
+    <p:sldId id="276" r:id="rId27"/>
   </p:sldIdLst>
   <p:notesMasterIdLst>
-    <p:notesMasterId r:id="rId14"/>
+    <p:notesMasterId r:id="rId15"/>
   </p:notesMasterIdLst>
   <p:sldSz cx="12192000" cy="6858000"/>
   <p:notesSz cx="6858000" cy="12192000"/>
@@ -1177,7 +1178,7 @@
           <a:p>
             <a:r>
               <a:rPr lang="en-US" dirty="0"/>
-              <a:t>Opening frame: in one week the harness proved three defects in software used by thousands of teams, one of them hiding in plain sight for five years.</a:t>
+              <a:t>Benchmark validation came before the field work. Ninety two percent of the vulnerable cases detected on OWASP Benchmark, ninety seven percent on Juliet. Both suites pair each vulnerable case with a safe variant, so the same run scores misses and false alarms, and the harness called both sides correctly without inventing findings. Say plainly that these corpora are synthetic with published answers: they show the method is disciplined, and the three field defects show it holds on real code.</a:t>
             </a:r>
             <a:endParaRPr lang="en-US" dirty="0"/>
           </a:p>
@@ -1200,7 +1201,7 @@
           <a:p>
             <a:fld id="{F7021451-1387-4CA6-816F-3879F97B5CBC}" type="slidenum">
               <a:rPr lang="en-US"/>
-              <a:t>1</a:t>
+              <a:t>13</a:t>
             </a:fld>
             <a:endParaRPr lang="en-US"/>
           </a:p>
@@ -1265,7 +1266,7 @@
           <a:p>
             <a:r>
               <a:rPr lang="en-US" dirty="0"/>
-              <a:t>Four numbers, four takeaways. The strongest single line is that a defect sat in a widely used tool for five years and the harness surfaced it in a week.</a:t>
+              <a:t>Opening frame: in one week the harness proved three defects in software used by thousands of teams, one of them hiding in plain sight for five years.</a:t>
             </a:r>
             <a:endParaRPr lang="en-US" dirty="0"/>
           </a:p>
@@ -1288,7 +1289,7 @@
           <a:p>
             <a:fld id="{F7021451-1387-4CA6-816F-3879F97B5CBC}" type="slidenum">
               <a:rPr lang="en-US"/>
-              <a:t>2</a:t>
+              <a:t>1</a:t>
             </a:fld>
             <a:endParaRPr lang="en-US"/>
           </a:p>
@@ -1353,7 +1354,7 @@
           <a:p>
             <a:r>
               <a:rPr lang="en-US" dirty="0"/>
-              <a:t>Anchor step one with the contrast: pattern matching versus understanding. Step three is where the credibility comes from.</a:t>
+              <a:t>Four numbers, four takeaways. The strongest single line is that a defect sat in a widely used tool for five years and the harness surfaced it in a week.</a:t>
             </a:r>
             <a:endParaRPr lang="en-US" dirty="0"/>
           </a:p>
@@ -1376,7 +1377,7 @@
           <a:p>
             <a:fld id="{F7021451-1387-4CA6-816F-3879F97B5CBC}" type="slidenum">
               <a:rPr lang="en-US"/>
-              <a:t>3</a:t>
+              <a:t>2</a:t>
             </a:fld>
             <a:endParaRPr lang="en-US"/>
           </a:p>
@@ -1441,7 +1442,7 @@
           <a:p>
             <a:r>
               <a:rPr lang="en-US" dirty="0"/>
-              <a:t>Keep this non-technical. kopia: the badge system never clears the old building. nokogiri: we ran it and got SECRET back. facil.io: a backwards size check reachable from a normal public function.</a:t>
+              <a:t>Anchor step one with the contrast: pattern matching versus understanding. Step three is where the credibility comes from.</a:t>
             </a:r>
             <a:endParaRPr lang="en-US" dirty="0"/>
           </a:p>
@@ -1464,7 +1465,7 @@
           <a:p>
             <a:fld id="{F7021451-1387-4CA6-816F-3879F97B5CBC}" type="slidenum">
               <a:rPr lang="en-US"/>
-              <a:t>4</a:t>
+              <a:t>3</a:t>
             </a:fld>
             <a:endParaRPr lang="en-US"/>
           </a:p>
@@ -1529,7 +1530,7 @@
           <a:p>
             <a:r>
               <a:rPr lang="en-US" dirty="0"/>
-              <a:t>Five years is the headline. No issues, no pull requests, no test coverage for the scenario, and the harness surfaced it in a week.</a:t>
+              <a:t>Keep this non-technical. kopia: the badge system never clears the old building. nokogiri: we ran it and got SECRET back. facil.io: a backwards size check reachable from a normal public function.</a:t>
             </a:r>
             <a:endParaRPr lang="en-US" dirty="0"/>
           </a:p>
@@ -1552,7 +1553,7 @@
           <a:p>
             <a:fld id="{F7021451-1387-4CA6-816F-3879F97B5CBC}" type="slidenum">
               <a:rPr lang="en-US"/>
-              <a:t>5</a:t>
+              <a:t>4</a:t>
             </a:fld>
             <a:endParaRPr lang="en-US"/>
           </a:p>
@@ -1617,7 +1618,7 @@
           <a:p>
             <a:r>
               <a:rPr lang="en-US" dirty="0"/>
-              <a:t>Nineteen assessed, seventeen real, thirteen still live, none left undetermined.</a:t>
+              <a:t>Five years is the headline. No issues, no pull requests, no test coverage for the scenario, and the harness surfaced it in a week.</a:t>
             </a:r>
             <a:endParaRPr lang="en-US" dirty="0"/>
           </a:p>
@@ -1640,7 +1641,7 @@
           <a:p>
             <a:fld id="{F7021451-1387-4CA6-816F-3879F97B5CBC}" type="slidenum">
               <a:rPr lang="en-US"/>
-              <a:t>6</a:t>
+              <a:t>5</a:t>
             </a:fld>
             <a:endParaRPr lang="en-US"/>
           </a:p>
@@ -1705,7 +1706,7 @@
           <a:p>
             <a:r>
               <a:rPr lang="en-US" dirty="0"/>
-              <a:t>This is the capability slide. Depth, precision, speed. Everything here is backed by the three findings already shown.</a:t>
+              <a:t>Nineteen assessed, seventeen real, thirteen still live, none left undetermined.</a:t>
             </a:r>
             <a:endParaRPr lang="en-US" dirty="0"/>
           </a:p>
@@ -1728,7 +1729,7 @@
           <a:p>
             <a:fld id="{F7021451-1387-4CA6-816F-3879F97B5CBC}" type="slidenum">
               <a:rPr lang="en-US"/>
-              <a:t>7</a:t>
+              <a:t>6</a:t>
             </a:fld>
             <a:endParaRPr lang="en-US"/>
           </a:p>
@@ -1836,6 +1837,94 @@
 </file>
 
 <file path=ppt/notesSlides/notesSlide20.xml><?xml version="1.0" encoding="utf-8"?>
+<p:notes xmlns:a="http://schemas.openxmlformats.org/drawingml/2006/main" xmlns:r="http://schemas.openxmlformats.org/officeDocument/2006/relationships" xmlns:p="http://schemas.openxmlformats.org/presentationml/2006/main">
+  <p:cSld>
+    <p:spTree>
+      <p:nvGrpSpPr>
+        <p:cNvPr id="1" name=""/>
+        <p:cNvGrpSpPr/>
+        <p:nvPr/>
+      </p:nvGrpSpPr>
+      <p:grpSpPr>
+        <a:xfrm>
+          <a:off x="0" y="0"/>
+          <a:ext cx="0" cy="0"/>
+          <a:chOff x="0" y="0"/>
+          <a:chExt cx="0" cy="0"/>
+        </a:xfrm>
+      </p:grpSpPr>
+      <p:sp>
+        <p:nvSpPr>
+          <p:cNvPr id="2" name="Slide Image Placeholder 1"/>
+          <p:cNvSpPr>
+            <a:spLocks noGrp="1" noRot="1" noChangeAspect="1"/>
+          </p:cNvSpPr>
+          <p:nvPr>
+            <p:ph type="sldImg"/>
+          </p:nvPr>
+        </p:nvSpPr>
+        <p:spPr/>
+      </p:sp>
+      <p:sp>
+        <p:nvSpPr>
+          <p:cNvPr id="3" name="Notes Placeholder 2"/>
+          <p:cNvSpPr>
+            <a:spLocks noGrp="1"/>
+          </p:cNvSpPr>
+          <p:nvPr>
+            <p:ph type="body" idx="1"/>
+          </p:nvPr>
+        </p:nvSpPr>
+        <p:spPr/>
+        <p:txBody>
+          <a:bodyPr/>
+          <a:lstStyle/>
+          <a:p>
+            <a:r>
+              <a:rPr lang="en-US" dirty="0"/>
+              <a:t>This is the capability slide. Depth, precision, speed. Everything here is backed by the three findings already shown.</a:t>
+            </a:r>
+            <a:endParaRPr lang="en-US" dirty="0"/>
+          </a:p>
+        </p:txBody>
+      </p:sp>
+      <p:sp>
+        <p:nvSpPr>
+          <p:cNvPr id="4" name="Slide Number Placeholder 3"/>
+          <p:cNvSpPr>
+            <a:spLocks noGrp="1"/>
+          </p:cNvSpPr>
+          <p:nvPr>
+            <p:ph type="sldNum" sz="quarter" idx="10"/>
+          </p:nvPr>
+        </p:nvSpPr>
+        <p:spPr/>
+        <p:txBody>
+          <a:bodyPr/>
+          <a:lstStyle/>
+          <a:p>
+            <a:fld id="{F7021451-1387-4CA6-816F-3879F97B5CBC}" type="slidenum">
+              <a:rPr lang="en-US"/>
+              <a:t>7</a:t>
+            </a:fld>
+            <a:endParaRPr lang="en-US"/>
+          </a:p>
+        </p:txBody>
+      </p:sp>
+    </p:spTree>
+    <p:extLst>
+      <p:ext uri="{BB962C8B-B14F-4D97-AF65-F5344CB8AC3E}">
+        <p14:creationId xmlns:p14="http://schemas.microsoft.com/office/powerpoint/2010/main" val="1024086991"/>
+      </p:ext>
+    </p:extLst>
+  </p:cSld>
+  <p:clrMapOvr>
+    <a:masterClrMapping/>
+  </p:clrMapOvr>
+</p:notes>
+</file>
+
+<file path=ppt/notesSlides/notesSlide21.xml><?xml version="1.0" encoding="utf-8"?>
 <p:notes xmlns:a="http://schemas.openxmlformats.org/drawingml/2006/main" xmlns:r="http://schemas.openxmlformats.org/officeDocument/2006/relationships" xmlns:p="http://schemas.openxmlformats.org/presentationml/2006/main">
   <p:cSld>
     <p:spTree>
@@ -5303,7 +5392,7 @@
                 <a:ea typeface="Calibri" pitchFamily="34" charset="-122"/>
                 <a:cs typeface="Calibri" pitchFamily="34" charset="-120"/>
               </a:rPr>
-              <a:t>The eight slides that follow are a separate internal brief, attached here as evidence. They record field work rather than a projection: three defects proved in three widely used open source projects in one week.</a:t>
+              <a:t>The slides that follow are a separate internal brief, attached here as evidence. They record benchmark validation and field work rather than a projection: 92% and 97% detection on the public suites, then three defects proved in three widely used open source projects in one week.</a:t>
             </a:r>
             <a:endParaRPr lang="en-US" sz="1400" dirty="0"/>
           </a:p>
@@ -6143,7 +6232,7 @@
                 <a:ea typeface="Cambria" pitchFamily="34" charset="-122"/>
                 <a:cs typeface="Cambria" pitchFamily="34" charset="-120"/>
               </a:rPr>
-              <a:t>Capability</a:t>
+              <a:t>Benchmark validation</a:t>
             </a:r>
             <a:endParaRPr lang="en-US" sz="1350" dirty="0"/>
           </a:p>
@@ -6185,7 +6274,7 @@
                 <a:ea typeface="Calibri" pitchFamily="34" charset="-122"/>
                 <a:cs typeface="Calibri" pitchFamily="34" charset="-120"/>
               </a:rPr>
-              <a:t>Depth, precision, and reach across three languages</a:t>
+              <a:t>92% on OWASP Benchmark, 97% on Juliet</a:t>
             </a:r>
             <a:endParaRPr lang="en-US" sz="1000" dirty="0"/>
           </a:p>
@@ -6290,7 +6379,7 @@
                 <a:ea typeface="Cambria" pitchFamily="34" charset="-122"/>
                 <a:cs typeface="Cambria" pitchFamily="34" charset="-120"/>
               </a:rPr>
-              <a:t>Disclosure posture</a:t>
+              <a:t>Capability</a:t>
             </a:r>
             <a:endParaRPr lang="en-US" sz="1350" dirty="0"/>
           </a:p>
@@ -6332,6 +6421,153 @@
                 <a:ea typeface="Calibri" pitchFamily="34" charset="-122"/>
                 <a:cs typeface="Calibri" pitchFamily="34" charset="-120"/>
               </a:rPr>
+              <a:t>Depth, precision, and reach across three languages</a:t>
+            </a:r>
+            <a:endParaRPr lang="en-US" sz="1000" dirty="0"/>
+          </a:p>
+        </p:txBody>
+      </p:sp>
+      <p:sp>
+        <p:nvSpPr>
+          <p:cNvPr id="34" name="Shape 32"/>
+          <p:cNvSpPr/>
+          <p:nvPr/>
+        </p:nvSpPr>
+        <p:spPr>
+          <a:xfrm>
+            <a:off x="9226296" y="3904488"/>
+            <a:ext cx="2651760" cy="1371600"/>
+          </a:xfrm>
+          <a:prstGeom prst="roundRect">
+            <a:avLst>
+              <a:gd name="adj" fmla="val 5333"/>
+            </a:avLst>
+          </a:prstGeom>
+          <a:solidFill>
+            <a:srgbClr val="002050"/>
+          </a:solidFill>
+          <a:ln w="12700">
+            <a:solidFill>
+              <a:srgbClr val="13407F"/>
+            </a:solidFill>
+            <a:prstDash val="solid"/>
+          </a:ln>
+        </p:spPr>
+      </p:sp>
+      <p:sp>
+        <p:nvSpPr>
+          <p:cNvPr id="35" name="Text 33"/>
+          <p:cNvSpPr txBox="1"/>
+          <p:nvPr/>
+        </p:nvSpPr>
+        <p:spPr>
+          <a:xfrm>
+            <a:off x="9464040" y="4050792"/>
+            <a:ext cx="640080" cy="237744"/>
+          </a:xfrm>
+          <a:prstGeom prst="rect">
+            <a:avLst/>
+          </a:prstGeom>
+          <a:noFill/>
+          <a:ln/>
+        </p:spPr>
+        <p:txBody>
+          <a:bodyPr wrap="square" lIns="0" tIns="0" rIns="0" bIns="0" rtlCol="0" anchor="ctr"/>
+          <a:lstStyle/>
+          <a:p>
+            <a:pPr indent="0" marL="0">
+              <a:buNone/>
+            </a:pPr>
+            <a:r>
+              <a:rPr lang="en-US" sz="1000" b="1" spc="120" kern="0" dirty="0">
+                <a:solidFill>
+                  <a:srgbClr val="7FC3F5"/>
+                </a:solidFill>
+                <a:latin typeface="Calibri" pitchFamily="34" charset="0"/>
+                <a:ea typeface="Calibri" pitchFamily="34" charset="-122"/>
+                <a:cs typeface="Calibri" pitchFamily="34" charset="-120"/>
+              </a:rPr>
+              <a:t>A8</a:t>
+            </a:r>
+            <a:endParaRPr lang="en-US" sz="1000" dirty="0"/>
+          </a:p>
+        </p:txBody>
+      </p:sp>
+      <p:sp>
+        <p:nvSpPr>
+          <p:cNvPr id="36" name="Text 34"/>
+          <p:cNvSpPr txBox="1"/>
+          <p:nvPr/>
+        </p:nvSpPr>
+        <p:spPr>
+          <a:xfrm>
+            <a:off x="9464040" y="4306824"/>
+            <a:ext cx="2176272" cy="310896"/>
+          </a:xfrm>
+          <a:prstGeom prst="rect">
+            <a:avLst/>
+          </a:prstGeom>
+          <a:noFill/>
+          <a:ln/>
+        </p:spPr>
+        <p:txBody>
+          <a:bodyPr wrap="square" lIns="0" tIns="0" rIns="0" bIns="0" rtlCol="0" anchor="ctr"/>
+          <a:lstStyle/>
+          <a:p>
+            <a:pPr indent="0" marL="0">
+              <a:buNone/>
+            </a:pPr>
+            <a:r>
+              <a:rPr lang="en-US" sz="1350" b="1" dirty="0">
+                <a:solidFill>
+                  <a:srgbClr val="FFFFFF"/>
+                </a:solidFill>
+                <a:latin typeface="Cambria" pitchFamily="34" charset="0"/>
+                <a:ea typeface="Cambria" pitchFamily="34" charset="-122"/>
+                <a:cs typeface="Cambria" pitchFamily="34" charset="-120"/>
+              </a:rPr>
+              <a:t>Disclosure posture</a:t>
+            </a:r>
+            <a:endParaRPr lang="en-US" sz="1350" dirty="0"/>
+          </a:p>
+        </p:txBody>
+      </p:sp>
+      <p:sp>
+        <p:nvSpPr>
+          <p:cNvPr id="37" name="Text 35"/>
+          <p:cNvSpPr txBox="1"/>
+          <p:nvPr/>
+        </p:nvSpPr>
+        <p:spPr>
+          <a:xfrm>
+            <a:off x="9464040" y="4626864"/>
+            <a:ext cx="2176272" cy="548640"/>
+          </a:xfrm>
+          <a:prstGeom prst="rect">
+            <a:avLst/>
+          </a:prstGeom>
+          <a:noFill/>
+          <a:ln/>
+        </p:spPr>
+        <p:txBody>
+          <a:bodyPr wrap="square" lIns="0" tIns="0" rIns="0" bIns="0" rtlCol="0" anchor="ctr"/>
+          <a:lstStyle/>
+          <a:p>
+            <a:pPr indent="0" marL="0">
+              <a:lnSpc>
+                <a:spcPct val="115000"/>
+              </a:lnSpc>
+              <a:buNone/>
+            </a:pPr>
+            <a:r>
+              <a:rPr lang="en-US" sz="1000" dirty="0">
+                <a:solidFill>
+                  <a:srgbClr val="A9C4E2"/>
+                </a:solidFill>
+                <a:latin typeface="Calibri" pitchFamily="34" charset="0"/>
+                <a:ea typeface="Calibri" pitchFamily="34" charset="-122"/>
+                <a:cs typeface="Calibri" pitchFamily="34" charset="-120"/>
+              </a:rPr>
               <a:t>Proved first, reported once, on a timing leadership sets</a:t>
             </a:r>
             <a:endParaRPr lang="en-US" sz="1000" dirty="0"/>
@@ -6340,7 +6576,7 @@
       </p:sp>
       <p:sp>
         <p:nvSpPr>
-          <p:cNvPr id="34" name="Text 32"/>
+          <p:cNvPr id="38" name="Text 36"/>
           <p:cNvSpPr txBox="1"/>
           <p:nvPr/>
         </p:nvSpPr>
@@ -6389,6 +6625,5464 @@
 </file>
 
 <file path=ppt/slides/slide13.xml><?xml version="1.0" encoding="utf-8"?>
+<p:sld xmlns:a="http://schemas.openxmlformats.org/drawingml/2006/main" xmlns:r="http://schemas.openxmlformats.org/officeDocument/2006/relationships" xmlns:p="http://schemas.openxmlformats.org/presentationml/2006/main">
+  <p:cSld name="Slide 13">
+    <p:bg>
+      <p:bgPr>
+        <a:solidFill>
+          <a:srgbClr val="F4F7FA"/>
+        </a:solidFill>
+      </p:bgPr>
+    </p:bg>
+    <p:spTree>
+      <p:nvGrpSpPr>
+        <p:cNvPr id="1" name=""/>
+        <p:cNvGrpSpPr/>
+        <p:nvPr/>
+      </p:nvGrpSpPr>
+      <p:grpSpPr>
+        <a:xfrm>
+          <a:off x="0" y="0"/>
+          <a:ext cx="0" cy="0"/>
+          <a:chOff x="0" y="0"/>
+          <a:chExt cx="0" cy="0"/>
+        </a:xfrm>
+      </p:grpSpPr>
+      <p:sp>
+        <p:nvSpPr>
+          <p:cNvPr id="2" name="Shape 0"/>
+          <p:cNvSpPr/>
+          <p:nvPr/>
+        </p:nvSpPr>
+        <p:spPr>
+          <a:xfrm rot="5400000">
+            <a:off x="566928" y="475488"/>
+            <a:ext cx="128016" cy="146304"/>
+          </a:xfrm>
+          <a:prstGeom prst="triangle">
+            <a:avLst/>
+          </a:prstGeom>
+          <a:solidFill>
+            <a:srgbClr val="006FCF"/>
+          </a:solidFill>
+          <a:ln/>
+        </p:spPr>
+      </p:sp>
+      <p:sp>
+        <p:nvSpPr>
+          <p:cNvPr id="3" name="Text 1"/>
+          <p:cNvSpPr txBox="1"/>
+          <p:nvPr/>
+        </p:nvSpPr>
+        <p:spPr>
+          <a:xfrm>
+            <a:off x="777240" y="402336"/>
+            <a:ext cx="7315200" cy="292608"/>
+          </a:xfrm>
+          <a:prstGeom prst="rect">
+            <a:avLst/>
+          </a:prstGeom>
+          <a:noFill/>
+          <a:ln/>
+        </p:spPr>
+        <p:txBody>
+          <a:bodyPr wrap="square" lIns="0" tIns="0" rIns="0" bIns="0" rtlCol="0" anchor="ctr"/>
+          <a:lstStyle/>
+          <a:p>
+            <a:pPr indent="0" marL="0">
+              <a:buNone/>
+            </a:pPr>
+            <a:r>
+              <a:rPr lang="en-US" sz="1150" b="1" spc="160" kern="0" dirty="0">
+                <a:solidFill>
+                  <a:srgbClr val="006FCF"/>
+                </a:solidFill>
+                <a:latin typeface="Calibri" pitchFamily="34" charset="0"/>
+                <a:ea typeface="Calibri" pitchFamily="34" charset="-122"/>
+                <a:cs typeface="Calibri" pitchFamily="34" charset="-120"/>
+              </a:rPr>
+              <a:t>APPENDIX   |   BENCHMARK VALIDATION</a:t>
+            </a:r>
+            <a:endParaRPr lang="en-US" sz="1150" dirty="0"/>
+          </a:p>
+        </p:txBody>
+      </p:sp>
+      <p:sp>
+        <p:nvSpPr>
+          <p:cNvPr id="4" name="Text 2"/>
+          <p:cNvSpPr txBox="1"/>
+          <p:nvPr/>
+        </p:nvSpPr>
+        <p:spPr>
+          <a:xfrm>
+            <a:off x="548640" y="731520"/>
+            <a:ext cx="11155680" cy="566928"/>
+          </a:xfrm>
+          <a:prstGeom prst="rect">
+            <a:avLst/>
+          </a:prstGeom>
+          <a:noFill/>
+          <a:ln/>
+        </p:spPr>
+        <p:txBody>
+          <a:bodyPr wrap="square" lIns="0" tIns="0" rIns="0" bIns="0" rtlCol="0" anchor="t"/>
+          <a:lstStyle/>
+          <a:p>
+            <a:pPr indent="0" marL="0">
+              <a:buNone/>
+            </a:pPr>
+            <a:r>
+              <a:rPr lang="en-US" sz="3100" b="1" dirty="0">
+                <a:solidFill>
+                  <a:srgbClr val="1B2A44"/>
+                </a:solidFill>
+                <a:latin typeface="Cambria" pitchFamily="34" charset="0"/>
+                <a:ea typeface="Cambria" pitchFamily="34" charset="-122"/>
+                <a:cs typeface="Cambria" pitchFamily="34" charset="-120"/>
+              </a:rPr>
+              <a:t>92% on OWASP Benchmark, 97% on Juliet</a:t>
+            </a:r>
+            <a:endParaRPr lang="en-US" sz="3100" dirty="0"/>
+          </a:p>
+        </p:txBody>
+      </p:sp>
+      <p:sp>
+        <p:nvSpPr>
+          <p:cNvPr id="5" name="Text 3"/>
+          <p:cNvSpPr txBox="1"/>
+          <p:nvPr/>
+        </p:nvSpPr>
+        <p:spPr>
+          <a:xfrm>
+            <a:off x="548640" y="1298448"/>
+            <a:ext cx="10607040" cy="310896"/>
+          </a:xfrm>
+          <a:prstGeom prst="rect">
+            <a:avLst/>
+          </a:prstGeom>
+          <a:noFill/>
+          <a:ln/>
+        </p:spPr>
+        <p:txBody>
+          <a:bodyPr wrap="square" lIns="0" tIns="0" rIns="0" bIns="0" rtlCol="0" anchor="ctr"/>
+          <a:lstStyle/>
+          <a:p>
+            <a:pPr indent="0" marL="0">
+              <a:buNone/>
+            </a:pPr>
+            <a:r>
+              <a:rPr lang="en-US" sz="1400" dirty="0">
+                <a:solidFill>
+                  <a:srgbClr val="53565A"/>
+                </a:solidFill>
+                <a:latin typeface="Calibri" pitchFamily="34" charset="0"/>
+                <a:ea typeface="Calibri" pitchFamily="34" charset="-122"/>
+                <a:cs typeface="Calibri" pitchFamily="34" charset="-120"/>
+              </a:rPr>
+              <a:t>Before the field work, the harness was run against both public suites, where every case ships with a published answer.</a:t>
+            </a:r>
+            <a:endParaRPr lang="en-US" sz="1400" dirty="0"/>
+          </a:p>
+        </p:txBody>
+      </p:sp>
+      <p:sp>
+        <p:nvSpPr>
+          <p:cNvPr id="6" name="Text 4"/>
+          <p:cNvSpPr txBox="1"/>
+          <p:nvPr/>
+        </p:nvSpPr>
+        <p:spPr>
+          <a:xfrm>
+            <a:off x="685800" y="1828800"/>
+            <a:ext cx="2377440" cy="256032"/>
+          </a:xfrm>
+          <a:prstGeom prst="rect">
+            <a:avLst/>
+          </a:prstGeom>
+          <a:noFill/>
+          <a:ln/>
+        </p:spPr>
+        <p:txBody>
+          <a:bodyPr wrap="square" lIns="0" tIns="0" rIns="0" bIns="0" rtlCol="0" anchor="ctr"/>
+          <a:lstStyle/>
+          <a:p>
+            <a:pPr indent="0" marL="0">
+              <a:buNone/>
+            </a:pPr>
+            <a:r>
+              <a:rPr lang="en-US" sz="1050" b="1" spc="130" kern="0" dirty="0">
+                <a:solidFill>
+                  <a:srgbClr val="53565A"/>
+                </a:solidFill>
+                <a:latin typeface="Calibri" pitchFamily="34" charset="0"/>
+                <a:ea typeface="Calibri" pitchFamily="34" charset="-122"/>
+                <a:cs typeface="Calibri" pitchFamily="34" charset="-120"/>
+              </a:rPr>
+              <a:t>OWASP BENCHMARK</a:t>
+            </a:r>
+            <a:endParaRPr lang="en-US" sz="1050" dirty="0"/>
+          </a:p>
+        </p:txBody>
+      </p:sp>
+      <p:sp>
+        <p:nvSpPr>
+          <p:cNvPr id="7" name="Text 5"/>
+          <p:cNvSpPr txBox="1"/>
+          <p:nvPr/>
+        </p:nvSpPr>
+        <p:spPr>
+          <a:xfrm>
+            <a:off x="649224" y="2103120"/>
+            <a:ext cx="2377440" cy="685800"/>
+          </a:xfrm>
+          <a:prstGeom prst="rect">
+            <a:avLst/>
+          </a:prstGeom>
+          <a:noFill/>
+          <a:ln/>
+        </p:spPr>
+        <p:txBody>
+          <a:bodyPr wrap="square" lIns="0" tIns="0" rIns="0" bIns="0" rtlCol="0" anchor="ctr"/>
+          <a:lstStyle/>
+          <a:p>
+            <a:pPr indent="0" marL="0">
+              <a:buNone/>
+            </a:pPr>
+            <a:r>
+              <a:rPr lang="en-US" sz="4000" b="1" dirty="0">
+                <a:solidFill>
+                  <a:srgbClr val="006FCF"/>
+                </a:solidFill>
+                <a:latin typeface="Cambria" pitchFamily="34" charset="0"/>
+                <a:ea typeface="Cambria" pitchFamily="34" charset="-122"/>
+                <a:cs typeface="Cambria" pitchFamily="34" charset="-120"/>
+              </a:rPr>
+              <a:t>92%</a:t>
+            </a:r>
+            <a:endParaRPr lang="en-US" sz="4000" dirty="0"/>
+          </a:p>
+        </p:txBody>
+      </p:sp>
+      <p:sp>
+        <p:nvSpPr>
+          <p:cNvPr id="8" name="Text 6"/>
+          <p:cNvSpPr txBox="1"/>
+          <p:nvPr/>
+        </p:nvSpPr>
+        <p:spPr>
+          <a:xfrm>
+            <a:off x="685800" y="2788920"/>
+            <a:ext cx="2377440" cy="274320"/>
+          </a:xfrm>
+          <a:prstGeom prst="rect">
+            <a:avLst/>
+          </a:prstGeom>
+          <a:noFill/>
+          <a:ln/>
+        </p:spPr>
+        <p:txBody>
+          <a:bodyPr wrap="square" lIns="0" tIns="0" rIns="0" bIns="0" rtlCol="0" anchor="ctr"/>
+          <a:lstStyle/>
+          <a:p>
+            <a:pPr indent="0" marL="0">
+              <a:buNone/>
+            </a:pPr>
+            <a:r>
+              <a:rPr lang="en-US" sz="1100" dirty="0">
+                <a:solidFill>
+                  <a:srgbClr val="1B2A44"/>
+                </a:solidFill>
+                <a:latin typeface="Calibri" pitchFamily="34" charset="0"/>
+                <a:ea typeface="Calibri" pitchFamily="34" charset="-122"/>
+                <a:cs typeface="Calibri" pitchFamily="34" charset="-120"/>
+              </a:rPr>
+              <a:t>of vulnerable cases detected</a:t>
+            </a:r>
+            <a:endParaRPr lang="en-US" sz="1100" dirty="0"/>
+          </a:p>
+        </p:txBody>
+      </p:sp>
+      <p:sp>
+        <p:nvSpPr>
+          <p:cNvPr id="9" name="Shape 7"/>
+          <p:cNvSpPr/>
+          <p:nvPr/>
+        </p:nvSpPr>
+        <p:spPr>
+          <a:xfrm>
+            <a:off x="685800" y="3154680"/>
+            <a:ext cx="201168" cy="201168"/>
+          </a:xfrm>
+          <a:prstGeom prst="roundRect">
+            <a:avLst>
+              <a:gd name="adj" fmla="val 13636"/>
+            </a:avLst>
+          </a:prstGeom>
+          <a:solidFill>
+            <a:srgbClr val="006FCF"/>
+          </a:solidFill>
+          <a:ln/>
+        </p:spPr>
+      </p:sp>
+      <p:sp>
+        <p:nvSpPr>
+          <p:cNvPr id="10" name="Shape 8"/>
+          <p:cNvSpPr/>
+          <p:nvPr/>
+        </p:nvSpPr>
+        <p:spPr>
+          <a:xfrm>
+            <a:off x="928116" y="3154680"/>
+            <a:ext cx="201168" cy="201168"/>
+          </a:xfrm>
+          <a:prstGeom prst="roundRect">
+            <a:avLst>
+              <a:gd name="adj" fmla="val 13636"/>
+            </a:avLst>
+          </a:prstGeom>
+          <a:solidFill>
+            <a:srgbClr val="006FCF"/>
+          </a:solidFill>
+          <a:ln/>
+        </p:spPr>
+      </p:sp>
+      <p:sp>
+        <p:nvSpPr>
+          <p:cNvPr id="11" name="Shape 9"/>
+          <p:cNvSpPr/>
+          <p:nvPr/>
+        </p:nvSpPr>
+        <p:spPr>
+          <a:xfrm>
+            <a:off x="1170432" y="3154680"/>
+            <a:ext cx="201168" cy="201168"/>
+          </a:xfrm>
+          <a:prstGeom prst="roundRect">
+            <a:avLst>
+              <a:gd name="adj" fmla="val 13636"/>
+            </a:avLst>
+          </a:prstGeom>
+          <a:solidFill>
+            <a:srgbClr val="006FCF"/>
+          </a:solidFill>
+          <a:ln/>
+        </p:spPr>
+      </p:sp>
+      <p:sp>
+        <p:nvSpPr>
+          <p:cNvPr id="12" name="Shape 10"/>
+          <p:cNvSpPr/>
+          <p:nvPr/>
+        </p:nvSpPr>
+        <p:spPr>
+          <a:xfrm>
+            <a:off x="1412748" y="3154680"/>
+            <a:ext cx="201168" cy="201168"/>
+          </a:xfrm>
+          <a:prstGeom prst="roundRect">
+            <a:avLst>
+              <a:gd name="adj" fmla="val 13636"/>
+            </a:avLst>
+          </a:prstGeom>
+          <a:solidFill>
+            <a:srgbClr val="006FCF"/>
+          </a:solidFill>
+          <a:ln/>
+        </p:spPr>
+      </p:sp>
+      <p:sp>
+        <p:nvSpPr>
+          <p:cNvPr id="13" name="Shape 11"/>
+          <p:cNvSpPr/>
+          <p:nvPr/>
+        </p:nvSpPr>
+        <p:spPr>
+          <a:xfrm>
+            <a:off x="1655064" y="3154680"/>
+            <a:ext cx="201168" cy="201168"/>
+          </a:xfrm>
+          <a:prstGeom prst="roundRect">
+            <a:avLst>
+              <a:gd name="adj" fmla="val 13636"/>
+            </a:avLst>
+          </a:prstGeom>
+          <a:solidFill>
+            <a:srgbClr val="006FCF"/>
+          </a:solidFill>
+          <a:ln/>
+        </p:spPr>
+      </p:sp>
+      <p:sp>
+        <p:nvSpPr>
+          <p:cNvPr id="14" name="Shape 12"/>
+          <p:cNvSpPr/>
+          <p:nvPr/>
+        </p:nvSpPr>
+        <p:spPr>
+          <a:xfrm>
+            <a:off x="1897380" y="3154680"/>
+            <a:ext cx="201168" cy="201168"/>
+          </a:xfrm>
+          <a:prstGeom prst="roundRect">
+            <a:avLst>
+              <a:gd name="adj" fmla="val 13636"/>
+            </a:avLst>
+          </a:prstGeom>
+          <a:solidFill>
+            <a:srgbClr val="006FCF"/>
+          </a:solidFill>
+          <a:ln/>
+        </p:spPr>
+      </p:sp>
+      <p:sp>
+        <p:nvSpPr>
+          <p:cNvPr id="15" name="Shape 13"/>
+          <p:cNvSpPr/>
+          <p:nvPr/>
+        </p:nvSpPr>
+        <p:spPr>
+          <a:xfrm>
+            <a:off x="2139696" y="3154680"/>
+            <a:ext cx="201168" cy="201168"/>
+          </a:xfrm>
+          <a:prstGeom prst="roundRect">
+            <a:avLst>
+              <a:gd name="adj" fmla="val 13636"/>
+            </a:avLst>
+          </a:prstGeom>
+          <a:solidFill>
+            <a:srgbClr val="006FCF"/>
+          </a:solidFill>
+          <a:ln/>
+        </p:spPr>
+      </p:sp>
+      <p:sp>
+        <p:nvSpPr>
+          <p:cNvPr id="16" name="Shape 14"/>
+          <p:cNvSpPr/>
+          <p:nvPr/>
+        </p:nvSpPr>
+        <p:spPr>
+          <a:xfrm>
+            <a:off x="2382012" y="3154680"/>
+            <a:ext cx="201168" cy="201168"/>
+          </a:xfrm>
+          <a:prstGeom prst="roundRect">
+            <a:avLst>
+              <a:gd name="adj" fmla="val 13636"/>
+            </a:avLst>
+          </a:prstGeom>
+          <a:solidFill>
+            <a:srgbClr val="006FCF"/>
+          </a:solidFill>
+          <a:ln/>
+        </p:spPr>
+      </p:sp>
+      <p:sp>
+        <p:nvSpPr>
+          <p:cNvPr id="17" name="Shape 15"/>
+          <p:cNvSpPr/>
+          <p:nvPr/>
+        </p:nvSpPr>
+        <p:spPr>
+          <a:xfrm>
+            <a:off x="2624328" y="3154680"/>
+            <a:ext cx="201168" cy="201168"/>
+          </a:xfrm>
+          <a:prstGeom prst="roundRect">
+            <a:avLst>
+              <a:gd name="adj" fmla="val 13636"/>
+            </a:avLst>
+          </a:prstGeom>
+          <a:solidFill>
+            <a:srgbClr val="006FCF"/>
+          </a:solidFill>
+          <a:ln/>
+        </p:spPr>
+      </p:sp>
+      <p:sp>
+        <p:nvSpPr>
+          <p:cNvPr id="18" name="Shape 16"/>
+          <p:cNvSpPr/>
+          <p:nvPr/>
+        </p:nvSpPr>
+        <p:spPr>
+          <a:xfrm>
+            <a:off x="2866644" y="3154680"/>
+            <a:ext cx="201168" cy="201168"/>
+          </a:xfrm>
+          <a:prstGeom prst="roundRect">
+            <a:avLst>
+              <a:gd name="adj" fmla="val 13636"/>
+            </a:avLst>
+          </a:prstGeom>
+          <a:solidFill>
+            <a:srgbClr val="006FCF"/>
+          </a:solidFill>
+          <a:ln/>
+        </p:spPr>
+      </p:sp>
+      <p:sp>
+        <p:nvSpPr>
+          <p:cNvPr id="19" name="Shape 17"/>
+          <p:cNvSpPr/>
+          <p:nvPr/>
+        </p:nvSpPr>
+        <p:spPr>
+          <a:xfrm>
+            <a:off x="685800" y="3396996"/>
+            <a:ext cx="201168" cy="201168"/>
+          </a:xfrm>
+          <a:prstGeom prst="roundRect">
+            <a:avLst>
+              <a:gd name="adj" fmla="val 13636"/>
+            </a:avLst>
+          </a:prstGeom>
+          <a:solidFill>
+            <a:srgbClr val="006FCF"/>
+          </a:solidFill>
+          <a:ln/>
+        </p:spPr>
+      </p:sp>
+      <p:sp>
+        <p:nvSpPr>
+          <p:cNvPr id="20" name="Shape 18"/>
+          <p:cNvSpPr/>
+          <p:nvPr/>
+        </p:nvSpPr>
+        <p:spPr>
+          <a:xfrm>
+            <a:off x="928116" y="3396996"/>
+            <a:ext cx="201168" cy="201168"/>
+          </a:xfrm>
+          <a:prstGeom prst="roundRect">
+            <a:avLst>
+              <a:gd name="adj" fmla="val 13636"/>
+            </a:avLst>
+          </a:prstGeom>
+          <a:solidFill>
+            <a:srgbClr val="006FCF"/>
+          </a:solidFill>
+          <a:ln/>
+        </p:spPr>
+      </p:sp>
+      <p:sp>
+        <p:nvSpPr>
+          <p:cNvPr id="21" name="Shape 19"/>
+          <p:cNvSpPr/>
+          <p:nvPr/>
+        </p:nvSpPr>
+        <p:spPr>
+          <a:xfrm>
+            <a:off x="1170432" y="3396996"/>
+            <a:ext cx="201168" cy="201168"/>
+          </a:xfrm>
+          <a:prstGeom prst="roundRect">
+            <a:avLst>
+              <a:gd name="adj" fmla="val 13636"/>
+            </a:avLst>
+          </a:prstGeom>
+          <a:solidFill>
+            <a:srgbClr val="006FCF"/>
+          </a:solidFill>
+          <a:ln/>
+        </p:spPr>
+      </p:sp>
+      <p:sp>
+        <p:nvSpPr>
+          <p:cNvPr id="22" name="Shape 20"/>
+          <p:cNvSpPr/>
+          <p:nvPr/>
+        </p:nvSpPr>
+        <p:spPr>
+          <a:xfrm>
+            <a:off x="1412748" y="3396996"/>
+            <a:ext cx="201168" cy="201168"/>
+          </a:xfrm>
+          <a:prstGeom prst="roundRect">
+            <a:avLst>
+              <a:gd name="adj" fmla="val 13636"/>
+            </a:avLst>
+          </a:prstGeom>
+          <a:solidFill>
+            <a:srgbClr val="006FCF"/>
+          </a:solidFill>
+          <a:ln/>
+        </p:spPr>
+      </p:sp>
+      <p:sp>
+        <p:nvSpPr>
+          <p:cNvPr id="23" name="Shape 21"/>
+          <p:cNvSpPr/>
+          <p:nvPr/>
+        </p:nvSpPr>
+        <p:spPr>
+          <a:xfrm>
+            <a:off x="1655064" y="3396996"/>
+            <a:ext cx="201168" cy="201168"/>
+          </a:xfrm>
+          <a:prstGeom prst="roundRect">
+            <a:avLst>
+              <a:gd name="adj" fmla="val 13636"/>
+            </a:avLst>
+          </a:prstGeom>
+          <a:solidFill>
+            <a:srgbClr val="006FCF"/>
+          </a:solidFill>
+          <a:ln/>
+        </p:spPr>
+      </p:sp>
+      <p:sp>
+        <p:nvSpPr>
+          <p:cNvPr id="24" name="Shape 22"/>
+          <p:cNvSpPr/>
+          <p:nvPr/>
+        </p:nvSpPr>
+        <p:spPr>
+          <a:xfrm>
+            <a:off x="1897380" y="3396996"/>
+            <a:ext cx="201168" cy="201168"/>
+          </a:xfrm>
+          <a:prstGeom prst="roundRect">
+            <a:avLst>
+              <a:gd name="adj" fmla="val 13636"/>
+            </a:avLst>
+          </a:prstGeom>
+          <a:solidFill>
+            <a:srgbClr val="006FCF"/>
+          </a:solidFill>
+          <a:ln/>
+        </p:spPr>
+      </p:sp>
+      <p:sp>
+        <p:nvSpPr>
+          <p:cNvPr id="25" name="Shape 23"/>
+          <p:cNvSpPr/>
+          <p:nvPr/>
+        </p:nvSpPr>
+        <p:spPr>
+          <a:xfrm>
+            <a:off x="2139696" y="3396996"/>
+            <a:ext cx="201168" cy="201168"/>
+          </a:xfrm>
+          <a:prstGeom prst="roundRect">
+            <a:avLst>
+              <a:gd name="adj" fmla="val 13636"/>
+            </a:avLst>
+          </a:prstGeom>
+          <a:solidFill>
+            <a:srgbClr val="006FCF"/>
+          </a:solidFill>
+          <a:ln/>
+        </p:spPr>
+      </p:sp>
+      <p:sp>
+        <p:nvSpPr>
+          <p:cNvPr id="26" name="Shape 24"/>
+          <p:cNvSpPr/>
+          <p:nvPr/>
+        </p:nvSpPr>
+        <p:spPr>
+          <a:xfrm>
+            <a:off x="2382012" y="3396996"/>
+            <a:ext cx="201168" cy="201168"/>
+          </a:xfrm>
+          <a:prstGeom prst="roundRect">
+            <a:avLst>
+              <a:gd name="adj" fmla="val 13636"/>
+            </a:avLst>
+          </a:prstGeom>
+          <a:solidFill>
+            <a:srgbClr val="006FCF"/>
+          </a:solidFill>
+          <a:ln/>
+        </p:spPr>
+      </p:sp>
+      <p:sp>
+        <p:nvSpPr>
+          <p:cNvPr id="27" name="Shape 25"/>
+          <p:cNvSpPr/>
+          <p:nvPr/>
+        </p:nvSpPr>
+        <p:spPr>
+          <a:xfrm>
+            <a:off x="2624328" y="3396996"/>
+            <a:ext cx="201168" cy="201168"/>
+          </a:xfrm>
+          <a:prstGeom prst="roundRect">
+            <a:avLst>
+              <a:gd name="adj" fmla="val 13636"/>
+            </a:avLst>
+          </a:prstGeom>
+          <a:solidFill>
+            <a:srgbClr val="006FCF"/>
+          </a:solidFill>
+          <a:ln/>
+        </p:spPr>
+      </p:sp>
+      <p:sp>
+        <p:nvSpPr>
+          <p:cNvPr id="28" name="Shape 26"/>
+          <p:cNvSpPr/>
+          <p:nvPr/>
+        </p:nvSpPr>
+        <p:spPr>
+          <a:xfrm>
+            <a:off x="2866644" y="3396996"/>
+            <a:ext cx="201168" cy="201168"/>
+          </a:xfrm>
+          <a:prstGeom prst="roundRect">
+            <a:avLst>
+              <a:gd name="adj" fmla="val 13636"/>
+            </a:avLst>
+          </a:prstGeom>
+          <a:solidFill>
+            <a:srgbClr val="006FCF"/>
+          </a:solidFill>
+          <a:ln/>
+        </p:spPr>
+      </p:sp>
+      <p:sp>
+        <p:nvSpPr>
+          <p:cNvPr id="29" name="Shape 27"/>
+          <p:cNvSpPr/>
+          <p:nvPr/>
+        </p:nvSpPr>
+        <p:spPr>
+          <a:xfrm>
+            <a:off x="685800" y="3639312"/>
+            <a:ext cx="201168" cy="201168"/>
+          </a:xfrm>
+          <a:prstGeom prst="roundRect">
+            <a:avLst>
+              <a:gd name="adj" fmla="val 13636"/>
+            </a:avLst>
+          </a:prstGeom>
+          <a:solidFill>
+            <a:srgbClr val="006FCF"/>
+          </a:solidFill>
+          <a:ln/>
+        </p:spPr>
+      </p:sp>
+      <p:sp>
+        <p:nvSpPr>
+          <p:cNvPr id="30" name="Shape 28"/>
+          <p:cNvSpPr/>
+          <p:nvPr/>
+        </p:nvSpPr>
+        <p:spPr>
+          <a:xfrm>
+            <a:off x="928116" y="3639312"/>
+            <a:ext cx="201168" cy="201168"/>
+          </a:xfrm>
+          <a:prstGeom prst="roundRect">
+            <a:avLst>
+              <a:gd name="adj" fmla="val 13636"/>
+            </a:avLst>
+          </a:prstGeom>
+          <a:solidFill>
+            <a:srgbClr val="006FCF"/>
+          </a:solidFill>
+          <a:ln/>
+        </p:spPr>
+      </p:sp>
+      <p:sp>
+        <p:nvSpPr>
+          <p:cNvPr id="31" name="Shape 29"/>
+          <p:cNvSpPr/>
+          <p:nvPr/>
+        </p:nvSpPr>
+        <p:spPr>
+          <a:xfrm>
+            <a:off x="1170432" y="3639312"/>
+            <a:ext cx="201168" cy="201168"/>
+          </a:xfrm>
+          <a:prstGeom prst="roundRect">
+            <a:avLst>
+              <a:gd name="adj" fmla="val 13636"/>
+            </a:avLst>
+          </a:prstGeom>
+          <a:solidFill>
+            <a:srgbClr val="006FCF"/>
+          </a:solidFill>
+          <a:ln/>
+        </p:spPr>
+      </p:sp>
+      <p:sp>
+        <p:nvSpPr>
+          <p:cNvPr id="32" name="Shape 30"/>
+          <p:cNvSpPr/>
+          <p:nvPr/>
+        </p:nvSpPr>
+        <p:spPr>
+          <a:xfrm>
+            <a:off x="1412748" y="3639312"/>
+            <a:ext cx="201168" cy="201168"/>
+          </a:xfrm>
+          <a:prstGeom prst="roundRect">
+            <a:avLst>
+              <a:gd name="adj" fmla="val 13636"/>
+            </a:avLst>
+          </a:prstGeom>
+          <a:solidFill>
+            <a:srgbClr val="006FCF"/>
+          </a:solidFill>
+          <a:ln/>
+        </p:spPr>
+      </p:sp>
+      <p:sp>
+        <p:nvSpPr>
+          <p:cNvPr id="33" name="Shape 31"/>
+          <p:cNvSpPr/>
+          <p:nvPr/>
+        </p:nvSpPr>
+        <p:spPr>
+          <a:xfrm>
+            <a:off x="1655064" y="3639312"/>
+            <a:ext cx="201168" cy="201168"/>
+          </a:xfrm>
+          <a:prstGeom prst="roundRect">
+            <a:avLst>
+              <a:gd name="adj" fmla="val 13636"/>
+            </a:avLst>
+          </a:prstGeom>
+          <a:solidFill>
+            <a:srgbClr val="006FCF"/>
+          </a:solidFill>
+          <a:ln/>
+        </p:spPr>
+      </p:sp>
+      <p:sp>
+        <p:nvSpPr>
+          <p:cNvPr id="34" name="Shape 32"/>
+          <p:cNvSpPr/>
+          <p:nvPr/>
+        </p:nvSpPr>
+        <p:spPr>
+          <a:xfrm>
+            <a:off x="1897380" y="3639312"/>
+            <a:ext cx="201168" cy="201168"/>
+          </a:xfrm>
+          <a:prstGeom prst="roundRect">
+            <a:avLst>
+              <a:gd name="adj" fmla="val 13636"/>
+            </a:avLst>
+          </a:prstGeom>
+          <a:solidFill>
+            <a:srgbClr val="006FCF"/>
+          </a:solidFill>
+          <a:ln/>
+        </p:spPr>
+      </p:sp>
+      <p:sp>
+        <p:nvSpPr>
+          <p:cNvPr id="35" name="Shape 33"/>
+          <p:cNvSpPr/>
+          <p:nvPr/>
+        </p:nvSpPr>
+        <p:spPr>
+          <a:xfrm>
+            <a:off x="2139696" y="3639312"/>
+            <a:ext cx="201168" cy="201168"/>
+          </a:xfrm>
+          <a:prstGeom prst="roundRect">
+            <a:avLst>
+              <a:gd name="adj" fmla="val 13636"/>
+            </a:avLst>
+          </a:prstGeom>
+          <a:solidFill>
+            <a:srgbClr val="006FCF"/>
+          </a:solidFill>
+          <a:ln/>
+        </p:spPr>
+      </p:sp>
+      <p:sp>
+        <p:nvSpPr>
+          <p:cNvPr id="36" name="Shape 34"/>
+          <p:cNvSpPr/>
+          <p:nvPr/>
+        </p:nvSpPr>
+        <p:spPr>
+          <a:xfrm>
+            <a:off x="2382012" y="3639312"/>
+            <a:ext cx="201168" cy="201168"/>
+          </a:xfrm>
+          <a:prstGeom prst="roundRect">
+            <a:avLst>
+              <a:gd name="adj" fmla="val 13636"/>
+            </a:avLst>
+          </a:prstGeom>
+          <a:solidFill>
+            <a:srgbClr val="006FCF"/>
+          </a:solidFill>
+          <a:ln/>
+        </p:spPr>
+      </p:sp>
+      <p:sp>
+        <p:nvSpPr>
+          <p:cNvPr id="37" name="Shape 35"/>
+          <p:cNvSpPr/>
+          <p:nvPr/>
+        </p:nvSpPr>
+        <p:spPr>
+          <a:xfrm>
+            <a:off x="2624328" y="3639312"/>
+            <a:ext cx="201168" cy="201168"/>
+          </a:xfrm>
+          <a:prstGeom prst="roundRect">
+            <a:avLst>
+              <a:gd name="adj" fmla="val 13636"/>
+            </a:avLst>
+          </a:prstGeom>
+          <a:solidFill>
+            <a:srgbClr val="006FCF"/>
+          </a:solidFill>
+          <a:ln/>
+        </p:spPr>
+      </p:sp>
+      <p:sp>
+        <p:nvSpPr>
+          <p:cNvPr id="38" name="Shape 36"/>
+          <p:cNvSpPr/>
+          <p:nvPr/>
+        </p:nvSpPr>
+        <p:spPr>
+          <a:xfrm>
+            <a:off x="2866644" y="3639312"/>
+            <a:ext cx="201168" cy="201168"/>
+          </a:xfrm>
+          <a:prstGeom prst="roundRect">
+            <a:avLst>
+              <a:gd name="adj" fmla="val 13636"/>
+            </a:avLst>
+          </a:prstGeom>
+          <a:solidFill>
+            <a:srgbClr val="006FCF"/>
+          </a:solidFill>
+          <a:ln/>
+        </p:spPr>
+      </p:sp>
+      <p:sp>
+        <p:nvSpPr>
+          <p:cNvPr id="39" name="Shape 37"/>
+          <p:cNvSpPr/>
+          <p:nvPr/>
+        </p:nvSpPr>
+        <p:spPr>
+          <a:xfrm>
+            <a:off x="685800" y="3881628"/>
+            <a:ext cx="201168" cy="201168"/>
+          </a:xfrm>
+          <a:prstGeom prst="roundRect">
+            <a:avLst>
+              <a:gd name="adj" fmla="val 13636"/>
+            </a:avLst>
+          </a:prstGeom>
+          <a:solidFill>
+            <a:srgbClr val="006FCF"/>
+          </a:solidFill>
+          <a:ln/>
+        </p:spPr>
+      </p:sp>
+      <p:sp>
+        <p:nvSpPr>
+          <p:cNvPr id="40" name="Shape 38"/>
+          <p:cNvSpPr/>
+          <p:nvPr/>
+        </p:nvSpPr>
+        <p:spPr>
+          <a:xfrm>
+            <a:off x="928116" y="3881628"/>
+            <a:ext cx="201168" cy="201168"/>
+          </a:xfrm>
+          <a:prstGeom prst="roundRect">
+            <a:avLst>
+              <a:gd name="adj" fmla="val 13636"/>
+            </a:avLst>
+          </a:prstGeom>
+          <a:solidFill>
+            <a:srgbClr val="006FCF"/>
+          </a:solidFill>
+          <a:ln/>
+        </p:spPr>
+      </p:sp>
+      <p:sp>
+        <p:nvSpPr>
+          <p:cNvPr id="41" name="Shape 39"/>
+          <p:cNvSpPr/>
+          <p:nvPr/>
+        </p:nvSpPr>
+        <p:spPr>
+          <a:xfrm>
+            <a:off x="1170432" y="3881628"/>
+            <a:ext cx="201168" cy="201168"/>
+          </a:xfrm>
+          <a:prstGeom prst="roundRect">
+            <a:avLst>
+              <a:gd name="adj" fmla="val 13636"/>
+            </a:avLst>
+          </a:prstGeom>
+          <a:solidFill>
+            <a:srgbClr val="006FCF"/>
+          </a:solidFill>
+          <a:ln/>
+        </p:spPr>
+      </p:sp>
+      <p:sp>
+        <p:nvSpPr>
+          <p:cNvPr id="42" name="Shape 40"/>
+          <p:cNvSpPr/>
+          <p:nvPr/>
+        </p:nvSpPr>
+        <p:spPr>
+          <a:xfrm>
+            <a:off x="1412748" y="3881628"/>
+            <a:ext cx="201168" cy="201168"/>
+          </a:xfrm>
+          <a:prstGeom prst="roundRect">
+            <a:avLst>
+              <a:gd name="adj" fmla="val 13636"/>
+            </a:avLst>
+          </a:prstGeom>
+          <a:solidFill>
+            <a:srgbClr val="006FCF"/>
+          </a:solidFill>
+          <a:ln/>
+        </p:spPr>
+      </p:sp>
+      <p:sp>
+        <p:nvSpPr>
+          <p:cNvPr id="43" name="Shape 41"/>
+          <p:cNvSpPr/>
+          <p:nvPr/>
+        </p:nvSpPr>
+        <p:spPr>
+          <a:xfrm>
+            <a:off x="1655064" y="3881628"/>
+            <a:ext cx="201168" cy="201168"/>
+          </a:xfrm>
+          <a:prstGeom prst="roundRect">
+            <a:avLst>
+              <a:gd name="adj" fmla="val 13636"/>
+            </a:avLst>
+          </a:prstGeom>
+          <a:solidFill>
+            <a:srgbClr val="006FCF"/>
+          </a:solidFill>
+          <a:ln/>
+        </p:spPr>
+      </p:sp>
+      <p:sp>
+        <p:nvSpPr>
+          <p:cNvPr id="44" name="Shape 42"/>
+          <p:cNvSpPr/>
+          <p:nvPr/>
+        </p:nvSpPr>
+        <p:spPr>
+          <a:xfrm>
+            <a:off x="1897380" y="3881628"/>
+            <a:ext cx="201168" cy="201168"/>
+          </a:xfrm>
+          <a:prstGeom prst="roundRect">
+            <a:avLst>
+              <a:gd name="adj" fmla="val 13636"/>
+            </a:avLst>
+          </a:prstGeom>
+          <a:solidFill>
+            <a:srgbClr val="006FCF"/>
+          </a:solidFill>
+          <a:ln/>
+        </p:spPr>
+      </p:sp>
+      <p:sp>
+        <p:nvSpPr>
+          <p:cNvPr id="45" name="Shape 43"/>
+          <p:cNvSpPr/>
+          <p:nvPr/>
+        </p:nvSpPr>
+        <p:spPr>
+          <a:xfrm>
+            <a:off x="2139696" y="3881628"/>
+            <a:ext cx="201168" cy="201168"/>
+          </a:xfrm>
+          <a:prstGeom prst="roundRect">
+            <a:avLst>
+              <a:gd name="adj" fmla="val 13636"/>
+            </a:avLst>
+          </a:prstGeom>
+          <a:solidFill>
+            <a:srgbClr val="006FCF"/>
+          </a:solidFill>
+          <a:ln/>
+        </p:spPr>
+      </p:sp>
+      <p:sp>
+        <p:nvSpPr>
+          <p:cNvPr id="46" name="Shape 44"/>
+          <p:cNvSpPr/>
+          <p:nvPr/>
+        </p:nvSpPr>
+        <p:spPr>
+          <a:xfrm>
+            <a:off x="2382012" y="3881628"/>
+            <a:ext cx="201168" cy="201168"/>
+          </a:xfrm>
+          <a:prstGeom prst="roundRect">
+            <a:avLst>
+              <a:gd name="adj" fmla="val 13636"/>
+            </a:avLst>
+          </a:prstGeom>
+          <a:solidFill>
+            <a:srgbClr val="006FCF"/>
+          </a:solidFill>
+          <a:ln/>
+        </p:spPr>
+      </p:sp>
+      <p:sp>
+        <p:nvSpPr>
+          <p:cNvPr id="47" name="Shape 45"/>
+          <p:cNvSpPr/>
+          <p:nvPr/>
+        </p:nvSpPr>
+        <p:spPr>
+          <a:xfrm>
+            <a:off x="2624328" y="3881628"/>
+            <a:ext cx="201168" cy="201168"/>
+          </a:xfrm>
+          <a:prstGeom prst="roundRect">
+            <a:avLst>
+              <a:gd name="adj" fmla="val 13636"/>
+            </a:avLst>
+          </a:prstGeom>
+          <a:solidFill>
+            <a:srgbClr val="006FCF"/>
+          </a:solidFill>
+          <a:ln/>
+        </p:spPr>
+      </p:sp>
+      <p:sp>
+        <p:nvSpPr>
+          <p:cNvPr id="48" name="Shape 46"/>
+          <p:cNvSpPr/>
+          <p:nvPr/>
+        </p:nvSpPr>
+        <p:spPr>
+          <a:xfrm>
+            <a:off x="2866644" y="3881628"/>
+            <a:ext cx="201168" cy="201168"/>
+          </a:xfrm>
+          <a:prstGeom prst="roundRect">
+            <a:avLst>
+              <a:gd name="adj" fmla="val 13636"/>
+            </a:avLst>
+          </a:prstGeom>
+          <a:solidFill>
+            <a:srgbClr val="006FCF"/>
+          </a:solidFill>
+          <a:ln/>
+        </p:spPr>
+      </p:sp>
+      <p:sp>
+        <p:nvSpPr>
+          <p:cNvPr id="49" name="Shape 47"/>
+          <p:cNvSpPr/>
+          <p:nvPr/>
+        </p:nvSpPr>
+        <p:spPr>
+          <a:xfrm>
+            <a:off x="685800" y="4123944"/>
+            <a:ext cx="201168" cy="201168"/>
+          </a:xfrm>
+          <a:prstGeom prst="roundRect">
+            <a:avLst>
+              <a:gd name="adj" fmla="val 13636"/>
+            </a:avLst>
+          </a:prstGeom>
+          <a:solidFill>
+            <a:srgbClr val="006FCF"/>
+          </a:solidFill>
+          <a:ln/>
+        </p:spPr>
+      </p:sp>
+      <p:sp>
+        <p:nvSpPr>
+          <p:cNvPr id="50" name="Shape 48"/>
+          <p:cNvSpPr/>
+          <p:nvPr/>
+        </p:nvSpPr>
+        <p:spPr>
+          <a:xfrm>
+            <a:off x="928116" y="4123944"/>
+            <a:ext cx="201168" cy="201168"/>
+          </a:xfrm>
+          <a:prstGeom prst="roundRect">
+            <a:avLst>
+              <a:gd name="adj" fmla="val 13636"/>
+            </a:avLst>
+          </a:prstGeom>
+          <a:solidFill>
+            <a:srgbClr val="006FCF"/>
+          </a:solidFill>
+          <a:ln/>
+        </p:spPr>
+      </p:sp>
+      <p:sp>
+        <p:nvSpPr>
+          <p:cNvPr id="51" name="Shape 49"/>
+          <p:cNvSpPr/>
+          <p:nvPr/>
+        </p:nvSpPr>
+        <p:spPr>
+          <a:xfrm>
+            <a:off x="1170432" y="4123944"/>
+            <a:ext cx="201168" cy="201168"/>
+          </a:xfrm>
+          <a:prstGeom prst="roundRect">
+            <a:avLst>
+              <a:gd name="adj" fmla="val 13636"/>
+            </a:avLst>
+          </a:prstGeom>
+          <a:solidFill>
+            <a:srgbClr val="006FCF"/>
+          </a:solidFill>
+          <a:ln/>
+        </p:spPr>
+      </p:sp>
+      <p:sp>
+        <p:nvSpPr>
+          <p:cNvPr id="52" name="Shape 50"/>
+          <p:cNvSpPr/>
+          <p:nvPr/>
+        </p:nvSpPr>
+        <p:spPr>
+          <a:xfrm>
+            <a:off x="1412748" y="4123944"/>
+            <a:ext cx="201168" cy="201168"/>
+          </a:xfrm>
+          <a:prstGeom prst="roundRect">
+            <a:avLst>
+              <a:gd name="adj" fmla="val 13636"/>
+            </a:avLst>
+          </a:prstGeom>
+          <a:solidFill>
+            <a:srgbClr val="006FCF"/>
+          </a:solidFill>
+          <a:ln/>
+        </p:spPr>
+      </p:sp>
+      <p:sp>
+        <p:nvSpPr>
+          <p:cNvPr id="53" name="Shape 51"/>
+          <p:cNvSpPr/>
+          <p:nvPr/>
+        </p:nvSpPr>
+        <p:spPr>
+          <a:xfrm>
+            <a:off x="1655064" y="4123944"/>
+            <a:ext cx="201168" cy="201168"/>
+          </a:xfrm>
+          <a:prstGeom prst="roundRect">
+            <a:avLst>
+              <a:gd name="adj" fmla="val 13636"/>
+            </a:avLst>
+          </a:prstGeom>
+          <a:solidFill>
+            <a:srgbClr val="006FCF"/>
+          </a:solidFill>
+          <a:ln/>
+        </p:spPr>
+      </p:sp>
+      <p:sp>
+        <p:nvSpPr>
+          <p:cNvPr id="54" name="Shape 52"/>
+          <p:cNvSpPr/>
+          <p:nvPr/>
+        </p:nvSpPr>
+        <p:spPr>
+          <a:xfrm>
+            <a:off x="1897380" y="4123944"/>
+            <a:ext cx="201168" cy="201168"/>
+          </a:xfrm>
+          <a:prstGeom prst="roundRect">
+            <a:avLst>
+              <a:gd name="adj" fmla="val 13636"/>
+            </a:avLst>
+          </a:prstGeom>
+          <a:solidFill>
+            <a:srgbClr val="006FCF"/>
+          </a:solidFill>
+          <a:ln/>
+        </p:spPr>
+      </p:sp>
+      <p:sp>
+        <p:nvSpPr>
+          <p:cNvPr id="55" name="Shape 53"/>
+          <p:cNvSpPr/>
+          <p:nvPr/>
+        </p:nvSpPr>
+        <p:spPr>
+          <a:xfrm>
+            <a:off x="2139696" y="4123944"/>
+            <a:ext cx="201168" cy="201168"/>
+          </a:xfrm>
+          <a:prstGeom prst="roundRect">
+            <a:avLst>
+              <a:gd name="adj" fmla="val 13636"/>
+            </a:avLst>
+          </a:prstGeom>
+          <a:solidFill>
+            <a:srgbClr val="006FCF"/>
+          </a:solidFill>
+          <a:ln/>
+        </p:spPr>
+      </p:sp>
+      <p:sp>
+        <p:nvSpPr>
+          <p:cNvPr id="56" name="Shape 54"/>
+          <p:cNvSpPr/>
+          <p:nvPr/>
+        </p:nvSpPr>
+        <p:spPr>
+          <a:xfrm>
+            <a:off x="2382012" y="4123944"/>
+            <a:ext cx="201168" cy="201168"/>
+          </a:xfrm>
+          <a:prstGeom prst="roundRect">
+            <a:avLst>
+              <a:gd name="adj" fmla="val 13636"/>
+            </a:avLst>
+          </a:prstGeom>
+          <a:solidFill>
+            <a:srgbClr val="006FCF"/>
+          </a:solidFill>
+          <a:ln/>
+        </p:spPr>
+      </p:sp>
+      <p:sp>
+        <p:nvSpPr>
+          <p:cNvPr id="57" name="Shape 55"/>
+          <p:cNvSpPr/>
+          <p:nvPr/>
+        </p:nvSpPr>
+        <p:spPr>
+          <a:xfrm>
+            <a:off x="2624328" y="4123944"/>
+            <a:ext cx="201168" cy="201168"/>
+          </a:xfrm>
+          <a:prstGeom prst="roundRect">
+            <a:avLst>
+              <a:gd name="adj" fmla="val 13636"/>
+            </a:avLst>
+          </a:prstGeom>
+          <a:solidFill>
+            <a:srgbClr val="006FCF"/>
+          </a:solidFill>
+          <a:ln/>
+        </p:spPr>
+      </p:sp>
+      <p:sp>
+        <p:nvSpPr>
+          <p:cNvPr id="58" name="Shape 56"/>
+          <p:cNvSpPr/>
+          <p:nvPr/>
+        </p:nvSpPr>
+        <p:spPr>
+          <a:xfrm>
+            <a:off x="2866644" y="4123944"/>
+            <a:ext cx="201168" cy="201168"/>
+          </a:xfrm>
+          <a:prstGeom prst="roundRect">
+            <a:avLst>
+              <a:gd name="adj" fmla="val 13636"/>
+            </a:avLst>
+          </a:prstGeom>
+          <a:solidFill>
+            <a:srgbClr val="006FCF"/>
+          </a:solidFill>
+          <a:ln/>
+        </p:spPr>
+      </p:sp>
+      <p:sp>
+        <p:nvSpPr>
+          <p:cNvPr id="59" name="Shape 57"/>
+          <p:cNvSpPr/>
+          <p:nvPr/>
+        </p:nvSpPr>
+        <p:spPr>
+          <a:xfrm>
+            <a:off x="685800" y="4366260"/>
+            <a:ext cx="201168" cy="201168"/>
+          </a:xfrm>
+          <a:prstGeom prst="roundRect">
+            <a:avLst>
+              <a:gd name="adj" fmla="val 13636"/>
+            </a:avLst>
+          </a:prstGeom>
+          <a:solidFill>
+            <a:srgbClr val="006FCF"/>
+          </a:solidFill>
+          <a:ln/>
+        </p:spPr>
+      </p:sp>
+      <p:sp>
+        <p:nvSpPr>
+          <p:cNvPr id="60" name="Shape 58"/>
+          <p:cNvSpPr/>
+          <p:nvPr/>
+        </p:nvSpPr>
+        <p:spPr>
+          <a:xfrm>
+            <a:off x="928116" y="4366260"/>
+            <a:ext cx="201168" cy="201168"/>
+          </a:xfrm>
+          <a:prstGeom prst="roundRect">
+            <a:avLst>
+              <a:gd name="adj" fmla="val 13636"/>
+            </a:avLst>
+          </a:prstGeom>
+          <a:solidFill>
+            <a:srgbClr val="006FCF"/>
+          </a:solidFill>
+          <a:ln/>
+        </p:spPr>
+      </p:sp>
+      <p:sp>
+        <p:nvSpPr>
+          <p:cNvPr id="61" name="Shape 59"/>
+          <p:cNvSpPr/>
+          <p:nvPr/>
+        </p:nvSpPr>
+        <p:spPr>
+          <a:xfrm>
+            <a:off x="1170432" y="4366260"/>
+            <a:ext cx="201168" cy="201168"/>
+          </a:xfrm>
+          <a:prstGeom prst="roundRect">
+            <a:avLst>
+              <a:gd name="adj" fmla="val 13636"/>
+            </a:avLst>
+          </a:prstGeom>
+          <a:solidFill>
+            <a:srgbClr val="006FCF"/>
+          </a:solidFill>
+          <a:ln/>
+        </p:spPr>
+      </p:sp>
+      <p:sp>
+        <p:nvSpPr>
+          <p:cNvPr id="62" name="Shape 60"/>
+          <p:cNvSpPr/>
+          <p:nvPr/>
+        </p:nvSpPr>
+        <p:spPr>
+          <a:xfrm>
+            <a:off x="1412748" y="4366260"/>
+            <a:ext cx="201168" cy="201168"/>
+          </a:xfrm>
+          <a:prstGeom prst="roundRect">
+            <a:avLst>
+              <a:gd name="adj" fmla="val 13636"/>
+            </a:avLst>
+          </a:prstGeom>
+          <a:solidFill>
+            <a:srgbClr val="006FCF"/>
+          </a:solidFill>
+          <a:ln/>
+        </p:spPr>
+      </p:sp>
+      <p:sp>
+        <p:nvSpPr>
+          <p:cNvPr id="63" name="Shape 61"/>
+          <p:cNvSpPr/>
+          <p:nvPr/>
+        </p:nvSpPr>
+        <p:spPr>
+          <a:xfrm>
+            <a:off x="1655064" y="4366260"/>
+            <a:ext cx="201168" cy="201168"/>
+          </a:xfrm>
+          <a:prstGeom prst="roundRect">
+            <a:avLst>
+              <a:gd name="adj" fmla="val 13636"/>
+            </a:avLst>
+          </a:prstGeom>
+          <a:solidFill>
+            <a:srgbClr val="006FCF"/>
+          </a:solidFill>
+          <a:ln/>
+        </p:spPr>
+      </p:sp>
+      <p:sp>
+        <p:nvSpPr>
+          <p:cNvPr id="64" name="Shape 62"/>
+          <p:cNvSpPr/>
+          <p:nvPr/>
+        </p:nvSpPr>
+        <p:spPr>
+          <a:xfrm>
+            <a:off x="1897380" y="4366260"/>
+            <a:ext cx="201168" cy="201168"/>
+          </a:xfrm>
+          <a:prstGeom prst="roundRect">
+            <a:avLst>
+              <a:gd name="adj" fmla="val 13636"/>
+            </a:avLst>
+          </a:prstGeom>
+          <a:solidFill>
+            <a:srgbClr val="006FCF"/>
+          </a:solidFill>
+          <a:ln/>
+        </p:spPr>
+      </p:sp>
+      <p:sp>
+        <p:nvSpPr>
+          <p:cNvPr id="65" name="Shape 63"/>
+          <p:cNvSpPr/>
+          <p:nvPr/>
+        </p:nvSpPr>
+        <p:spPr>
+          <a:xfrm>
+            <a:off x="2139696" y="4366260"/>
+            <a:ext cx="201168" cy="201168"/>
+          </a:xfrm>
+          <a:prstGeom prst="roundRect">
+            <a:avLst>
+              <a:gd name="adj" fmla="val 13636"/>
+            </a:avLst>
+          </a:prstGeom>
+          <a:solidFill>
+            <a:srgbClr val="006FCF"/>
+          </a:solidFill>
+          <a:ln/>
+        </p:spPr>
+      </p:sp>
+      <p:sp>
+        <p:nvSpPr>
+          <p:cNvPr id="66" name="Shape 64"/>
+          <p:cNvSpPr/>
+          <p:nvPr/>
+        </p:nvSpPr>
+        <p:spPr>
+          <a:xfrm>
+            <a:off x="2382012" y="4366260"/>
+            <a:ext cx="201168" cy="201168"/>
+          </a:xfrm>
+          <a:prstGeom prst="roundRect">
+            <a:avLst>
+              <a:gd name="adj" fmla="val 13636"/>
+            </a:avLst>
+          </a:prstGeom>
+          <a:solidFill>
+            <a:srgbClr val="006FCF"/>
+          </a:solidFill>
+          <a:ln/>
+        </p:spPr>
+      </p:sp>
+      <p:sp>
+        <p:nvSpPr>
+          <p:cNvPr id="67" name="Shape 65"/>
+          <p:cNvSpPr/>
+          <p:nvPr/>
+        </p:nvSpPr>
+        <p:spPr>
+          <a:xfrm>
+            <a:off x="2624328" y="4366260"/>
+            <a:ext cx="201168" cy="201168"/>
+          </a:xfrm>
+          <a:prstGeom prst="roundRect">
+            <a:avLst>
+              <a:gd name="adj" fmla="val 13636"/>
+            </a:avLst>
+          </a:prstGeom>
+          <a:solidFill>
+            <a:srgbClr val="006FCF"/>
+          </a:solidFill>
+          <a:ln/>
+        </p:spPr>
+      </p:sp>
+      <p:sp>
+        <p:nvSpPr>
+          <p:cNvPr id="68" name="Shape 66"/>
+          <p:cNvSpPr/>
+          <p:nvPr/>
+        </p:nvSpPr>
+        <p:spPr>
+          <a:xfrm>
+            <a:off x="2866644" y="4366260"/>
+            <a:ext cx="201168" cy="201168"/>
+          </a:xfrm>
+          <a:prstGeom prst="roundRect">
+            <a:avLst>
+              <a:gd name="adj" fmla="val 13636"/>
+            </a:avLst>
+          </a:prstGeom>
+          <a:solidFill>
+            <a:srgbClr val="006FCF"/>
+          </a:solidFill>
+          <a:ln/>
+        </p:spPr>
+      </p:sp>
+      <p:sp>
+        <p:nvSpPr>
+          <p:cNvPr id="69" name="Shape 67"/>
+          <p:cNvSpPr/>
+          <p:nvPr/>
+        </p:nvSpPr>
+        <p:spPr>
+          <a:xfrm>
+            <a:off x="685800" y="4608576"/>
+            <a:ext cx="201168" cy="201168"/>
+          </a:xfrm>
+          <a:prstGeom prst="roundRect">
+            <a:avLst>
+              <a:gd name="adj" fmla="val 13636"/>
+            </a:avLst>
+          </a:prstGeom>
+          <a:solidFill>
+            <a:srgbClr val="006FCF"/>
+          </a:solidFill>
+          <a:ln/>
+        </p:spPr>
+      </p:sp>
+      <p:sp>
+        <p:nvSpPr>
+          <p:cNvPr id="70" name="Shape 68"/>
+          <p:cNvSpPr/>
+          <p:nvPr/>
+        </p:nvSpPr>
+        <p:spPr>
+          <a:xfrm>
+            <a:off x="928116" y="4608576"/>
+            <a:ext cx="201168" cy="201168"/>
+          </a:xfrm>
+          <a:prstGeom prst="roundRect">
+            <a:avLst>
+              <a:gd name="adj" fmla="val 13636"/>
+            </a:avLst>
+          </a:prstGeom>
+          <a:solidFill>
+            <a:srgbClr val="006FCF"/>
+          </a:solidFill>
+          <a:ln/>
+        </p:spPr>
+      </p:sp>
+      <p:sp>
+        <p:nvSpPr>
+          <p:cNvPr id="71" name="Shape 69"/>
+          <p:cNvSpPr/>
+          <p:nvPr/>
+        </p:nvSpPr>
+        <p:spPr>
+          <a:xfrm>
+            <a:off x="1170432" y="4608576"/>
+            <a:ext cx="201168" cy="201168"/>
+          </a:xfrm>
+          <a:prstGeom prst="roundRect">
+            <a:avLst>
+              <a:gd name="adj" fmla="val 13636"/>
+            </a:avLst>
+          </a:prstGeom>
+          <a:solidFill>
+            <a:srgbClr val="006FCF"/>
+          </a:solidFill>
+          <a:ln/>
+        </p:spPr>
+      </p:sp>
+      <p:sp>
+        <p:nvSpPr>
+          <p:cNvPr id="72" name="Shape 70"/>
+          <p:cNvSpPr/>
+          <p:nvPr/>
+        </p:nvSpPr>
+        <p:spPr>
+          <a:xfrm>
+            <a:off x="1412748" y="4608576"/>
+            <a:ext cx="201168" cy="201168"/>
+          </a:xfrm>
+          <a:prstGeom prst="roundRect">
+            <a:avLst>
+              <a:gd name="adj" fmla="val 13636"/>
+            </a:avLst>
+          </a:prstGeom>
+          <a:solidFill>
+            <a:srgbClr val="006FCF"/>
+          </a:solidFill>
+          <a:ln/>
+        </p:spPr>
+      </p:sp>
+      <p:sp>
+        <p:nvSpPr>
+          <p:cNvPr id="73" name="Shape 71"/>
+          <p:cNvSpPr/>
+          <p:nvPr/>
+        </p:nvSpPr>
+        <p:spPr>
+          <a:xfrm>
+            <a:off x="1655064" y="4608576"/>
+            <a:ext cx="201168" cy="201168"/>
+          </a:xfrm>
+          <a:prstGeom prst="roundRect">
+            <a:avLst>
+              <a:gd name="adj" fmla="val 13636"/>
+            </a:avLst>
+          </a:prstGeom>
+          <a:solidFill>
+            <a:srgbClr val="006FCF"/>
+          </a:solidFill>
+          <a:ln/>
+        </p:spPr>
+      </p:sp>
+      <p:sp>
+        <p:nvSpPr>
+          <p:cNvPr id="74" name="Shape 72"/>
+          <p:cNvSpPr/>
+          <p:nvPr/>
+        </p:nvSpPr>
+        <p:spPr>
+          <a:xfrm>
+            <a:off x="1897380" y="4608576"/>
+            <a:ext cx="201168" cy="201168"/>
+          </a:xfrm>
+          <a:prstGeom prst="roundRect">
+            <a:avLst>
+              <a:gd name="adj" fmla="val 13636"/>
+            </a:avLst>
+          </a:prstGeom>
+          <a:solidFill>
+            <a:srgbClr val="006FCF"/>
+          </a:solidFill>
+          <a:ln/>
+        </p:spPr>
+      </p:sp>
+      <p:sp>
+        <p:nvSpPr>
+          <p:cNvPr id="75" name="Shape 73"/>
+          <p:cNvSpPr/>
+          <p:nvPr/>
+        </p:nvSpPr>
+        <p:spPr>
+          <a:xfrm>
+            <a:off x="2139696" y="4608576"/>
+            <a:ext cx="201168" cy="201168"/>
+          </a:xfrm>
+          <a:prstGeom prst="roundRect">
+            <a:avLst>
+              <a:gd name="adj" fmla="val 13636"/>
+            </a:avLst>
+          </a:prstGeom>
+          <a:solidFill>
+            <a:srgbClr val="006FCF"/>
+          </a:solidFill>
+          <a:ln/>
+        </p:spPr>
+      </p:sp>
+      <p:sp>
+        <p:nvSpPr>
+          <p:cNvPr id="76" name="Shape 74"/>
+          <p:cNvSpPr/>
+          <p:nvPr/>
+        </p:nvSpPr>
+        <p:spPr>
+          <a:xfrm>
+            <a:off x="2382012" y="4608576"/>
+            <a:ext cx="201168" cy="201168"/>
+          </a:xfrm>
+          <a:prstGeom prst="roundRect">
+            <a:avLst>
+              <a:gd name="adj" fmla="val 13636"/>
+            </a:avLst>
+          </a:prstGeom>
+          <a:solidFill>
+            <a:srgbClr val="006FCF"/>
+          </a:solidFill>
+          <a:ln/>
+        </p:spPr>
+      </p:sp>
+      <p:sp>
+        <p:nvSpPr>
+          <p:cNvPr id="77" name="Shape 75"/>
+          <p:cNvSpPr/>
+          <p:nvPr/>
+        </p:nvSpPr>
+        <p:spPr>
+          <a:xfrm>
+            <a:off x="2624328" y="4608576"/>
+            <a:ext cx="201168" cy="201168"/>
+          </a:xfrm>
+          <a:prstGeom prst="roundRect">
+            <a:avLst>
+              <a:gd name="adj" fmla="val 13636"/>
+            </a:avLst>
+          </a:prstGeom>
+          <a:solidFill>
+            <a:srgbClr val="006FCF"/>
+          </a:solidFill>
+          <a:ln/>
+        </p:spPr>
+      </p:sp>
+      <p:sp>
+        <p:nvSpPr>
+          <p:cNvPr id="78" name="Shape 76"/>
+          <p:cNvSpPr/>
+          <p:nvPr/>
+        </p:nvSpPr>
+        <p:spPr>
+          <a:xfrm>
+            <a:off x="2866644" y="4608576"/>
+            <a:ext cx="201168" cy="201168"/>
+          </a:xfrm>
+          <a:prstGeom prst="roundRect">
+            <a:avLst>
+              <a:gd name="adj" fmla="val 13636"/>
+            </a:avLst>
+          </a:prstGeom>
+          <a:solidFill>
+            <a:srgbClr val="006FCF"/>
+          </a:solidFill>
+          <a:ln/>
+        </p:spPr>
+      </p:sp>
+      <p:sp>
+        <p:nvSpPr>
+          <p:cNvPr id="79" name="Shape 77"/>
+          <p:cNvSpPr/>
+          <p:nvPr/>
+        </p:nvSpPr>
+        <p:spPr>
+          <a:xfrm>
+            <a:off x="685800" y="4850892"/>
+            <a:ext cx="201168" cy="201168"/>
+          </a:xfrm>
+          <a:prstGeom prst="roundRect">
+            <a:avLst>
+              <a:gd name="adj" fmla="val 13636"/>
+            </a:avLst>
+          </a:prstGeom>
+          <a:solidFill>
+            <a:srgbClr val="006FCF"/>
+          </a:solidFill>
+          <a:ln/>
+        </p:spPr>
+      </p:sp>
+      <p:sp>
+        <p:nvSpPr>
+          <p:cNvPr id="80" name="Shape 78"/>
+          <p:cNvSpPr/>
+          <p:nvPr/>
+        </p:nvSpPr>
+        <p:spPr>
+          <a:xfrm>
+            <a:off x="928116" y="4850892"/>
+            <a:ext cx="201168" cy="201168"/>
+          </a:xfrm>
+          <a:prstGeom prst="roundRect">
+            <a:avLst>
+              <a:gd name="adj" fmla="val 13636"/>
+            </a:avLst>
+          </a:prstGeom>
+          <a:solidFill>
+            <a:srgbClr val="006FCF"/>
+          </a:solidFill>
+          <a:ln/>
+        </p:spPr>
+      </p:sp>
+      <p:sp>
+        <p:nvSpPr>
+          <p:cNvPr id="81" name="Shape 79"/>
+          <p:cNvSpPr/>
+          <p:nvPr/>
+        </p:nvSpPr>
+        <p:spPr>
+          <a:xfrm>
+            <a:off x="1170432" y="4850892"/>
+            <a:ext cx="201168" cy="201168"/>
+          </a:xfrm>
+          <a:prstGeom prst="roundRect">
+            <a:avLst>
+              <a:gd name="adj" fmla="val 13636"/>
+            </a:avLst>
+          </a:prstGeom>
+          <a:solidFill>
+            <a:srgbClr val="006FCF"/>
+          </a:solidFill>
+          <a:ln/>
+        </p:spPr>
+      </p:sp>
+      <p:sp>
+        <p:nvSpPr>
+          <p:cNvPr id="82" name="Shape 80"/>
+          <p:cNvSpPr/>
+          <p:nvPr/>
+        </p:nvSpPr>
+        <p:spPr>
+          <a:xfrm>
+            <a:off x="1412748" y="4850892"/>
+            <a:ext cx="201168" cy="201168"/>
+          </a:xfrm>
+          <a:prstGeom prst="roundRect">
+            <a:avLst>
+              <a:gd name="adj" fmla="val 13636"/>
+            </a:avLst>
+          </a:prstGeom>
+          <a:solidFill>
+            <a:srgbClr val="006FCF"/>
+          </a:solidFill>
+          <a:ln/>
+        </p:spPr>
+      </p:sp>
+      <p:sp>
+        <p:nvSpPr>
+          <p:cNvPr id="83" name="Shape 81"/>
+          <p:cNvSpPr/>
+          <p:nvPr/>
+        </p:nvSpPr>
+        <p:spPr>
+          <a:xfrm>
+            <a:off x="1655064" y="4850892"/>
+            <a:ext cx="201168" cy="201168"/>
+          </a:xfrm>
+          <a:prstGeom prst="roundRect">
+            <a:avLst>
+              <a:gd name="adj" fmla="val 13636"/>
+            </a:avLst>
+          </a:prstGeom>
+          <a:solidFill>
+            <a:srgbClr val="006FCF"/>
+          </a:solidFill>
+          <a:ln/>
+        </p:spPr>
+      </p:sp>
+      <p:sp>
+        <p:nvSpPr>
+          <p:cNvPr id="84" name="Shape 82"/>
+          <p:cNvSpPr/>
+          <p:nvPr/>
+        </p:nvSpPr>
+        <p:spPr>
+          <a:xfrm>
+            <a:off x="1897380" y="4850892"/>
+            <a:ext cx="201168" cy="201168"/>
+          </a:xfrm>
+          <a:prstGeom prst="roundRect">
+            <a:avLst>
+              <a:gd name="adj" fmla="val 13636"/>
+            </a:avLst>
+          </a:prstGeom>
+          <a:solidFill>
+            <a:srgbClr val="006FCF"/>
+          </a:solidFill>
+          <a:ln/>
+        </p:spPr>
+      </p:sp>
+      <p:sp>
+        <p:nvSpPr>
+          <p:cNvPr id="85" name="Shape 83"/>
+          <p:cNvSpPr/>
+          <p:nvPr/>
+        </p:nvSpPr>
+        <p:spPr>
+          <a:xfrm>
+            <a:off x="2139696" y="4850892"/>
+            <a:ext cx="201168" cy="201168"/>
+          </a:xfrm>
+          <a:prstGeom prst="roundRect">
+            <a:avLst>
+              <a:gd name="adj" fmla="val 13636"/>
+            </a:avLst>
+          </a:prstGeom>
+          <a:solidFill>
+            <a:srgbClr val="006FCF"/>
+          </a:solidFill>
+          <a:ln/>
+        </p:spPr>
+      </p:sp>
+      <p:sp>
+        <p:nvSpPr>
+          <p:cNvPr id="86" name="Shape 84"/>
+          <p:cNvSpPr/>
+          <p:nvPr/>
+        </p:nvSpPr>
+        <p:spPr>
+          <a:xfrm>
+            <a:off x="2382012" y="4850892"/>
+            <a:ext cx="201168" cy="201168"/>
+          </a:xfrm>
+          <a:prstGeom prst="roundRect">
+            <a:avLst>
+              <a:gd name="adj" fmla="val 13636"/>
+            </a:avLst>
+          </a:prstGeom>
+          <a:solidFill>
+            <a:srgbClr val="006FCF"/>
+          </a:solidFill>
+          <a:ln/>
+        </p:spPr>
+      </p:sp>
+      <p:sp>
+        <p:nvSpPr>
+          <p:cNvPr id="87" name="Shape 85"/>
+          <p:cNvSpPr/>
+          <p:nvPr/>
+        </p:nvSpPr>
+        <p:spPr>
+          <a:xfrm>
+            <a:off x="2624328" y="4850892"/>
+            <a:ext cx="201168" cy="201168"/>
+          </a:xfrm>
+          <a:prstGeom prst="roundRect">
+            <a:avLst>
+              <a:gd name="adj" fmla="val 13636"/>
+            </a:avLst>
+          </a:prstGeom>
+          <a:solidFill>
+            <a:srgbClr val="006FCF"/>
+          </a:solidFill>
+          <a:ln/>
+        </p:spPr>
+      </p:sp>
+      <p:sp>
+        <p:nvSpPr>
+          <p:cNvPr id="88" name="Shape 86"/>
+          <p:cNvSpPr/>
+          <p:nvPr/>
+        </p:nvSpPr>
+        <p:spPr>
+          <a:xfrm>
+            <a:off x="2866644" y="4850892"/>
+            <a:ext cx="201168" cy="201168"/>
+          </a:xfrm>
+          <a:prstGeom prst="roundRect">
+            <a:avLst>
+              <a:gd name="adj" fmla="val 13636"/>
+            </a:avLst>
+          </a:prstGeom>
+          <a:solidFill>
+            <a:srgbClr val="006FCF"/>
+          </a:solidFill>
+          <a:ln/>
+        </p:spPr>
+      </p:sp>
+      <p:sp>
+        <p:nvSpPr>
+          <p:cNvPr id="89" name="Shape 87"/>
+          <p:cNvSpPr/>
+          <p:nvPr/>
+        </p:nvSpPr>
+        <p:spPr>
+          <a:xfrm>
+            <a:off x="685800" y="5093208"/>
+            <a:ext cx="201168" cy="201168"/>
+          </a:xfrm>
+          <a:prstGeom prst="roundRect">
+            <a:avLst>
+              <a:gd name="adj" fmla="val 13636"/>
+            </a:avLst>
+          </a:prstGeom>
+          <a:solidFill>
+            <a:srgbClr val="006FCF"/>
+          </a:solidFill>
+          <a:ln/>
+        </p:spPr>
+      </p:sp>
+      <p:sp>
+        <p:nvSpPr>
+          <p:cNvPr id="90" name="Shape 88"/>
+          <p:cNvSpPr/>
+          <p:nvPr/>
+        </p:nvSpPr>
+        <p:spPr>
+          <a:xfrm>
+            <a:off x="928116" y="5093208"/>
+            <a:ext cx="201168" cy="201168"/>
+          </a:xfrm>
+          <a:prstGeom prst="roundRect">
+            <a:avLst>
+              <a:gd name="adj" fmla="val 13636"/>
+            </a:avLst>
+          </a:prstGeom>
+          <a:solidFill>
+            <a:srgbClr val="006FCF"/>
+          </a:solidFill>
+          <a:ln/>
+        </p:spPr>
+      </p:sp>
+      <p:sp>
+        <p:nvSpPr>
+          <p:cNvPr id="91" name="Shape 89"/>
+          <p:cNvSpPr/>
+          <p:nvPr/>
+        </p:nvSpPr>
+        <p:spPr>
+          <a:xfrm>
+            <a:off x="1170432" y="5093208"/>
+            <a:ext cx="201168" cy="201168"/>
+          </a:xfrm>
+          <a:prstGeom prst="roundRect">
+            <a:avLst>
+              <a:gd name="adj" fmla="val 13636"/>
+            </a:avLst>
+          </a:prstGeom>
+          <a:solidFill>
+            <a:srgbClr val="006FCF"/>
+          </a:solidFill>
+          <a:ln/>
+        </p:spPr>
+      </p:sp>
+      <p:sp>
+        <p:nvSpPr>
+          <p:cNvPr id="92" name="Shape 90"/>
+          <p:cNvSpPr/>
+          <p:nvPr/>
+        </p:nvSpPr>
+        <p:spPr>
+          <a:xfrm>
+            <a:off x="1412748" y="5093208"/>
+            <a:ext cx="201168" cy="201168"/>
+          </a:xfrm>
+          <a:prstGeom prst="roundRect">
+            <a:avLst>
+              <a:gd name="adj" fmla="val 13636"/>
+            </a:avLst>
+          </a:prstGeom>
+          <a:solidFill>
+            <a:srgbClr val="006FCF"/>
+          </a:solidFill>
+          <a:ln/>
+        </p:spPr>
+      </p:sp>
+      <p:sp>
+        <p:nvSpPr>
+          <p:cNvPr id="93" name="Shape 91"/>
+          <p:cNvSpPr/>
+          <p:nvPr/>
+        </p:nvSpPr>
+        <p:spPr>
+          <a:xfrm>
+            <a:off x="1655064" y="5093208"/>
+            <a:ext cx="201168" cy="201168"/>
+          </a:xfrm>
+          <a:prstGeom prst="roundRect">
+            <a:avLst>
+              <a:gd name="adj" fmla="val 13636"/>
+            </a:avLst>
+          </a:prstGeom>
+          <a:solidFill>
+            <a:srgbClr val="006FCF"/>
+          </a:solidFill>
+          <a:ln/>
+        </p:spPr>
+      </p:sp>
+      <p:sp>
+        <p:nvSpPr>
+          <p:cNvPr id="94" name="Shape 92"/>
+          <p:cNvSpPr/>
+          <p:nvPr/>
+        </p:nvSpPr>
+        <p:spPr>
+          <a:xfrm>
+            <a:off x="1897380" y="5093208"/>
+            <a:ext cx="201168" cy="201168"/>
+          </a:xfrm>
+          <a:prstGeom prst="roundRect">
+            <a:avLst>
+              <a:gd name="adj" fmla="val 13636"/>
+            </a:avLst>
+          </a:prstGeom>
+          <a:solidFill>
+            <a:srgbClr val="006FCF"/>
+          </a:solidFill>
+          <a:ln/>
+        </p:spPr>
+      </p:sp>
+      <p:sp>
+        <p:nvSpPr>
+          <p:cNvPr id="95" name="Shape 93"/>
+          <p:cNvSpPr/>
+          <p:nvPr/>
+        </p:nvSpPr>
+        <p:spPr>
+          <a:xfrm>
+            <a:off x="2139696" y="5093208"/>
+            <a:ext cx="201168" cy="201168"/>
+          </a:xfrm>
+          <a:prstGeom prst="roundRect">
+            <a:avLst>
+              <a:gd name="adj" fmla="val 13636"/>
+            </a:avLst>
+          </a:prstGeom>
+          <a:solidFill>
+            <a:srgbClr val="006FCF"/>
+          </a:solidFill>
+          <a:ln/>
+        </p:spPr>
+      </p:sp>
+      <p:sp>
+        <p:nvSpPr>
+          <p:cNvPr id="96" name="Shape 94"/>
+          <p:cNvSpPr/>
+          <p:nvPr/>
+        </p:nvSpPr>
+        <p:spPr>
+          <a:xfrm>
+            <a:off x="2382012" y="5093208"/>
+            <a:ext cx="201168" cy="201168"/>
+          </a:xfrm>
+          <a:prstGeom prst="roundRect">
+            <a:avLst>
+              <a:gd name="adj" fmla="val 13636"/>
+            </a:avLst>
+          </a:prstGeom>
+          <a:solidFill>
+            <a:srgbClr val="006FCF"/>
+          </a:solidFill>
+          <a:ln/>
+        </p:spPr>
+      </p:sp>
+      <p:sp>
+        <p:nvSpPr>
+          <p:cNvPr id="97" name="Shape 95"/>
+          <p:cNvSpPr/>
+          <p:nvPr/>
+        </p:nvSpPr>
+        <p:spPr>
+          <a:xfrm>
+            <a:off x="2624328" y="5093208"/>
+            <a:ext cx="201168" cy="201168"/>
+          </a:xfrm>
+          <a:prstGeom prst="roundRect">
+            <a:avLst>
+              <a:gd name="adj" fmla="val 13636"/>
+            </a:avLst>
+          </a:prstGeom>
+          <a:solidFill>
+            <a:srgbClr val="006FCF"/>
+          </a:solidFill>
+          <a:ln/>
+        </p:spPr>
+      </p:sp>
+      <p:sp>
+        <p:nvSpPr>
+          <p:cNvPr id="98" name="Shape 96"/>
+          <p:cNvSpPr/>
+          <p:nvPr/>
+        </p:nvSpPr>
+        <p:spPr>
+          <a:xfrm>
+            <a:off x="2866644" y="5093208"/>
+            <a:ext cx="201168" cy="201168"/>
+          </a:xfrm>
+          <a:prstGeom prst="roundRect">
+            <a:avLst>
+              <a:gd name="adj" fmla="val 13636"/>
+            </a:avLst>
+          </a:prstGeom>
+          <a:solidFill>
+            <a:srgbClr val="006FCF"/>
+          </a:solidFill>
+          <a:ln/>
+        </p:spPr>
+      </p:sp>
+      <p:sp>
+        <p:nvSpPr>
+          <p:cNvPr id="99" name="Shape 97"/>
+          <p:cNvSpPr/>
+          <p:nvPr/>
+        </p:nvSpPr>
+        <p:spPr>
+          <a:xfrm>
+            <a:off x="685800" y="5335524"/>
+            <a:ext cx="201168" cy="201168"/>
+          </a:xfrm>
+          <a:prstGeom prst="roundRect">
+            <a:avLst>
+              <a:gd name="adj" fmla="val 13636"/>
+            </a:avLst>
+          </a:prstGeom>
+          <a:solidFill>
+            <a:srgbClr val="006FCF"/>
+          </a:solidFill>
+          <a:ln/>
+        </p:spPr>
+      </p:sp>
+      <p:sp>
+        <p:nvSpPr>
+          <p:cNvPr id="100" name="Shape 98"/>
+          <p:cNvSpPr/>
+          <p:nvPr/>
+        </p:nvSpPr>
+        <p:spPr>
+          <a:xfrm>
+            <a:off x="928116" y="5335524"/>
+            <a:ext cx="201168" cy="201168"/>
+          </a:xfrm>
+          <a:prstGeom prst="roundRect">
+            <a:avLst>
+              <a:gd name="adj" fmla="val 13636"/>
+            </a:avLst>
+          </a:prstGeom>
+          <a:solidFill>
+            <a:srgbClr val="006FCF"/>
+          </a:solidFill>
+          <a:ln/>
+        </p:spPr>
+      </p:sp>
+      <p:sp>
+        <p:nvSpPr>
+          <p:cNvPr id="101" name="Shape 99"/>
+          <p:cNvSpPr/>
+          <p:nvPr/>
+        </p:nvSpPr>
+        <p:spPr>
+          <a:xfrm>
+            <a:off x="1170432" y="5335524"/>
+            <a:ext cx="201168" cy="201168"/>
+          </a:xfrm>
+          <a:prstGeom prst="roundRect">
+            <a:avLst>
+              <a:gd name="adj" fmla="val 13636"/>
+            </a:avLst>
+          </a:prstGeom>
+          <a:solidFill>
+            <a:srgbClr val="C9D2DC"/>
+          </a:solidFill>
+          <a:ln/>
+        </p:spPr>
+      </p:sp>
+      <p:sp>
+        <p:nvSpPr>
+          <p:cNvPr id="102" name="Shape 100"/>
+          <p:cNvSpPr/>
+          <p:nvPr/>
+        </p:nvSpPr>
+        <p:spPr>
+          <a:xfrm>
+            <a:off x="1412748" y="5335524"/>
+            <a:ext cx="201168" cy="201168"/>
+          </a:xfrm>
+          <a:prstGeom prst="roundRect">
+            <a:avLst>
+              <a:gd name="adj" fmla="val 13636"/>
+            </a:avLst>
+          </a:prstGeom>
+          <a:solidFill>
+            <a:srgbClr val="C9D2DC"/>
+          </a:solidFill>
+          <a:ln/>
+        </p:spPr>
+      </p:sp>
+      <p:sp>
+        <p:nvSpPr>
+          <p:cNvPr id="103" name="Shape 101"/>
+          <p:cNvSpPr/>
+          <p:nvPr/>
+        </p:nvSpPr>
+        <p:spPr>
+          <a:xfrm>
+            <a:off x="1655064" y="5335524"/>
+            <a:ext cx="201168" cy="201168"/>
+          </a:xfrm>
+          <a:prstGeom prst="roundRect">
+            <a:avLst>
+              <a:gd name="adj" fmla="val 13636"/>
+            </a:avLst>
+          </a:prstGeom>
+          <a:solidFill>
+            <a:srgbClr val="C9D2DC"/>
+          </a:solidFill>
+          <a:ln/>
+        </p:spPr>
+      </p:sp>
+      <p:sp>
+        <p:nvSpPr>
+          <p:cNvPr id="104" name="Shape 102"/>
+          <p:cNvSpPr/>
+          <p:nvPr/>
+        </p:nvSpPr>
+        <p:spPr>
+          <a:xfrm>
+            <a:off x="1897380" y="5335524"/>
+            <a:ext cx="201168" cy="201168"/>
+          </a:xfrm>
+          <a:prstGeom prst="roundRect">
+            <a:avLst>
+              <a:gd name="adj" fmla="val 13636"/>
+            </a:avLst>
+          </a:prstGeom>
+          <a:solidFill>
+            <a:srgbClr val="C9D2DC"/>
+          </a:solidFill>
+          <a:ln/>
+        </p:spPr>
+      </p:sp>
+      <p:sp>
+        <p:nvSpPr>
+          <p:cNvPr id="105" name="Shape 103"/>
+          <p:cNvSpPr/>
+          <p:nvPr/>
+        </p:nvSpPr>
+        <p:spPr>
+          <a:xfrm>
+            <a:off x="2139696" y="5335524"/>
+            <a:ext cx="201168" cy="201168"/>
+          </a:xfrm>
+          <a:prstGeom prst="roundRect">
+            <a:avLst>
+              <a:gd name="adj" fmla="val 13636"/>
+            </a:avLst>
+          </a:prstGeom>
+          <a:solidFill>
+            <a:srgbClr val="C9D2DC"/>
+          </a:solidFill>
+          <a:ln/>
+        </p:spPr>
+      </p:sp>
+      <p:sp>
+        <p:nvSpPr>
+          <p:cNvPr id="106" name="Shape 104"/>
+          <p:cNvSpPr/>
+          <p:nvPr/>
+        </p:nvSpPr>
+        <p:spPr>
+          <a:xfrm>
+            <a:off x="2382012" y="5335524"/>
+            <a:ext cx="201168" cy="201168"/>
+          </a:xfrm>
+          <a:prstGeom prst="roundRect">
+            <a:avLst>
+              <a:gd name="adj" fmla="val 13636"/>
+            </a:avLst>
+          </a:prstGeom>
+          <a:solidFill>
+            <a:srgbClr val="C9D2DC"/>
+          </a:solidFill>
+          <a:ln/>
+        </p:spPr>
+      </p:sp>
+      <p:sp>
+        <p:nvSpPr>
+          <p:cNvPr id="107" name="Shape 105"/>
+          <p:cNvSpPr/>
+          <p:nvPr/>
+        </p:nvSpPr>
+        <p:spPr>
+          <a:xfrm>
+            <a:off x="2624328" y="5335524"/>
+            <a:ext cx="201168" cy="201168"/>
+          </a:xfrm>
+          <a:prstGeom prst="roundRect">
+            <a:avLst>
+              <a:gd name="adj" fmla="val 13636"/>
+            </a:avLst>
+          </a:prstGeom>
+          <a:solidFill>
+            <a:srgbClr val="C9D2DC"/>
+          </a:solidFill>
+          <a:ln/>
+        </p:spPr>
+      </p:sp>
+      <p:sp>
+        <p:nvSpPr>
+          <p:cNvPr id="108" name="Shape 106"/>
+          <p:cNvSpPr/>
+          <p:nvPr/>
+        </p:nvSpPr>
+        <p:spPr>
+          <a:xfrm>
+            <a:off x="2866644" y="5335524"/>
+            <a:ext cx="201168" cy="201168"/>
+          </a:xfrm>
+          <a:prstGeom prst="roundRect">
+            <a:avLst>
+              <a:gd name="adj" fmla="val 13636"/>
+            </a:avLst>
+          </a:prstGeom>
+          <a:solidFill>
+            <a:srgbClr val="C9D2DC"/>
+          </a:solidFill>
+          <a:ln/>
+        </p:spPr>
+      </p:sp>
+      <p:sp>
+        <p:nvSpPr>
+          <p:cNvPr id="109" name="Text 107"/>
+          <p:cNvSpPr txBox="1"/>
+          <p:nvPr/>
+        </p:nvSpPr>
+        <p:spPr>
+          <a:xfrm>
+            <a:off x="685800" y="5596128"/>
+            <a:ext cx="2377440" cy="274320"/>
+          </a:xfrm>
+          <a:prstGeom prst="rect">
+            <a:avLst/>
+          </a:prstGeom>
+          <a:noFill/>
+          <a:ln/>
+        </p:spPr>
+        <p:txBody>
+          <a:bodyPr wrap="square" lIns="0" tIns="0" rIns="0" bIns="0" rtlCol="0" anchor="ctr"/>
+          <a:lstStyle/>
+          <a:p>
+            <a:pPr indent="0" marL="0">
+              <a:buNone/>
+            </a:pPr>
+            <a:r>
+              <a:rPr lang="en-US" sz="1000" i="1" dirty="0">
+                <a:solidFill>
+                  <a:srgbClr val="8C959E"/>
+                </a:solidFill>
+                <a:latin typeface="Calibri" pitchFamily="34" charset="0"/>
+                <a:ea typeface="Calibri" pitchFamily="34" charset="-122"/>
+                <a:cs typeface="Calibri" pitchFamily="34" charset="-120"/>
+              </a:rPr>
+              <a:t>Java web application cases</a:t>
+            </a:r>
+            <a:endParaRPr lang="en-US" sz="1000" dirty="0"/>
+          </a:p>
+        </p:txBody>
+      </p:sp>
+      <p:sp>
+        <p:nvSpPr>
+          <p:cNvPr id="110" name="Text 108"/>
+          <p:cNvSpPr txBox="1"/>
+          <p:nvPr/>
+        </p:nvSpPr>
+        <p:spPr>
+          <a:xfrm>
+            <a:off x="3611880" y="1828800"/>
+            <a:ext cx="2377440" cy="256032"/>
+          </a:xfrm>
+          <a:prstGeom prst="rect">
+            <a:avLst/>
+          </a:prstGeom>
+          <a:noFill/>
+          <a:ln/>
+        </p:spPr>
+        <p:txBody>
+          <a:bodyPr wrap="square" lIns="0" tIns="0" rIns="0" bIns="0" rtlCol="0" anchor="ctr"/>
+          <a:lstStyle/>
+          <a:p>
+            <a:pPr indent="0" marL="0">
+              <a:buNone/>
+            </a:pPr>
+            <a:r>
+              <a:rPr lang="en-US" sz="1050" b="1" spc="130" kern="0" dirty="0">
+                <a:solidFill>
+                  <a:srgbClr val="53565A"/>
+                </a:solidFill>
+                <a:latin typeface="Calibri" pitchFamily="34" charset="0"/>
+                <a:ea typeface="Calibri" pitchFamily="34" charset="-122"/>
+                <a:cs typeface="Calibri" pitchFamily="34" charset="-120"/>
+              </a:rPr>
+              <a:t>JULIET TEST SUITE</a:t>
+            </a:r>
+            <a:endParaRPr lang="en-US" sz="1050" dirty="0"/>
+          </a:p>
+        </p:txBody>
+      </p:sp>
+      <p:sp>
+        <p:nvSpPr>
+          <p:cNvPr id="111" name="Text 109"/>
+          <p:cNvSpPr txBox="1"/>
+          <p:nvPr/>
+        </p:nvSpPr>
+        <p:spPr>
+          <a:xfrm>
+            <a:off x="3575304" y="2103120"/>
+            <a:ext cx="2377440" cy="685800"/>
+          </a:xfrm>
+          <a:prstGeom prst="rect">
+            <a:avLst/>
+          </a:prstGeom>
+          <a:noFill/>
+          <a:ln/>
+        </p:spPr>
+        <p:txBody>
+          <a:bodyPr wrap="square" lIns="0" tIns="0" rIns="0" bIns="0" rtlCol="0" anchor="ctr"/>
+          <a:lstStyle/>
+          <a:p>
+            <a:pPr indent="0" marL="0">
+              <a:buNone/>
+            </a:pPr>
+            <a:r>
+              <a:rPr lang="en-US" sz="4000" b="1" dirty="0">
+                <a:solidFill>
+                  <a:srgbClr val="006FCF"/>
+                </a:solidFill>
+                <a:latin typeface="Cambria" pitchFamily="34" charset="0"/>
+                <a:ea typeface="Cambria" pitchFamily="34" charset="-122"/>
+                <a:cs typeface="Cambria" pitchFamily="34" charset="-120"/>
+              </a:rPr>
+              <a:t>97%</a:t>
+            </a:r>
+            <a:endParaRPr lang="en-US" sz="4000" dirty="0"/>
+          </a:p>
+        </p:txBody>
+      </p:sp>
+      <p:sp>
+        <p:nvSpPr>
+          <p:cNvPr id="112" name="Text 110"/>
+          <p:cNvSpPr txBox="1"/>
+          <p:nvPr/>
+        </p:nvSpPr>
+        <p:spPr>
+          <a:xfrm>
+            <a:off x="3611880" y="2788920"/>
+            <a:ext cx="2377440" cy="274320"/>
+          </a:xfrm>
+          <a:prstGeom prst="rect">
+            <a:avLst/>
+          </a:prstGeom>
+          <a:noFill/>
+          <a:ln/>
+        </p:spPr>
+        <p:txBody>
+          <a:bodyPr wrap="square" lIns="0" tIns="0" rIns="0" bIns="0" rtlCol="0" anchor="ctr"/>
+          <a:lstStyle/>
+          <a:p>
+            <a:pPr indent="0" marL="0">
+              <a:buNone/>
+            </a:pPr>
+            <a:r>
+              <a:rPr lang="en-US" sz="1100" dirty="0">
+                <a:solidFill>
+                  <a:srgbClr val="1B2A44"/>
+                </a:solidFill>
+                <a:latin typeface="Calibri" pitchFamily="34" charset="0"/>
+                <a:ea typeface="Calibri" pitchFamily="34" charset="-122"/>
+                <a:cs typeface="Calibri" pitchFamily="34" charset="-120"/>
+              </a:rPr>
+              <a:t>of vulnerable cases detected</a:t>
+            </a:r>
+            <a:endParaRPr lang="en-US" sz="1100" dirty="0"/>
+          </a:p>
+        </p:txBody>
+      </p:sp>
+      <p:sp>
+        <p:nvSpPr>
+          <p:cNvPr id="113" name="Shape 111"/>
+          <p:cNvSpPr/>
+          <p:nvPr/>
+        </p:nvSpPr>
+        <p:spPr>
+          <a:xfrm>
+            <a:off x="3611880" y="3154680"/>
+            <a:ext cx="201168" cy="201168"/>
+          </a:xfrm>
+          <a:prstGeom prst="roundRect">
+            <a:avLst>
+              <a:gd name="adj" fmla="val 13636"/>
+            </a:avLst>
+          </a:prstGeom>
+          <a:solidFill>
+            <a:srgbClr val="006FCF"/>
+          </a:solidFill>
+          <a:ln/>
+        </p:spPr>
+      </p:sp>
+      <p:sp>
+        <p:nvSpPr>
+          <p:cNvPr id="114" name="Shape 112"/>
+          <p:cNvSpPr/>
+          <p:nvPr/>
+        </p:nvSpPr>
+        <p:spPr>
+          <a:xfrm>
+            <a:off x="3854196" y="3154680"/>
+            <a:ext cx="201168" cy="201168"/>
+          </a:xfrm>
+          <a:prstGeom prst="roundRect">
+            <a:avLst>
+              <a:gd name="adj" fmla="val 13636"/>
+            </a:avLst>
+          </a:prstGeom>
+          <a:solidFill>
+            <a:srgbClr val="006FCF"/>
+          </a:solidFill>
+          <a:ln/>
+        </p:spPr>
+      </p:sp>
+      <p:sp>
+        <p:nvSpPr>
+          <p:cNvPr id="115" name="Shape 113"/>
+          <p:cNvSpPr/>
+          <p:nvPr/>
+        </p:nvSpPr>
+        <p:spPr>
+          <a:xfrm>
+            <a:off x="4096512" y="3154680"/>
+            <a:ext cx="201168" cy="201168"/>
+          </a:xfrm>
+          <a:prstGeom prst="roundRect">
+            <a:avLst>
+              <a:gd name="adj" fmla="val 13636"/>
+            </a:avLst>
+          </a:prstGeom>
+          <a:solidFill>
+            <a:srgbClr val="006FCF"/>
+          </a:solidFill>
+          <a:ln/>
+        </p:spPr>
+      </p:sp>
+      <p:sp>
+        <p:nvSpPr>
+          <p:cNvPr id="116" name="Shape 114"/>
+          <p:cNvSpPr/>
+          <p:nvPr/>
+        </p:nvSpPr>
+        <p:spPr>
+          <a:xfrm>
+            <a:off x="4338828" y="3154680"/>
+            <a:ext cx="201168" cy="201168"/>
+          </a:xfrm>
+          <a:prstGeom prst="roundRect">
+            <a:avLst>
+              <a:gd name="adj" fmla="val 13636"/>
+            </a:avLst>
+          </a:prstGeom>
+          <a:solidFill>
+            <a:srgbClr val="006FCF"/>
+          </a:solidFill>
+          <a:ln/>
+        </p:spPr>
+      </p:sp>
+      <p:sp>
+        <p:nvSpPr>
+          <p:cNvPr id="117" name="Shape 115"/>
+          <p:cNvSpPr/>
+          <p:nvPr/>
+        </p:nvSpPr>
+        <p:spPr>
+          <a:xfrm>
+            <a:off x="4581144" y="3154680"/>
+            <a:ext cx="201168" cy="201168"/>
+          </a:xfrm>
+          <a:prstGeom prst="roundRect">
+            <a:avLst>
+              <a:gd name="adj" fmla="val 13636"/>
+            </a:avLst>
+          </a:prstGeom>
+          <a:solidFill>
+            <a:srgbClr val="006FCF"/>
+          </a:solidFill>
+          <a:ln/>
+        </p:spPr>
+      </p:sp>
+      <p:sp>
+        <p:nvSpPr>
+          <p:cNvPr id="118" name="Shape 116"/>
+          <p:cNvSpPr/>
+          <p:nvPr/>
+        </p:nvSpPr>
+        <p:spPr>
+          <a:xfrm>
+            <a:off x="4823460" y="3154680"/>
+            <a:ext cx="201168" cy="201168"/>
+          </a:xfrm>
+          <a:prstGeom prst="roundRect">
+            <a:avLst>
+              <a:gd name="adj" fmla="val 13636"/>
+            </a:avLst>
+          </a:prstGeom>
+          <a:solidFill>
+            <a:srgbClr val="006FCF"/>
+          </a:solidFill>
+          <a:ln/>
+        </p:spPr>
+      </p:sp>
+      <p:sp>
+        <p:nvSpPr>
+          <p:cNvPr id="119" name="Shape 117"/>
+          <p:cNvSpPr/>
+          <p:nvPr/>
+        </p:nvSpPr>
+        <p:spPr>
+          <a:xfrm>
+            <a:off x="5065776" y="3154680"/>
+            <a:ext cx="201168" cy="201168"/>
+          </a:xfrm>
+          <a:prstGeom prst="roundRect">
+            <a:avLst>
+              <a:gd name="adj" fmla="val 13636"/>
+            </a:avLst>
+          </a:prstGeom>
+          <a:solidFill>
+            <a:srgbClr val="006FCF"/>
+          </a:solidFill>
+          <a:ln/>
+        </p:spPr>
+      </p:sp>
+      <p:sp>
+        <p:nvSpPr>
+          <p:cNvPr id="120" name="Shape 118"/>
+          <p:cNvSpPr/>
+          <p:nvPr/>
+        </p:nvSpPr>
+        <p:spPr>
+          <a:xfrm>
+            <a:off x="5308092" y="3154680"/>
+            <a:ext cx="201168" cy="201168"/>
+          </a:xfrm>
+          <a:prstGeom prst="roundRect">
+            <a:avLst>
+              <a:gd name="adj" fmla="val 13636"/>
+            </a:avLst>
+          </a:prstGeom>
+          <a:solidFill>
+            <a:srgbClr val="006FCF"/>
+          </a:solidFill>
+          <a:ln/>
+        </p:spPr>
+      </p:sp>
+      <p:sp>
+        <p:nvSpPr>
+          <p:cNvPr id="121" name="Shape 119"/>
+          <p:cNvSpPr/>
+          <p:nvPr/>
+        </p:nvSpPr>
+        <p:spPr>
+          <a:xfrm>
+            <a:off x="5550408" y="3154680"/>
+            <a:ext cx="201168" cy="201168"/>
+          </a:xfrm>
+          <a:prstGeom prst="roundRect">
+            <a:avLst>
+              <a:gd name="adj" fmla="val 13636"/>
+            </a:avLst>
+          </a:prstGeom>
+          <a:solidFill>
+            <a:srgbClr val="006FCF"/>
+          </a:solidFill>
+          <a:ln/>
+        </p:spPr>
+      </p:sp>
+      <p:sp>
+        <p:nvSpPr>
+          <p:cNvPr id="122" name="Shape 120"/>
+          <p:cNvSpPr/>
+          <p:nvPr/>
+        </p:nvSpPr>
+        <p:spPr>
+          <a:xfrm>
+            <a:off x="5792724" y="3154680"/>
+            <a:ext cx="201168" cy="201168"/>
+          </a:xfrm>
+          <a:prstGeom prst="roundRect">
+            <a:avLst>
+              <a:gd name="adj" fmla="val 13636"/>
+            </a:avLst>
+          </a:prstGeom>
+          <a:solidFill>
+            <a:srgbClr val="006FCF"/>
+          </a:solidFill>
+          <a:ln/>
+        </p:spPr>
+      </p:sp>
+      <p:sp>
+        <p:nvSpPr>
+          <p:cNvPr id="123" name="Shape 121"/>
+          <p:cNvSpPr/>
+          <p:nvPr/>
+        </p:nvSpPr>
+        <p:spPr>
+          <a:xfrm>
+            <a:off x="3611880" y="3396996"/>
+            <a:ext cx="201168" cy="201168"/>
+          </a:xfrm>
+          <a:prstGeom prst="roundRect">
+            <a:avLst>
+              <a:gd name="adj" fmla="val 13636"/>
+            </a:avLst>
+          </a:prstGeom>
+          <a:solidFill>
+            <a:srgbClr val="006FCF"/>
+          </a:solidFill>
+          <a:ln/>
+        </p:spPr>
+      </p:sp>
+      <p:sp>
+        <p:nvSpPr>
+          <p:cNvPr id="124" name="Shape 122"/>
+          <p:cNvSpPr/>
+          <p:nvPr/>
+        </p:nvSpPr>
+        <p:spPr>
+          <a:xfrm>
+            <a:off x="3854196" y="3396996"/>
+            <a:ext cx="201168" cy="201168"/>
+          </a:xfrm>
+          <a:prstGeom prst="roundRect">
+            <a:avLst>
+              <a:gd name="adj" fmla="val 13636"/>
+            </a:avLst>
+          </a:prstGeom>
+          <a:solidFill>
+            <a:srgbClr val="006FCF"/>
+          </a:solidFill>
+          <a:ln/>
+        </p:spPr>
+      </p:sp>
+      <p:sp>
+        <p:nvSpPr>
+          <p:cNvPr id="125" name="Shape 123"/>
+          <p:cNvSpPr/>
+          <p:nvPr/>
+        </p:nvSpPr>
+        <p:spPr>
+          <a:xfrm>
+            <a:off x="4096512" y="3396996"/>
+            <a:ext cx="201168" cy="201168"/>
+          </a:xfrm>
+          <a:prstGeom prst="roundRect">
+            <a:avLst>
+              <a:gd name="adj" fmla="val 13636"/>
+            </a:avLst>
+          </a:prstGeom>
+          <a:solidFill>
+            <a:srgbClr val="006FCF"/>
+          </a:solidFill>
+          <a:ln/>
+        </p:spPr>
+      </p:sp>
+      <p:sp>
+        <p:nvSpPr>
+          <p:cNvPr id="126" name="Shape 124"/>
+          <p:cNvSpPr/>
+          <p:nvPr/>
+        </p:nvSpPr>
+        <p:spPr>
+          <a:xfrm>
+            <a:off x="4338828" y="3396996"/>
+            <a:ext cx="201168" cy="201168"/>
+          </a:xfrm>
+          <a:prstGeom prst="roundRect">
+            <a:avLst>
+              <a:gd name="adj" fmla="val 13636"/>
+            </a:avLst>
+          </a:prstGeom>
+          <a:solidFill>
+            <a:srgbClr val="006FCF"/>
+          </a:solidFill>
+          <a:ln/>
+        </p:spPr>
+      </p:sp>
+      <p:sp>
+        <p:nvSpPr>
+          <p:cNvPr id="127" name="Shape 125"/>
+          <p:cNvSpPr/>
+          <p:nvPr/>
+        </p:nvSpPr>
+        <p:spPr>
+          <a:xfrm>
+            <a:off x="4581144" y="3396996"/>
+            <a:ext cx="201168" cy="201168"/>
+          </a:xfrm>
+          <a:prstGeom prst="roundRect">
+            <a:avLst>
+              <a:gd name="adj" fmla="val 13636"/>
+            </a:avLst>
+          </a:prstGeom>
+          <a:solidFill>
+            <a:srgbClr val="006FCF"/>
+          </a:solidFill>
+          <a:ln/>
+        </p:spPr>
+      </p:sp>
+      <p:sp>
+        <p:nvSpPr>
+          <p:cNvPr id="128" name="Shape 126"/>
+          <p:cNvSpPr/>
+          <p:nvPr/>
+        </p:nvSpPr>
+        <p:spPr>
+          <a:xfrm>
+            <a:off x="4823460" y="3396996"/>
+            <a:ext cx="201168" cy="201168"/>
+          </a:xfrm>
+          <a:prstGeom prst="roundRect">
+            <a:avLst>
+              <a:gd name="adj" fmla="val 13636"/>
+            </a:avLst>
+          </a:prstGeom>
+          <a:solidFill>
+            <a:srgbClr val="006FCF"/>
+          </a:solidFill>
+          <a:ln/>
+        </p:spPr>
+      </p:sp>
+      <p:sp>
+        <p:nvSpPr>
+          <p:cNvPr id="129" name="Shape 127"/>
+          <p:cNvSpPr/>
+          <p:nvPr/>
+        </p:nvSpPr>
+        <p:spPr>
+          <a:xfrm>
+            <a:off x="5065776" y="3396996"/>
+            <a:ext cx="201168" cy="201168"/>
+          </a:xfrm>
+          <a:prstGeom prst="roundRect">
+            <a:avLst>
+              <a:gd name="adj" fmla="val 13636"/>
+            </a:avLst>
+          </a:prstGeom>
+          <a:solidFill>
+            <a:srgbClr val="006FCF"/>
+          </a:solidFill>
+          <a:ln/>
+        </p:spPr>
+      </p:sp>
+      <p:sp>
+        <p:nvSpPr>
+          <p:cNvPr id="130" name="Shape 128"/>
+          <p:cNvSpPr/>
+          <p:nvPr/>
+        </p:nvSpPr>
+        <p:spPr>
+          <a:xfrm>
+            <a:off x="5308092" y="3396996"/>
+            <a:ext cx="201168" cy="201168"/>
+          </a:xfrm>
+          <a:prstGeom prst="roundRect">
+            <a:avLst>
+              <a:gd name="adj" fmla="val 13636"/>
+            </a:avLst>
+          </a:prstGeom>
+          <a:solidFill>
+            <a:srgbClr val="006FCF"/>
+          </a:solidFill>
+          <a:ln/>
+        </p:spPr>
+      </p:sp>
+      <p:sp>
+        <p:nvSpPr>
+          <p:cNvPr id="131" name="Shape 129"/>
+          <p:cNvSpPr/>
+          <p:nvPr/>
+        </p:nvSpPr>
+        <p:spPr>
+          <a:xfrm>
+            <a:off x="5550408" y="3396996"/>
+            <a:ext cx="201168" cy="201168"/>
+          </a:xfrm>
+          <a:prstGeom prst="roundRect">
+            <a:avLst>
+              <a:gd name="adj" fmla="val 13636"/>
+            </a:avLst>
+          </a:prstGeom>
+          <a:solidFill>
+            <a:srgbClr val="006FCF"/>
+          </a:solidFill>
+          <a:ln/>
+        </p:spPr>
+      </p:sp>
+      <p:sp>
+        <p:nvSpPr>
+          <p:cNvPr id="132" name="Shape 130"/>
+          <p:cNvSpPr/>
+          <p:nvPr/>
+        </p:nvSpPr>
+        <p:spPr>
+          <a:xfrm>
+            <a:off x="5792724" y="3396996"/>
+            <a:ext cx="201168" cy="201168"/>
+          </a:xfrm>
+          <a:prstGeom prst="roundRect">
+            <a:avLst>
+              <a:gd name="adj" fmla="val 13636"/>
+            </a:avLst>
+          </a:prstGeom>
+          <a:solidFill>
+            <a:srgbClr val="006FCF"/>
+          </a:solidFill>
+          <a:ln/>
+        </p:spPr>
+      </p:sp>
+      <p:sp>
+        <p:nvSpPr>
+          <p:cNvPr id="133" name="Shape 131"/>
+          <p:cNvSpPr/>
+          <p:nvPr/>
+        </p:nvSpPr>
+        <p:spPr>
+          <a:xfrm>
+            <a:off x="3611880" y="3639312"/>
+            <a:ext cx="201168" cy="201168"/>
+          </a:xfrm>
+          <a:prstGeom prst="roundRect">
+            <a:avLst>
+              <a:gd name="adj" fmla="val 13636"/>
+            </a:avLst>
+          </a:prstGeom>
+          <a:solidFill>
+            <a:srgbClr val="006FCF"/>
+          </a:solidFill>
+          <a:ln/>
+        </p:spPr>
+      </p:sp>
+      <p:sp>
+        <p:nvSpPr>
+          <p:cNvPr id="134" name="Shape 132"/>
+          <p:cNvSpPr/>
+          <p:nvPr/>
+        </p:nvSpPr>
+        <p:spPr>
+          <a:xfrm>
+            <a:off x="3854196" y="3639312"/>
+            <a:ext cx="201168" cy="201168"/>
+          </a:xfrm>
+          <a:prstGeom prst="roundRect">
+            <a:avLst>
+              <a:gd name="adj" fmla="val 13636"/>
+            </a:avLst>
+          </a:prstGeom>
+          <a:solidFill>
+            <a:srgbClr val="006FCF"/>
+          </a:solidFill>
+          <a:ln/>
+        </p:spPr>
+      </p:sp>
+      <p:sp>
+        <p:nvSpPr>
+          <p:cNvPr id="135" name="Shape 133"/>
+          <p:cNvSpPr/>
+          <p:nvPr/>
+        </p:nvSpPr>
+        <p:spPr>
+          <a:xfrm>
+            <a:off x="4096512" y="3639312"/>
+            <a:ext cx="201168" cy="201168"/>
+          </a:xfrm>
+          <a:prstGeom prst="roundRect">
+            <a:avLst>
+              <a:gd name="adj" fmla="val 13636"/>
+            </a:avLst>
+          </a:prstGeom>
+          <a:solidFill>
+            <a:srgbClr val="006FCF"/>
+          </a:solidFill>
+          <a:ln/>
+        </p:spPr>
+      </p:sp>
+      <p:sp>
+        <p:nvSpPr>
+          <p:cNvPr id="136" name="Shape 134"/>
+          <p:cNvSpPr/>
+          <p:nvPr/>
+        </p:nvSpPr>
+        <p:spPr>
+          <a:xfrm>
+            <a:off x="4338828" y="3639312"/>
+            <a:ext cx="201168" cy="201168"/>
+          </a:xfrm>
+          <a:prstGeom prst="roundRect">
+            <a:avLst>
+              <a:gd name="adj" fmla="val 13636"/>
+            </a:avLst>
+          </a:prstGeom>
+          <a:solidFill>
+            <a:srgbClr val="006FCF"/>
+          </a:solidFill>
+          <a:ln/>
+        </p:spPr>
+      </p:sp>
+      <p:sp>
+        <p:nvSpPr>
+          <p:cNvPr id="137" name="Shape 135"/>
+          <p:cNvSpPr/>
+          <p:nvPr/>
+        </p:nvSpPr>
+        <p:spPr>
+          <a:xfrm>
+            <a:off x="4581144" y="3639312"/>
+            <a:ext cx="201168" cy="201168"/>
+          </a:xfrm>
+          <a:prstGeom prst="roundRect">
+            <a:avLst>
+              <a:gd name="adj" fmla="val 13636"/>
+            </a:avLst>
+          </a:prstGeom>
+          <a:solidFill>
+            <a:srgbClr val="006FCF"/>
+          </a:solidFill>
+          <a:ln/>
+        </p:spPr>
+      </p:sp>
+      <p:sp>
+        <p:nvSpPr>
+          <p:cNvPr id="138" name="Shape 136"/>
+          <p:cNvSpPr/>
+          <p:nvPr/>
+        </p:nvSpPr>
+        <p:spPr>
+          <a:xfrm>
+            <a:off x="4823460" y="3639312"/>
+            <a:ext cx="201168" cy="201168"/>
+          </a:xfrm>
+          <a:prstGeom prst="roundRect">
+            <a:avLst>
+              <a:gd name="adj" fmla="val 13636"/>
+            </a:avLst>
+          </a:prstGeom>
+          <a:solidFill>
+            <a:srgbClr val="006FCF"/>
+          </a:solidFill>
+          <a:ln/>
+        </p:spPr>
+      </p:sp>
+      <p:sp>
+        <p:nvSpPr>
+          <p:cNvPr id="139" name="Shape 137"/>
+          <p:cNvSpPr/>
+          <p:nvPr/>
+        </p:nvSpPr>
+        <p:spPr>
+          <a:xfrm>
+            <a:off x="5065776" y="3639312"/>
+            <a:ext cx="201168" cy="201168"/>
+          </a:xfrm>
+          <a:prstGeom prst="roundRect">
+            <a:avLst>
+              <a:gd name="adj" fmla="val 13636"/>
+            </a:avLst>
+          </a:prstGeom>
+          <a:solidFill>
+            <a:srgbClr val="006FCF"/>
+          </a:solidFill>
+          <a:ln/>
+        </p:spPr>
+      </p:sp>
+      <p:sp>
+        <p:nvSpPr>
+          <p:cNvPr id="140" name="Shape 138"/>
+          <p:cNvSpPr/>
+          <p:nvPr/>
+        </p:nvSpPr>
+        <p:spPr>
+          <a:xfrm>
+            <a:off x="5308092" y="3639312"/>
+            <a:ext cx="201168" cy="201168"/>
+          </a:xfrm>
+          <a:prstGeom prst="roundRect">
+            <a:avLst>
+              <a:gd name="adj" fmla="val 13636"/>
+            </a:avLst>
+          </a:prstGeom>
+          <a:solidFill>
+            <a:srgbClr val="006FCF"/>
+          </a:solidFill>
+          <a:ln/>
+        </p:spPr>
+      </p:sp>
+      <p:sp>
+        <p:nvSpPr>
+          <p:cNvPr id="141" name="Shape 139"/>
+          <p:cNvSpPr/>
+          <p:nvPr/>
+        </p:nvSpPr>
+        <p:spPr>
+          <a:xfrm>
+            <a:off x="5550408" y="3639312"/>
+            <a:ext cx="201168" cy="201168"/>
+          </a:xfrm>
+          <a:prstGeom prst="roundRect">
+            <a:avLst>
+              <a:gd name="adj" fmla="val 13636"/>
+            </a:avLst>
+          </a:prstGeom>
+          <a:solidFill>
+            <a:srgbClr val="006FCF"/>
+          </a:solidFill>
+          <a:ln/>
+        </p:spPr>
+      </p:sp>
+      <p:sp>
+        <p:nvSpPr>
+          <p:cNvPr id="142" name="Shape 140"/>
+          <p:cNvSpPr/>
+          <p:nvPr/>
+        </p:nvSpPr>
+        <p:spPr>
+          <a:xfrm>
+            <a:off x="5792724" y="3639312"/>
+            <a:ext cx="201168" cy="201168"/>
+          </a:xfrm>
+          <a:prstGeom prst="roundRect">
+            <a:avLst>
+              <a:gd name="adj" fmla="val 13636"/>
+            </a:avLst>
+          </a:prstGeom>
+          <a:solidFill>
+            <a:srgbClr val="006FCF"/>
+          </a:solidFill>
+          <a:ln/>
+        </p:spPr>
+      </p:sp>
+      <p:sp>
+        <p:nvSpPr>
+          <p:cNvPr id="143" name="Shape 141"/>
+          <p:cNvSpPr/>
+          <p:nvPr/>
+        </p:nvSpPr>
+        <p:spPr>
+          <a:xfrm>
+            <a:off x="3611880" y="3881628"/>
+            <a:ext cx="201168" cy="201168"/>
+          </a:xfrm>
+          <a:prstGeom prst="roundRect">
+            <a:avLst>
+              <a:gd name="adj" fmla="val 13636"/>
+            </a:avLst>
+          </a:prstGeom>
+          <a:solidFill>
+            <a:srgbClr val="006FCF"/>
+          </a:solidFill>
+          <a:ln/>
+        </p:spPr>
+      </p:sp>
+      <p:sp>
+        <p:nvSpPr>
+          <p:cNvPr id="144" name="Shape 142"/>
+          <p:cNvSpPr/>
+          <p:nvPr/>
+        </p:nvSpPr>
+        <p:spPr>
+          <a:xfrm>
+            <a:off x="3854196" y="3881628"/>
+            <a:ext cx="201168" cy="201168"/>
+          </a:xfrm>
+          <a:prstGeom prst="roundRect">
+            <a:avLst>
+              <a:gd name="adj" fmla="val 13636"/>
+            </a:avLst>
+          </a:prstGeom>
+          <a:solidFill>
+            <a:srgbClr val="006FCF"/>
+          </a:solidFill>
+          <a:ln/>
+        </p:spPr>
+      </p:sp>
+      <p:sp>
+        <p:nvSpPr>
+          <p:cNvPr id="145" name="Shape 143"/>
+          <p:cNvSpPr/>
+          <p:nvPr/>
+        </p:nvSpPr>
+        <p:spPr>
+          <a:xfrm>
+            <a:off x="4096512" y="3881628"/>
+            <a:ext cx="201168" cy="201168"/>
+          </a:xfrm>
+          <a:prstGeom prst="roundRect">
+            <a:avLst>
+              <a:gd name="adj" fmla="val 13636"/>
+            </a:avLst>
+          </a:prstGeom>
+          <a:solidFill>
+            <a:srgbClr val="006FCF"/>
+          </a:solidFill>
+          <a:ln/>
+        </p:spPr>
+      </p:sp>
+      <p:sp>
+        <p:nvSpPr>
+          <p:cNvPr id="146" name="Shape 144"/>
+          <p:cNvSpPr/>
+          <p:nvPr/>
+        </p:nvSpPr>
+        <p:spPr>
+          <a:xfrm>
+            <a:off x="4338828" y="3881628"/>
+            <a:ext cx="201168" cy="201168"/>
+          </a:xfrm>
+          <a:prstGeom prst="roundRect">
+            <a:avLst>
+              <a:gd name="adj" fmla="val 13636"/>
+            </a:avLst>
+          </a:prstGeom>
+          <a:solidFill>
+            <a:srgbClr val="006FCF"/>
+          </a:solidFill>
+          <a:ln/>
+        </p:spPr>
+      </p:sp>
+      <p:sp>
+        <p:nvSpPr>
+          <p:cNvPr id="147" name="Shape 145"/>
+          <p:cNvSpPr/>
+          <p:nvPr/>
+        </p:nvSpPr>
+        <p:spPr>
+          <a:xfrm>
+            <a:off x="4581144" y="3881628"/>
+            <a:ext cx="201168" cy="201168"/>
+          </a:xfrm>
+          <a:prstGeom prst="roundRect">
+            <a:avLst>
+              <a:gd name="adj" fmla="val 13636"/>
+            </a:avLst>
+          </a:prstGeom>
+          <a:solidFill>
+            <a:srgbClr val="006FCF"/>
+          </a:solidFill>
+          <a:ln/>
+        </p:spPr>
+      </p:sp>
+      <p:sp>
+        <p:nvSpPr>
+          <p:cNvPr id="148" name="Shape 146"/>
+          <p:cNvSpPr/>
+          <p:nvPr/>
+        </p:nvSpPr>
+        <p:spPr>
+          <a:xfrm>
+            <a:off x="4823460" y="3881628"/>
+            <a:ext cx="201168" cy="201168"/>
+          </a:xfrm>
+          <a:prstGeom prst="roundRect">
+            <a:avLst>
+              <a:gd name="adj" fmla="val 13636"/>
+            </a:avLst>
+          </a:prstGeom>
+          <a:solidFill>
+            <a:srgbClr val="006FCF"/>
+          </a:solidFill>
+          <a:ln/>
+        </p:spPr>
+      </p:sp>
+      <p:sp>
+        <p:nvSpPr>
+          <p:cNvPr id="149" name="Shape 147"/>
+          <p:cNvSpPr/>
+          <p:nvPr/>
+        </p:nvSpPr>
+        <p:spPr>
+          <a:xfrm>
+            <a:off x="5065776" y="3881628"/>
+            <a:ext cx="201168" cy="201168"/>
+          </a:xfrm>
+          <a:prstGeom prst="roundRect">
+            <a:avLst>
+              <a:gd name="adj" fmla="val 13636"/>
+            </a:avLst>
+          </a:prstGeom>
+          <a:solidFill>
+            <a:srgbClr val="006FCF"/>
+          </a:solidFill>
+          <a:ln/>
+        </p:spPr>
+      </p:sp>
+      <p:sp>
+        <p:nvSpPr>
+          <p:cNvPr id="150" name="Shape 148"/>
+          <p:cNvSpPr/>
+          <p:nvPr/>
+        </p:nvSpPr>
+        <p:spPr>
+          <a:xfrm>
+            <a:off x="5308092" y="3881628"/>
+            <a:ext cx="201168" cy="201168"/>
+          </a:xfrm>
+          <a:prstGeom prst="roundRect">
+            <a:avLst>
+              <a:gd name="adj" fmla="val 13636"/>
+            </a:avLst>
+          </a:prstGeom>
+          <a:solidFill>
+            <a:srgbClr val="006FCF"/>
+          </a:solidFill>
+          <a:ln/>
+        </p:spPr>
+      </p:sp>
+      <p:sp>
+        <p:nvSpPr>
+          <p:cNvPr id="151" name="Shape 149"/>
+          <p:cNvSpPr/>
+          <p:nvPr/>
+        </p:nvSpPr>
+        <p:spPr>
+          <a:xfrm>
+            <a:off x="5550408" y="3881628"/>
+            <a:ext cx="201168" cy="201168"/>
+          </a:xfrm>
+          <a:prstGeom prst="roundRect">
+            <a:avLst>
+              <a:gd name="adj" fmla="val 13636"/>
+            </a:avLst>
+          </a:prstGeom>
+          <a:solidFill>
+            <a:srgbClr val="006FCF"/>
+          </a:solidFill>
+          <a:ln/>
+        </p:spPr>
+      </p:sp>
+      <p:sp>
+        <p:nvSpPr>
+          <p:cNvPr id="152" name="Shape 150"/>
+          <p:cNvSpPr/>
+          <p:nvPr/>
+        </p:nvSpPr>
+        <p:spPr>
+          <a:xfrm>
+            <a:off x="5792724" y="3881628"/>
+            <a:ext cx="201168" cy="201168"/>
+          </a:xfrm>
+          <a:prstGeom prst="roundRect">
+            <a:avLst>
+              <a:gd name="adj" fmla="val 13636"/>
+            </a:avLst>
+          </a:prstGeom>
+          <a:solidFill>
+            <a:srgbClr val="006FCF"/>
+          </a:solidFill>
+          <a:ln/>
+        </p:spPr>
+      </p:sp>
+      <p:sp>
+        <p:nvSpPr>
+          <p:cNvPr id="153" name="Shape 151"/>
+          <p:cNvSpPr/>
+          <p:nvPr/>
+        </p:nvSpPr>
+        <p:spPr>
+          <a:xfrm>
+            <a:off x="3611880" y="4123944"/>
+            <a:ext cx="201168" cy="201168"/>
+          </a:xfrm>
+          <a:prstGeom prst="roundRect">
+            <a:avLst>
+              <a:gd name="adj" fmla="val 13636"/>
+            </a:avLst>
+          </a:prstGeom>
+          <a:solidFill>
+            <a:srgbClr val="006FCF"/>
+          </a:solidFill>
+          <a:ln/>
+        </p:spPr>
+      </p:sp>
+      <p:sp>
+        <p:nvSpPr>
+          <p:cNvPr id="154" name="Shape 152"/>
+          <p:cNvSpPr/>
+          <p:nvPr/>
+        </p:nvSpPr>
+        <p:spPr>
+          <a:xfrm>
+            <a:off x="3854196" y="4123944"/>
+            <a:ext cx="201168" cy="201168"/>
+          </a:xfrm>
+          <a:prstGeom prst="roundRect">
+            <a:avLst>
+              <a:gd name="adj" fmla="val 13636"/>
+            </a:avLst>
+          </a:prstGeom>
+          <a:solidFill>
+            <a:srgbClr val="006FCF"/>
+          </a:solidFill>
+          <a:ln/>
+        </p:spPr>
+      </p:sp>
+      <p:sp>
+        <p:nvSpPr>
+          <p:cNvPr id="155" name="Shape 153"/>
+          <p:cNvSpPr/>
+          <p:nvPr/>
+        </p:nvSpPr>
+        <p:spPr>
+          <a:xfrm>
+            <a:off x="4096512" y="4123944"/>
+            <a:ext cx="201168" cy="201168"/>
+          </a:xfrm>
+          <a:prstGeom prst="roundRect">
+            <a:avLst>
+              <a:gd name="adj" fmla="val 13636"/>
+            </a:avLst>
+          </a:prstGeom>
+          <a:solidFill>
+            <a:srgbClr val="006FCF"/>
+          </a:solidFill>
+          <a:ln/>
+        </p:spPr>
+      </p:sp>
+      <p:sp>
+        <p:nvSpPr>
+          <p:cNvPr id="156" name="Shape 154"/>
+          <p:cNvSpPr/>
+          <p:nvPr/>
+        </p:nvSpPr>
+        <p:spPr>
+          <a:xfrm>
+            <a:off x="4338828" y="4123944"/>
+            <a:ext cx="201168" cy="201168"/>
+          </a:xfrm>
+          <a:prstGeom prst="roundRect">
+            <a:avLst>
+              <a:gd name="adj" fmla="val 13636"/>
+            </a:avLst>
+          </a:prstGeom>
+          <a:solidFill>
+            <a:srgbClr val="006FCF"/>
+          </a:solidFill>
+          <a:ln/>
+        </p:spPr>
+      </p:sp>
+      <p:sp>
+        <p:nvSpPr>
+          <p:cNvPr id="157" name="Shape 155"/>
+          <p:cNvSpPr/>
+          <p:nvPr/>
+        </p:nvSpPr>
+        <p:spPr>
+          <a:xfrm>
+            <a:off x="4581144" y="4123944"/>
+            <a:ext cx="201168" cy="201168"/>
+          </a:xfrm>
+          <a:prstGeom prst="roundRect">
+            <a:avLst>
+              <a:gd name="adj" fmla="val 13636"/>
+            </a:avLst>
+          </a:prstGeom>
+          <a:solidFill>
+            <a:srgbClr val="006FCF"/>
+          </a:solidFill>
+          <a:ln/>
+        </p:spPr>
+      </p:sp>
+      <p:sp>
+        <p:nvSpPr>
+          <p:cNvPr id="158" name="Shape 156"/>
+          <p:cNvSpPr/>
+          <p:nvPr/>
+        </p:nvSpPr>
+        <p:spPr>
+          <a:xfrm>
+            <a:off x="4823460" y="4123944"/>
+            <a:ext cx="201168" cy="201168"/>
+          </a:xfrm>
+          <a:prstGeom prst="roundRect">
+            <a:avLst>
+              <a:gd name="adj" fmla="val 13636"/>
+            </a:avLst>
+          </a:prstGeom>
+          <a:solidFill>
+            <a:srgbClr val="006FCF"/>
+          </a:solidFill>
+          <a:ln/>
+        </p:spPr>
+      </p:sp>
+      <p:sp>
+        <p:nvSpPr>
+          <p:cNvPr id="159" name="Shape 157"/>
+          <p:cNvSpPr/>
+          <p:nvPr/>
+        </p:nvSpPr>
+        <p:spPr>
+          <a:xfrm>
+            <a:off x="5065776" y="4123944"/>
+            <a:ext cx="201168" cy="201168"/>
+          </a:xfrm>
+          <a:prstGeom prst="roundRect">
+            <a:avLst>
+              <a:gd name="adj" fmla="val 13636"/>
+            </a:avLst>
+          </a:prstGeom>
+          <a:solidFill>
+            <a:srgbClr val="006FCF"/>
+          </a:solidFill>
+          <a:ln/>
+        </p:spPr>
+      </p:sp>
+      <p:sp>
+        <p:nvSpPr>
+          <p:cNvPr id="160" name="Shape 158"/>
+          <p:cNvSpPr/>
+          <p:nvPr/>
+        </p:nvSpPr>
+        <p:spPr>
+          <a:xfrm>
+            <a:off x="5308092" y="4123944"/>
+            <a:ext cx="201168" cy="201168"/>
+          </a:xfrm>
+          <a:prstGeom prst="roundRect">
+            <a:avLst>
+              <a:gd name="adj" fmla="val 13636"/>
+            </a:avLst>
+          </a:prstGeom>
+          <a:solidFill>
+            <a:srgbClr val="006FCF"/>
+          </a:solidFill>
+          <a:ln/>
+        </p:spPr>
+      </p:sp>
+      <p:sp>
+        <p:nvSpPr>
+          <p:cNvPr id="161" name="Shape 159"/>
+          <p:cNvSpPr/>
+          <p:nvPr/>
+        </p:nvSpPr>
+        <p:spPr>
+          <a:xfrm>
+            <a:off x="5550408" y="4123944"/>
+            <a:ext cx="201168" cy="201168"/>
+          </a:xfrm>
+          <a:prstGeom prst="roundRect">
+            <a:avLst>
+              <a:gd name="adj" fmla="val 13636"/>
+            </a:avLst>
+          </a:prstGeom>
+          <a:solidFill>
+            <a:srgbClr val="006FCF"/>
+          </a:solidFill>
+          <a:ln/>
+        </p:spPr>
+      </p:sp>
+      <p:sp>
+        <p:nvSpPr>
+          <p:cNvPr id="162" name="Shape 160"/>
+          <p:cNvSpPr/>
+          <p:nvPr/>
+        </p:nvSpPr>
+        <p:spPr>
+          <a:xfrm>
+            <a:off x="5792724" y="4123944"/>
+            <a:ext cx="201168" cy="201168"/>
+          </a:xfrm>
+          <a:prstGeom prst="roundRect">
+            <a:avLst>
+              <a:gd name="adj" fmla="val 13636"/>
+            </a:avLst>
+          </a:prstGeom>
+          <a:solidFill>
+            <a:srgbClr val="006FCF"/>
+          </a:solidFill>
+          <a:ln/>
+        </p:spPr>
+      </p:sp>
+      <p:sp>
+        <p:nvSpPr>
+          <p:cNvPr id="163" name="Shape 161"/>
+          <p:cNvSpPr/>
+          <p:nvPr/>
+        </p:nvSpPr>
+        <p:spPr>
+          <a:xfrm>
+            <a:off x="3611880" y="4366260"/>
+            <a:ext cx="201168" cy="201168"/>
+          </a:xfrm>
+          <a:prstGeom prst="roundRect">
+            <a:avLst>
+              <a:gd name="adj" fmla="val 13636"/>
+            </a:avLst>
+          </a:prstGeom>
+          <a:solidFill>
+            <a:srgbClr val="006FCF"/>
+          </a:solidFill>
+          <a:ln/>
+        </p:spPr>
+      </p:sp>
+      <p:sp>
+        <p:nvSpPr>
+          <p:cNvPr id="164" name="Shape 162"/>
+          <p:cNvSpPr/>
+          <p:nvPr/>
+        </p:nvSpPr>
+        <p:spPr>
+          <a:xfrm>
+            <a:off x="3854196" y="4366260"/>
+            <a:ext cx="201168" cy="201168"/>
+          </a:xfrm>
+          <a:prstGeom prst="roundRect">
+            <a:avLst>
+              <a:gd name="adj" fmla="val 13636"/>
+            </a:avLst>
+          </a:prstGeom>
+          <a:solidFill>
+            <a:srgbClr val="006FCF"/>
+          </a:solidFill>
+          <a:ln/>
+        </p:spPr>
+      </p:sp>
+      <p:sp>
+        <p:nvSpPr>
+          <p:cNvPr id="165" name="Shape 163"/>
+          <p:cNvSpPr/>
+          <p:nvPr/>
+        </p:nvSpPr>
+        <p:spPr>
+          <a:xfrm>
+            <a:off x="4096512" y="4366260"/>
+            <a:ext cx="201168" cy="201168"/>
+          </a:xfrm>
+          <a:prstGeom prst="roundRect">
+            <a:avLst>
+              <a:gd name="adj" fmla="val 13636"/>
+            </a:avLst>
+          </a:prstGeom>
+          <a:solidFill>
+            <a:srgbClr val="006FCF"/>
+          </a:solidFill>
+          <a:ln/>
+        </p:spPr>
+      </p:sp>
+      <p:sp>
+        <p:nvSpPr>
+          <p:cNvPr id="166" name="Shape 164"/>
+          <p:cNvSpPr/>
+          <p:nvPr/>
+        </p:nvSpPr>
+        <p:spPr>
+          <a:xfrm>
+            <a:off x="4338828" y="4366260"/>
+            <a:ext cx="201168" cy="201168"/>
+          </a:xfrm>
+          <a:prstGeom prst="roundRect">
+            <a:avLst>
+              <a:gd name="adj" fmla="val 13636"/>
+            </a:avLst>
+          </a:prstGeom>
+          <a:solidFill>
+            <a:srgbClr val="006FCF"/>
+          </a:solidFill>
+          <a:ln/>
+        </p:spPr>
+      </p:sp>
+      <p:sp>
+        <p:nvSpPr>
+          <p:cNvPr id="167" name="Shape 165"/>
+          <p:cNvSpPr/>
+          <p:nvPr/>
+        </p:nvSpPr>
+        <p:spPr>
+          <a:xfrm>
+            <a:off x="4581144" y="4366260"/>
+            <a:ext cx="201168" cy="201168"/>
+          </a:xfrm>
+          <a:prstGeom prst="roundRect">
+            <a:avLst>
+              <a:gd name="adj" fmla="val 13636"/>
+            </a:avLst>
+          </a:prstGeom>
+          <a:solidFill>
+            <a:srgbClr val="006FCF"/>
+          </a:solidFill>
+          <a:ln/>
+        </p:spPr>
+      </p:sp>
+      <p:sp>
+        <p:nvSpPr>
+          <p:cNvPr id="168" name="Shape 166"/>
+          <p:cNvSpPr/>
+          <p:nvPr/>
+        </p:nvSpPr>
+        <p:spPr>
+          <a:xfrm>
+            <a:off x="4823460" y="4366260"/>
+            <a:ext cx="201168" cy="201168"/>
+          </a:xfrm>
+          <a:prstGeom prst="roundRect">
+            <a:avLst>
+              <a:gd name="adj" fmla="val 13636"/>
+            </a:avLst>
+          </a:prstGeom>
+          <a:solidFill>
+            <a:srgbClr val="006FCF"/>
+          </a:solidFill>
+          <a:ln/>
+        </p:spPr>
+      </p:sp>
+      <p:sp>
+        <p:nvSpPr>
+          <p:cNvPr id="169" name="Shape 167"/>
+          <p:cNvSpPr/>
+          <p:nvPr/>
+        </p:nvSpPr>
+        <p:spPr>
+          <a:xfrm>
+            <a:off x="5065776" y="4366260"/>
+            <a:ext cx="201168" cy="201168"/>
+          </a:xfrm>
+          <a:prstGeom prst="roundRect">
+            <a:avLst>
+              <a:gd name="adj" fmla="val 13636"/>
+            </a:avLst>
+          </a:prstGeom>
+          <a:solidFill>
+            <a:srgbClr val="006FCF"/>
+          </a:solidFill>
+          <a:ln/>
+        </p:spPr>
+      </p:sp>
+      <p:sp>
+        <p:nvSpPr>
+          <p:cNvPr id="170" name="Shape 168"/>
+          <p:cNvSpPr/>
+          <p:nvPr/>
+        </p:nvSpPr>
+        <p:spPr>
+          <a:xfrm>
+            <a:off x="5308092" y="4366260"/>
+            <a:ext cx="201168" cy="201168"/>
+          </a:xfrm>
+          <a:prstGeom prst="roundRect">
+            <a:avLst>
+              <a:gd name="adj" fmla="val 13636"/>
+            </a:avLst>
+          </a:prstGeom>
+          <a:solidFill>
+            <a:srgbClr val="006FCF"/>
+          </a:solidFill>
+          <a:ln/>
+        </p:spPr>
+      </p:sp>
+      <p:sp>
+        <p:nvSpPr>
+          <p:cNvPr id="171" name="Shape 169"/>
+          <p:cNvSpPr/>
+          <p:nvPr/>
+        </p:nvSpPr>
+        <p:spPr>
+          <a:xfrm>
+            <a:off x="5550408" y="4366260"/>
+            <a:ext cx="201168" cy="201168"/>
+          </a:xfrm>
+          <a:prstGeom prst="roundRect">
+            <a:avLst>
+              <a:gd name="adj" fmla="val 13636"/>
+            </a:avLst>
+          </a:prstGeom>
+          <a:solidFill>
+            <a:srgbClr val="006FCF"/>
+          </a:solidFill>
+          <a:ln/>
+        </p:spPr>
+      </p:sp>
+      <p:sp>
+        <p:nvSpPr>
+          <p:cNvPr id="172" name="Shape 170"/>
+          <p:cNvSpPr/>
+          <p:nvPr/>
+        </p:nvSpPr>
+        <p:spPr>
+          <a:xfrm>
+            <a:off x="5792724" y="4366260"/>
+            <a:ext cx="201168" cy="201168"/>
+          </a:xfrm>
+          <a:prstGeom prst="roundRect">
+            <a:avLst>
+              <a:gd name="adj" fmla="val 13636"/>
+            </a:avLst>
+          </a:prstGeom>
+          <a:solidFill>
+            <a:srgbClr val="006FCF"/>
+          </a:solidFill>
+          <a:ln/>
+        </p:spPr>
+      </p:sp>
+      <p:sp>
+        <p:nvSpPr>
+          <p:cNvPr id="173" name="Shape 171"/>
+          <p:cNvSpPr/>
+          <p:nvPr/>
+        </p:nvSpPr>
+        <p:spPr>
+          <a:xfrm>
+            <a:off x="3611880" y="4608576"/>
+            <a:ext cx="201168" cy="201168"/>
+          </a:xfrm>
+          <a:prstGeom prst="roundRect">
+            <a:avLst>
+              <a:gd name="adj" fmla="val 13636"/>
+            </a:avLst>
+          </a:prstGeom>
+          <a:solidFill>
+            <a:srgbClr val="006FCF"/>
+          </a:solidFill>
+          <a:ln/>
+        </p:spPr>
+      </p:sp>
+      <p:sp>
+        <p:nvSpPr>
+          <p:cNvPr id="174" name="Shape 172"/>
+          <p:cNvSpPr/>
+          <p:nvPr/>
+        </p:nvSpPr>
+        <p:spPr>
+          <a:xfrm>
+            <a:off x="3854196" y="4608576"/>
+            <a:ext cx="201168" cy="201168"/>
+          </a:xfrm>
+          <a:prstGeom prst="roundRect">
+            <a:avLst>
+              <a:gd name="adj" fmla="val 13636"/>
+            </a:avLst>
+          </a:prstGeom>
+          <a:solidFill>
+            <a:srgbClr val="006FCF"/>
+          </a:solidFill>
+          <a:ln/>
+        </p:spPr>
+      </p:sp>
+      <p:sp>
+        <p:nvSpPr>
+          <p:cNvPr id="175" name="Shape 173"/>
+          <p:cNvSpPr/>
+          <p:nvPr/>
+        </p:nvSpPr>
+        <p:spPr>
+          <a:xfrm>
+            <a:off x="4096512" y="4608576"/>
+            <a:ext cx="201168" cy="201168"/>
+          </a:xfrm>
+          <a:prstGeom prst="roundRect">
+            <a:avLst>
+              <a:gd name="adj" fmla="val 13636"/>
+            </a:avLst>
+          </a:prstGeom>
+          <a:solidFill>
+            <a:srgbClr val="006FCF"/>
+          </a:solidFill>
+          <a:ln/>
+        </p:spPr>
+      </p:sp>
+      <p:sp>
+        <p:nvSpPr>
+          <p:cNvPr id="176" name="Shape 174"/>
+          <p:cNvSpPr/>
+          <p:nvPr/>
+        </p:nvSpPr>
+        <p:spPr>
+          <a:xfrm>
+            <a:off x="4338828" y="4608576"/>
+            <a:ext cx="201168" cy="201168"/>
+          </a:xfrm>
+          <a:prstGeom prst="roundRect">
+            <a:avLst>
+              <a:gd name="adj" fmla="val 13636"/>
+            </a:avLst>
+          </a:prstGeom>
+          <a:solidFill>
+            <a:srgbClr val="006FCF"/>
+          </a:solidFill>
+          <a:ln/>
+        </p:spPr>
+      </p:sp>
+      <p:sp>
+        <p:nvSpPr>
+          <p:cNvPr id="177" name="Shape 175"/>
+          <p:cNvSpPr/>
+          <p:nvPr/>
+        </p:nvSpPr>
+        <p:spPr>
+          <a:xfrm>
+            <a:off x="4581144" y="4608576"/>
+            <a:ext cx="201168" cy="201168"/>
+          </a:xfrm>
+          <a:prstGeom prst="roundRect">
+            <a:avLst>
+              <a:gd name="adj" fmla="val 13636"/>
+            </a:avLst>
+          </a:prstGeom>
+          <a:solidFill>
+            <a:srgbClr val="006FCF"/>
+          </a:solidFill>
+          <a:ln/>
+        </p:spPr>
+      </p:sp>
+      <p:sp>
+        <p:nvSpPr>
+          <p:cNvPr id="178" name="Shape 176"/>
+          <p:cNvSpPr/>
+          <p:nvPr/>
+        </p:nvSpPr>
+        <p:spPr>
+          <a:xfrm>
+            <a:off x="4823460" y="4608576"/>
+            <a:ext cx="201168" cy="201168"/>
+          </a:xfrm>
+          <a:prstGeom prst="roundRect">
+            <a:avLst>
+              <a:gd name="adj" fmla="val 13636"/>
+            </a:avLst>
+          </a:prstGeom>
+          <a:solidFill>
+            <a:srgbClr val="006FCF"/>
+          </a:solidFill>
+          <a:ln/>
+        </p:spPr>
+      </p:sp>
+      <p:sp>
+        <p:nvSpPr>
+          <p:cNvPr id="179" name="Shape 177"/>
+          <p:cNvSpPr/>
+          <p:nvPr/>
+        </p:nvSpPr>
+        <p:spPr>
+          <a:xfrm>
+            <a:off x="5065776" y="4608576"/>
+            <a:ext cx="201168" cy="201168"/>
+          </a:xfrm>
+          <a:prstGeom prst="roundRect">
+            <a:avLst>
+              <a:gd name="adj" fmla="val 13636"/>
+            </a:avLst>
+          </a:prstGeom>
+          <a:solidFill>
+            <a:srgbClr val="006FCF"/>
+          </a:solidFill>
+          <a:ln/>
+        </p:spPr>
+      </p:sp>
+      <p:sp>
+        <p:nvSpPr>
+          <p:cNvPr id="180" name="Shape 178"/>
+          <p:cNvSpPr/>
+          <p:nvPr/>
+        </p:nvSpPr>
+        <p:spPr>
+          <a:xfrm>
+            <a:off x="5308092" y="4608576"/>
+            <a:ext cx="201168" cy="201168"/>
+          </a:xfrm>
+          <a:prstGeom prst="roundRect">
+            <a:avLst>
+              <a:gd name="adj" fmla="val 13636"/>
+            </a:avLst>
+          </a:prstGeom>
+          <a:solidFill>
+            <a:srgbClr val="006FCF"/>
+          </a:solidFill>
+          <a:ln/>
+        </p:spPr>
+      </p:sp>
+      <p:sp>
+        <p:nvSpPr>
+          <p:cNvPr id="181" name="Shape 179"/>
+          <p:cNvSpPr/>
+          <p:nvPr/>
+        </p:nvSpPr>
+        <p:spPr>
+          <a:xfrm>
+            <a:off x="5550408" y="4608576"/>
+            <a:ext cx="201168" cy="201168"/>
+          </a:xfrm>
+          <a:prstGeom prst="roundRect">
+            <a:avLst>
+              <a:gd name="adj" fmla="val 13636"/>
+            </a:avLst>
+          </a:prstGeom>
+          <a:solidFill>
+            <a:srgbClr val="006FCF"/>
+          </a:solidFill>
+          <a:ln/>
+        </p:spPr>
+      </p:sp>
+      <p:sp>
+        <p:nvSpPr>
+          <p:cNvPr id="182" name="Shape 180"/>
+          <p:cNvSpPr/>
+          <p:nvPr/>
+        </p:nvSpPr>
+        <p:spPr>
+          <a:xfrm>
+            <a:off x="5792724" y="4608576"/>
+            <a:ext cx="201168" cy="201168"/>
+          </a:xfrm>
+          <a:prstGeom prst="roundRect">
+            <a:avLst>
+              <a:gd name="adj" fmla="val 13636"/>
+            </a:avLst>
+          </a:prstGeom>
+          <a:solidFill>
+            <a:srgbClr val="006FCF"/>
+          </a:solidFill>
+          <a:ln/>
+        </p:spPr>
+      </p:sp>
+      <p:sp>
+        <p:nvSpPr>
+          <p:cNvPr id="183" name="Shape 181"/>
+          <p:cNvSpPr/>
+          <p:nvPr/>
+        </p:nvSpPr>
+        <p:spPr>
+          <a:xfrm>
+            <a:off x="3611880" y="4850892"/>
+            <a:ext cx="201168" cy="201168"/>
+          </a:xfrm>
+          <a:prstGeom prst="roundRect">
+            <a:avLst>
+              <a:gd name="adj" fmla="val 13636"/>
+            </a:avLst>
+          </a:prstGeom>
+          <a:solidFill>
+            <a:srgbClr val="006FCF"/>
+          </a:solidFill>
+          <a:ln/>
+        </p:spPr>
+      </p:sp>
+      <p:sp>
+        <p:nvSpPr>
+          <p:cNvPr id="184" name="Shape 182"/>
+          <p:cNvSpPr/>
+          <p:nvPr/>
+        </p:nvSpPr>
+        <p:spPr>
+          <a:xfrm>
+            <a:off x="3854196" y="4850892"/>
+            <a:ext cx="201168" cy="201168"/>
+          </a:xfrm>
+          <a:prstGeom prst="roundRect">
+            <a:avLst>
+              <a:gd name="adj" fmla="val 13636"/>
+            </a:avLst>
+          </a:prstGeom>
+          <a:solidFill>
+            <a:srgbClr val="006FCF"/>
+          </a:solidFill>
+          <a:ln/>
+        </p:spPr>
+      </p:sp>
+      <p:sp>
+        <p:nvSpPr>
+          <p:cNvPr id="185" name="Shape 183"/>
+          <p:cNvSpPr/>
+          <p:nvPr/>
+        </p:nvSpPr>
+        <p:spPr>
+          <a:xfrm>
+            <a:off x="4096512" y="4850892"/>
+            <a:ext cx="201168" cy="201168"/>
+          </a:xfrm>
+          <a:prstGeom prst="roundRect">
+            <a:avLst>
+              <a:gd name="adj" fmla="val 13636"/>
+            </a:avLst>
+          </a:prstGeom>
+          <a:solidFill>
+            <a:srgbClr val="006FCF"/>
+          </a:solidFill>
+          <a:ln/>
+        </p:spPr>
+      </p:sp>
+      <p:sp>
+        <p:nvSpPr>
+          <p:cNvPr id="186" name="Shape 184"/>
+          <p:cNvSpPr/>
+          <p:nvPr/>
+        </p:nvSpPr>
+        <p:spPr>
+          <a:xfrm>
+            <a:off x="4338828" y="4850892"/>
+            <a:ext cx="201168" cy="201168"/>
+          </a:xfrm>
+          <a:prstGeom prst="roundRect">
+            <a:avLst>
+              <a:gd name="adj" fmla="val 13636"/>
+            </a:avLst>
+          </a:prstGeom>
+          <a:solidFill>
+            <a:srgbClr val="006FCF"/>
+          </a:solidFill>
+          <a:ln/>
+        </p:spPr>
+      </p:sp>
+      <p:sp>
+        <p:nvSpPr>
+          <p:cNvPr id="187" name="Shape 185"/>
+          <p:cNvSpPr/>
+          <p:nvPr/>
+        </p:nvSpPr>
+        <p:spPr>
+          <a:xfrm>
+            <a:off x="4581144" y="4850892"/>
+            <a:ext cx="201168" cy="201168"/>
+          </a:xfrm>
+          <a:prstGeom prst="roundRect">
+            <a:avLst>
+              <a:gd name="adj" fmla="val 13636"/>
+            </a:avLst>
+          </a:prstGeom>
+          <a:solidFill>
+            <a:srgbClr val="006FCF"/>
+          </a:solidFill>
+          <a:ln/>
+        </p:spPr>
+      </p:sp>
+      <p:sp>
+        <p:nvSpPr>
+          <p:cNvPr id="188" name="Shape 186"/>
+          <p:cNvSpPr/>
+          <p:nvPr/>
+        </p:nvSpPr>
+        <p:spPr>
+          <a:xfrm>
+            <a:off x="4823460" y="4850892"/>
+            <a:ext cx="201168" cy="201168"/>
+          </a:xfrm>
+          <a:prstGeom prst="roundRect">
+            <a:avLst>
+              <a:gd name="adj" fmla="val 13636"/>
+            </a:avLst>
+          </a:prstGeom>
+          <a:solidFill>
+            <a:srgbClr val="006FCF"/>
+          </a:solidFill>
+          <a:ln/>
+        </p:spPr>
+      </p:sp>
+      <p:sp>
+        <p:nvSpPr>
+          <p:cNvPr id="189" name="Shape 187"/>
+          <p:cNvSpPr/>
+          <p:nvPr/>
+        </p:nvSpPr>
+        <p:spPr>
+          <a:xfrm>
+            <a:off x="5065776" y="4850892"/>
+            <a:ext cx="201168" cy="201168"/>
+          </a:xfrm>
+          <a:prstGeom prst="roundRect">
+            <a:avLst>
+              <a:gd name="adj" fmla="val 13636"/>
+            </a:avLst>
+          </a:prstGeom>
+          <a:solidFill>
+            <a:srgbClr val="006FCF"/>
+          </a:solidFill>
+          <a:ln/>
+        </p:spPr>
+      </p:sp>
+      <p:sp>
+        <p:nvSpPr>
+          <p:cNvPr id="190" name="Shape 188"/>
+          <p:cNvSpPr/>
+          <p:nvPr/>
+        </p:nvSpPr>
+        <p:spPr>
+          <a:xfrm>
+            <a:off x="5308092" y="4850892"/>
+            <a:ext cx="201168" cy="201168"/>
+          </a:xfrm>
+          <a:prstGeom prst="roundRect">
+            <a:avLst>
+              <a:gd name="adj" fmla="val 13636"/>
+            </a:avLst>
+          </a:prstGeom>
+          <a:solidFill>
+            <a:srgbClr val="006FCF"/>
+          </a:solidFill>
+          <a:ln/>
+        </p:spPr>
+      </p:sp>
+      <p:sp>
+        <p:nvSpPr>
+          <p:cNvPr id="191" name="Shape 189"/>
+          <p:cNvSpPr/>
+          <p:nvPr/>
+        </p:nvSpPr>
+        <p:spPr>
+          <a:xfrm>
+            <a:off x="5550408" y="4850892"/>
+            <a:ext cx="201168" cy="201168"/>
+          </a:xfrm>
+          <a:prstGeom prst="roundRect">
+            <a:avLst>
+              <a:gd name="adj" fmla="val 13636"/>
+            </a:avLst>
+          </a:prstGeom>
+          <a:solidFill>
+            <a:srgbClr val="006FCF"/>
+          </a:solidFill>
+          <a:ln/>
+        </p:spPr>
+      </p:sp>
+      <p:sp>
+        <p:nvSpPr>
+          <p:cNvPr id="192" name="Shape 190"/>
+          <p:cNvSpPr/>
+          <p:nvPr/>
+        </p:nvSpPr>
+        <p:spPr>
+          <a:xfrm>
+            <a:off x="5792724" y="4850892"/>
+            <a:ext cx="201168" cy="201168"/>
+          </a:xfrm>
+          <a:prstGeom prst="roundRect">
+            <a:avLst>
+              <a:gd name="adj" fmla="val 13636"/>
+            </a:avLst>
+          </a:prstGeom>
+          <a:solidFill>
+            <a:srgbClr val="006FCF"/>
+          </a:solidFill>
+          <a:ln/>
+        </p:spPr>
+      </p:sp>
+      <p:sp>
+        <p:nvSpPr>
+          <p:cNvPr id="193" name="Shape 191"/>
+          <p:cNvSpPr/>
+          <p:nvPr/>
+        </p:nvSpPr>
+        <p:spPr>
+          <a:xfrm>
+            <a:off x="3611880" y="5093208"/>
+            <a:ext cx="201168" cy="201168"/>
+          </a:xfrm>
+          <a:prstGeom prst="roundRect">
+            <a:avLst>
+              <a:gd name="adj" fmla="val 13636"/>
+            </a:avLst>
+          </a:prstGeom>
+          <a:solidFill>
+            <a:srgbClr val="006FCF"/>
+          </a:solidFill>
+          <a:ln/>
+        </p:spPr>
+      </p:sp>
+      <p:sp>
+        <p:nvSpPr>
+          <p:cNvPr id="194" name="Shape 192"/>
+          <p:cNvSpPr/>
+          <p:nvPr/>
+        </p:nvSpPr>
+        <p:spPr>
+          <a:xfrm>
+            <a:off x="3854196" y="5093208"/>
+            <a:ext cx="201168" cy="201168"/>
+          </a:xfrm>
+          <a:prstGeom prst="roundRect">
+            <a:avLst>
+              <a:gd name="adj" fmla="val 13636"/>
+            </a:avLst>
+          </a:prstGeom>
+          <a:solidFill>
+            <a:srgbClr val="006FCF"/>
+          </a:solidFill>
+          <a:ln/>
+        </p:spPr>
+      </p:sp>
+      <p:sp>
+        <p:nvSpPr>
+          <p:cNvPr id="195" name="Shape 193"/>
+          <p:cNvSpPr/>
+          <p:nvPr/>
+        </p:nvSpPr>
+        <p:spPr>
+          <a:xfrm>
+            <a:off x="4096512" y="5093208"/>
+            <a:ext cx="201168" cy="201168"/>
+          </a:xfrm>
+          <a:prstGeom prst="roundRect">
+            <a:avLst>
+              <a:gd name="adj" fmla="val 13636"/>
+            </a:avLst>
+          </a:prstGeom>
+          <a:solidFill>
+            <a:srgbClr val="006FCF"/>
+          </a:solidFill>
+          <a:ln/>
+        </p:spPr>
+      </p:sp>
+      <p:sp>
+        <p:nvSpPr>
+          <p:cNvPr id="196" name="Shape 194"/>
+          <p:cNvSpPr/>
+          <p:nvPr/>
+        </p:nvSpPr>
+        <p:spPr>
+          <a:xfrm>
+            <a:off x="4338828" y="5093208"/>
+            <a:ext cx="201168" cy="201168"/>
+          </a:xfrm>
+          <a:prstGeom prst="roundRect">
+            <a:avLst>
+              <a:gd name="adj" fmla="val 13636"/>
+            </a:avLst>
+          </a:prstGeom>
+          <a:solidFill>
+            <a:srgbClr val="006FCF"/>
+          </a:solidFill>
+          <a:ln/>
+        </p:spPr>
+      </p:sp>
+      <p:sp>
+        <p:nvSpPr>
+          <p:cNvPr id="197" name="Shape 195"/>
+          <p:cNvSpPr/>
+          <p:nvPr/>
+        </p:nvSpPr>
+        <p:spPr>
+          <a:xfrm>
+            <a:off x="4581144" y="5093208"/>
+            <a:ext cx="201168" cy="201168"/>
+          </a:xfrm>
+          <a:prstGeom prst="roundRect">
+            <a:avLst>
+              <a:gd name="adj" fmla="val 13636"/>
+            </a:avLst>
+          </a:prstGeom>
+          <a:solidFill>
+            <a:srgbClr val="006FCF"/>
+          </a:solidFill>
+          <a:ln/>
+        </p:spPr>
+      </p:sp>
+      <p:sp>
+        <p:nvSpPr>
+          <p:cNvPr id="198" name="Shape 196"/>
+          <p:cNvSpPr/>
+          <p:nvPr/>
+        </p:nvSpPr>
+        <p:spPr>
+          <a:xfrm>
+            <a:off x="4823460" y="5093208"/>
+            <a:ext cx="201168" cy="201168"/>
+          </a:xfrm>
+          <a:prstGeom prst="roundRect">
+            <a:avLst>
+              <a:gd name="adj" fmla="val 13636"/>
+            </a:avLst>
+          </a:prstGeom>
+          <a:solidFill>
+            <a:srgbClr val="006FCF"/>
+          </a:solidFill>
+          <a:ln/>
+        </p:spPr>
+      </p:sp>
+      <p:sp>
+        <p:nvSpPr>
+          <p:cNvPr id="199" name="Shape 197"/>
+          <p:cNvSpPr/>
+          <p:nvPr/>
+        </p:nvSpPr>
+        <p:spPr>
+          <a:xfrm>
+            <a:off x="5065776" y="5093208"/>
+            <a:ext cx="201168" cy="201168"/>
+          </a:xfrm>
+          <a:prstGeom prst="roundRect">
+            <a:avLst>
+              <a:gd name="adj" fmla="val 13636"/>
+            </a:avLst>
+          </a:prstGeom>
+          <a:solidFill>
+            <a:srgbClr val="006FCF"/>
+          </a:solidFill>
+          <a:ln/>
+        </p:spPr>
+      </p:sp>
+      <p:sp>
+        <p:nvSpPr>
+          <p:cNvPr id="200" name="Shape 198"/>
+          <p:cNvSpPr/>
+          <p:nvPr/>
+        </p:nvSpPr>
+        <p:spPr>
+          <a:xfrm>
+            <a:off x="5308092" y="5093208"/>
+            <a:ext cx="201168" cy="201168"/>
+          </a:xfrm>
+          <a:prstGeom prst="roundRect">
+            <a:avLst>
+              <a:gd name="adj" fmla="val 13636"/>
+            </a:avLst>
+          </a:prstGeom>
+          <a:solidFill>
+            <a:srgbClr val="006FCF"/>
+          </a:solidFill>
+          <a:ln/>
+        </p:spPr>
+      </p:sp>
+      <p:sp>
+        <p:nvSpPr>
+          <p:cNvPr id="201" name="Shape 199"/>
+          <p:cNvSpPr/>
+          <p:nvPr/>
+        </p:nvSpPr>
+        <p:spPr>
+          <a:xfrm>
+            <a:off x="5550408" y="5093208"/>
+            <a:ext cx="201168" cy="201168"/>
+          </a:xfrm>
+          <a:prstGeom prst="roundRect">
+            <a:avLst>
+              <a:gd name="adj" fmla="val 13636"/>
+            </a:avLst>
+          </a:prstGeom>
+          <a:solidFill>
+            <a:srgbClr val="006FCF"/>
+          </a:solidFill>
+          <a:ln/>
+        </p:spPr>
+      </p:sp>
+      <p:sp>
+        <p:nvSpPr>
+          <p:cNvPr id="202" name="Shape 200"/>
+          <p:cNvSpPr/>
+          <p:nvPr/>
+        </p:nvSpPr>
+        <p:spPr>
+          <a:xfrm>
+            <a:off x="5792724" y="5093208"/>
+            <a:ext cx="201168" cy="201168"/>
+          </a:xfrm>
+          <a:prstGeom prst="roundRect">
+            <a:avLst>
+              <a:gd name="adj" fmla="val 13636"/>
+            </a:avLst>
+          </a:prstGeom>
+          <a:solidFill>
+            <a:srgbClr val="006FCF"/>
+          </a:solidFill>
+          <a:ln/>
+        </p:spPr>
+      </p:sp>
+      <p:sp>
+        <p:nvSpPr>
+          <p:cNvPr id="203" name="Shape 201"/>
+          <p:cNvSpPr/>
+          <p:nvPr/>
+        </p:nvSpPr>
+        <p:spPr>
+          <a:xfrm>
+            <a:off x="3611880" y="5335524"/>
+            <a:ext cx="201168" cy="201168"/>
+          </a:xfrm>
+          <a:prstGeom prst="roundRect">
+            <a:avLst>
+              <a:gd name="adj" fmla="val 13636"/>
+            </a:avLst>
+          </a:prstGeom>
+          <a:solidFill>
+            <a:srgbClr val="006FCF"/>
+          </a:solidFill>
+          <a:ln/>
+        </p:spPr>
+      </p:sp>
+      <p:sp>
+        <p:nvSpPr>
+          <p:cNvPr id="204" name="Shape 202"/>
+          <p:cNvSpPr/>
+          <p:nvPr/>
+        </p:nvSpPr>
+        <p:spPr>
+          <a:xfrm>
+            <a:off x="3854196" y="5335524"/>
+            <a:ext cx="201168" cy="201168"/>
+          </a:xfrm>
+          <a:prstGeom prst="roundRect">
+            <a:avLst>
+              <a:gd name="adj" fmla="val 13636"/>
+            </a:avLst>
+          </a:prstGeom>
+          <a:solidFill>
+            <a:srgbClr val="006FCF"/>
+          </a:solidFill>
+          <a:ln/>
+        </p:spPr>
+      </p:sp>
+      <p:sp>
+        <p:nvSpPr>
+          <p:cNvPr id="205" name="Shape 203"/>
+          <p:cNvSpPr/>
+          <p:nvPr/>
+        </p:nvSpPr>
+        <p:spPr>
+          <a:xfrm>
+            <a:off x="4096512" y="5335524"/>
+            <a:ext cx="201168" cy="201168"/>
+          </a:xfrm>
+          <a:prstGeom prst="roundRect">
+            <a:avLst>
+              <a:gd name="adj" fmla="val 13636"/>
+            </a:avLst>
+          </a:prstGeom>
+          <a:solidFill>
+            <a:srgbClr val="006FCF"/>
+          </a:solidFill>
+          <a:ln/>
+        </p:spPr>
+      </p:sp>
+      <p:sp>
+        <p:nvSpPr>
+          <p:cNvPr id="206" name="Shape 204"/>
+          <p:cNvSpPr/>
+          <p:nvPr/>
+        </p:nvSpPr>
+        <p:spPr>
+          <a:xfrm>
+            <a:off x="4338828" y="5335524"/>
+            <a:ext cx="201168" cy="201168"/>
+          </a:xfrm>
+          <a:prstGeom prst="roundRect">
+            <a:avLst>
+              <a:gd name="adj" fmla="val 13636"/>
+            </a:avLst>
+          </a:prstGeom>
+          <a:solidFill>
+            <a:srgbClr val="006FCF"/>
+          </a:solidFill>
+          <a:ln/>
+        </p:spPr>
+      </p:sp>
+      <p:sp>
+        <p:nvSpPr>
+          <p:cNvPr id="207" name="Shape 205"/>
+          <p:cNvSpPr/>
+          <p:nvPr/>
+        </p:nvSpPr>
+        <p:spPr>
+          <a:xfrm>
+            <a:off x="4581144" y="5335524"/>
+            <a:ext cx="201168" cy="201168"/>
+          </a:xfrm>
+          <a:prstGeom prst="roundRect">
+            <a:avLst>
+              <a:gd name="adj" fmla="val 13636"/>
+            </a:avLst>
+          </a:prstGeom>
+          <a:solidFill>
+            <a:srgbClr val="006FCF"/>
+          </a:solidFill>
+          <a:ln/>
+        </p:spPr>
+      </p:sp>
+      <p:sp>
+        <p:nvSpPr>
+          <p:cNvPr id="208" name="Shape 206"/>
+          <p:cNvSpPr/>
+          <p:nvPr/>
+        </p:nvSpPr>
+        <p:spPr>
+          <a:xfrm>
+            <a:off x="4823460" y="5335524"/>
+            <a:ext cx="201168" cy="201168"/>
+          </a:xfrm>
+          <a:prstGeom prst="roundRect">
+            <a:avLst>
+              <a:gd name="adj" fmla="val 13636"/>
+            </a:avLst>
+          </a:prstGeom>
+          <a:solidFill>
+            <a:srgbClr val="006FCF"/>
+          </a:solidFill>
+          <a:ln/>
+        </p:spPr>
+      </p:sp>
+      <p:sp>
+        <p:nvSpPr>
+          <p:cNvPr id="209" name="Shape 207"/>
+          <p:cNvSpPr/>
+          <p:nvPr/>
+        </p:nvSpPr>
+        <p:spPr>
+          <a:xfrm>
+            <a:off x="5065776" y="5335524"/>
+            <a:ext cx="201168" cy="201168"/>
+          </a:xfrm>
+          <a:prstGeom prst="roundRect">
+            <a:avLst>
+              <a:gd name="adj" fmla="val 13636"/>
+            </a:avLst>
+          </a:prstGeom>
+          <a:solidFill>
+            <a:srgbClr val="006FCF"/>
+          </a:solidFill>
+          <a:ln/>
+        </p:spPr>
+      </p:sp>
+      <p:sp>
+        <p:nvSpPr>
+          <p:cNvPr id="210" name="Shape 208"/>
+          <p:cNvSpPr/>
+          <p:nvPr/>
+        </p:nvSpPr>
+        <p:spPr>
+          <a:xfrm>
+            <a:off x="5308092" y="5335524"/>
+            <a:ext cx="201168" cy="201168"/>
+          </a:xfrm>
+          <a:prstGeom prst="roundRect">
+            <a:avLst>
+              <a:gd name="adj" fmla="val 13636"/>
+            </a:avLst>
+          </a:prstGeom>
+          <a:solidFill>
+            <a:srgbClr val="C9D2DC"/>
+          </a:solidFill>
+          <a:ln/>
+        </p:spPr>
+      </p:sp>
+      <p:sp>
+        <p:nvSpPr>
+          <p:cNvPr id="211" name="Shape 209"/>
+          <p:cNvSpPr/>
+          <p:nvPr/>
+        </p:nvSpPr>
+        <p:spPr>
+          <a:xfrm>
+            <a:off x="5550408" y="5335524"/>
+            <a:ext cx="201168" cy="201168"/>
+          </a:xfrm>
+          <a:prstGeom prst="roundRect">
+            <a:avLst>
+              <a:gd name="adj" fmla="val 13636"/>
+            </a:avLst>
+          </a:prstGeom>
+          <a:solidFill>
+            <a:srgbClr val="C9D2DC"/>
+          </a:solidFill>
+          <a:ln/>
+        </p:spPr>
+      </p:sp>
+      <p:sp>
+        <p:nvSpPr>
+          <p:cNvPr id="212" name="Shape 210"/>
+          <p:cNvSpPr/>
+          <p:nvPr/>
+        </p:nvSpPr>
+        <p:spPr>
+          <a:xfrm>
+            <a:off x="5792724" y="5335524"/>
+            <a:ext cx="201168" cy="201168"/>
+          </a:xfrm>
+          <a:prstGeom prst="roundRect">
+            <a:avLst>
+              <a:gd name="adj" fmla="val 13636"/>
+            </a:avLst>
+          </a:prstGeom>
+          <a:solidFill>
+            <a:srgbClr val="C9D2DC"/>
+          </a:solidFill>
+          <a:ln/>
+        </p:spPr>
+      </p:sp>
+      <p:sp>
+        <p:nvSpPr>
+          <p:cNvPr id="213" name="Text 211"/>
+          <p:cNvSpPr txBox="1"/>
+          <p:nvPr/>
+        </p:nvSpPr>
+        <p:spPr>
+          <a:xfrm>
+            <a:off x="3611880" y="5596128"/>
+            <a:ext cx="2377440" cy="274320"/>
+          </a:xfrm>
+          <a:prstGeom prst="rect">
+            <a:avLst/>
+          </a:prstGeom>
+          <a:noFill/>
+          <a:ln/>
+        </p:spPr>
+        <p:txBody>
+          <a:bodyPr wrap="square" lIns="0" tIns="0" rIns="0" bIns="0" rtlCol="0" anchor="ctr"/>
+          <a:lstStyle/>
+          <a:p>
+            <a:pPr indent="0" marL="0">
+              <a:buNone/>
+            </a:pPr>
+            <a:r>
+              <a:rPr lang="en-US" sz="1000" i="1" dirty="0">
+                <a:solidFill>
+                  <a:srgbClr val="8C959E"/>
+                </a:solidFill>
+                <a:latin typeface="Calibri" pitchFamily="34" charset="0"/>
+                <a:ea typeface="Calibri" pitchFamily="34" charset="-122"/>
+                <a:cs typeface="Calibri" pitchFamily="34" charset="-120"/>
+              </a:rPr>
+              <a:t>NIST corpus, C, C++ and Java</a:t>
+            </a:r>
+            <a:endParaRPr lang="en-US" sz="1000" dirty="0"/>
+          </a:p>
+        </p:txBody>
+      </p:sp>
+      <p:sp>
+        <p:nvSpPr>
+          <p:cNvPr id="214" name="Shape 212"/>
+          <p:cNvSpPr/>
+          <p:nvPr/>
+        </p:nvSpPr>
+        <p:spPr>
+          <a:xfrm>
+            <a:off x="685800" y="5971032"/>
+            <a:ext cx="173736" cy="173736"/>
+          </a:xfrm>
+          <a:prstGeom prst="roundRect">
+            <a:avLst>
+              <a:gd name="adj" fmla="val 15789"/>
+            </a:avLst>
+          </a:prstGeom>
+          <a:solidFill>
+            <a:srgbClr val="006FCF"/>
+          </a:solidFill>
+          <a:ln/>
+        </p:spPr>
+      </p:sp>
+      <p:sp>
+        <p:nvSpPr>
+          <p:cNvPr id="215" name="Text 213"/>
+          <p:cNvSpPr txBox="1"/>
+          <p:nvPr/>
+        </p:nvSpPr>
+        <p:spPr>
+          <a:xfrm>
+            <a:off x="941832" y="5916168"/>
+            <a:ext cx="1005840" cy="274320"/>
+          </a:xfrm>
+          <a:prstGeom prst="rect">
+            <a:avLst/>
+          </a:prstGeom>
+          <a:noFill/>
+          <a:ln/>
+        </p:spPr>
+        <p:txBody>
+          <a:bodyPr wrap="square" lIns="0" tIns="0" rIns="0" bIns="0" rtlCol="0" anchor="ctr"/>
+          <a:lstStyle/>
+          <a:p>
+            <a:pPr indent="0" marL="0">
+              <a:buNone/>
+            </a:pPr>
+            <a:r>
+              <a:rPr lang="en-US" sz="1050" dirty="0">
+                <a:solidFill>
+                  <a:srgbClr val="53565A"/>
+                </a:solidFill>
+                <a:latin typeface="Calibri" pitchFamily="34" charset="0"/>
+                <a:ea typeface="Calibri" pitchFamily="34" charset="-122"/>
+                <a:cs typeface="Calibri" pitchFamily="34" charset="-120"/>
+              </a:rPr>
+              <a:t>Detected</a:t>
+            </a:r>
+            <a:endParaRPr lang="en-US" sz="1050" dirty="0"/>
+          </a:p>
+        </p:txBody>
+      </p:sp>
+      <p:sp>
+        <p:nvSpPr>
+          <p:cNvPr id="216" name="Shape 214"/>
+          <p:cNvSpPr/>
+          <p:nvPr/>
+        </p:nvSpPr>
+        <p:spPr>
+          <a:xfrm>
+            <a:off x="1920240" y="5971032"/>
+            <a:ext cx="173736" cy="173736"/>
+          </a:xfrm>
+          <a:prstGeom prst="roundRect">
+            <a:avLst>
+              <a:gd name="adj" fmla="val 15789"/>
+            </a:avLst>
+          </a:prstGeom>
+          <a:solidFill>
+            <a:srgbClr val="C9D2DC"/>
+          </a:solidFill>
+          <a:ln/>
+        </p:spPr>
+      </p:sp>
+      <p:sp>
+        <p:nvSpPr>
+          <p:cNvPr id="217" name="Text 215"/>
+          <p:cNvSpPr txBox="1"/>
+          <p:nvPr/>
+        </p:nvSpPr>
+        <p:spPr>
+          <a:xfrm>
+            <a:off x="2176272" y="5916168"/>
+            <a:ext cx="1005840" cy="274320"/>
+          </a:xfrm>
+          <a:prstGeom prst="rect">
+            <a:avLst/>
+          </a:prstGeom>
+          <a:noFill/>
+          <a:ln/>
+        </p:spPr>
+        <p:txBody>
+          <a:bodyPr wrap="square" lIns="0" tIns="0" rIns="0" bIns="0" rtlCol="0" anchor="ctr"/>
+          <a:lstStyle/>
+          <a:p>
+            <a:pPr indent="0" marL="0">
+              <a:buNone/>
+            </a:pPr>
+            <a:r>
+              <a:rPr lang="en-US" sz="1050" dirty="0">
+                <a:solidFill>
+                  <a:srgbClr val="53565A"/>
+                </a:solidFill>
+                <a:latin typeface="Calibri" pitchFamily="34" charset="0"/>
+                <a:ea typeface="Calibri" pitchFamily="34" charset="-122"/>
+                <a:cs typeface="Calibri" pitchFamily="34" charset="-120"/>
+              </a:rPr>
+              <a:t>Missed</a:t>
+            </a:r>
+            <a:endParaRPr lang="en-US" sz="1050" dirty="0"/>
+          </a:p>
+        </p:txBody>
+      </p:sp>
+      <p:sp>
+        <p:nvSpPr>
+          <p:cNvPr id="218" name="Text 216"/>
+          <p:cNvSpPr txBox="1"/>
+          <p:nvPr/>
+        </p:nvSpPr>
+        <p:spPr>
+          <a:xfrm>
+            <a:off x="3611880" y="5916168"/>
+            <a:ext cx="2468880" cy="274320"/>
+          </a:xfrm>
+          <a:prstGeom prst="rect">
+            <a:avLst/>
+          </a:prstGeom>
+          <a:noFill/>
+          <a:ln/>
+        </p:spPr>
+        <p:txBody>
+          <a:bodyPr wrap="square" lIns="0" tIns="0" rIns="0" bIns="0" rtlCol="0" anchor="ctr"/>
+          <a:lstStyle/>
+          <a:p>
+            <a:pPr indent="0" marL="0">
+              <a:buNone/>
+            </a:pPr>
+            <a:r>
+              <a:rPr lang="en-US" sz="1050" i="1" dirty="0">
+                <a:solidFill>
+                  <a:srgbClr val="8C959E"/>
+                </a:solidFill>
+                <a:latin typeface="Calibri" pitchFamily="34" charset="0"/>
+                <a:ea typeface="Calibri" pitchFamily="34" charset="-122"/>
+                <a:cs typeface="Calibri" pitchFamily="34" charset="-120"/>
+              </a:rPr>
+              <a:t>Each square is one case in a hundred.</a:t>
+            </a:r>
+            <a:endParaRPr lang="en-US" sz="1050" dirty="0"/>
+          </a:p>
+        </p:txBody>
+      </p:sp>
+      <p:sp>
+        <p:nvSpPr>
+          <p:cNvPr id="219" name="Shape 217"/>
+          <p:cNvSpPr/>
+          <p:nvPr/>
+        </p:nvSpPr>
+        <p:spPr>
+          <a:xfrm>
+            <a:off x="6675120" y="1783080"/>
+            <a:ext cx="4965192" cy="1298448"/>
+          </a:xfrm>
+          <a:prstGeom prst="roundRect">
+            <a:avLst>
+              <a:gd name="adj" fmla="val 5634"/>
+            </a:avLst>
+          </a:prstGeom>
+          <a:solidFill>
+            <a:srgbClr val="FFFFFF"/>
+          </a:solidFill>
+          <a:ln w="12700">
+            <a:solidFill>
+              <a:srgbClr val="DCE3EC"/>
+            </a:solidFill>
+            <a:prstDash val="solid"/>
+          </a:ln>
+          <a:effectLst>
+            <a:outerShdw sx="100000" sy="100000" kx="0" ky="0" algn="bl" rotWithShape="0" blurRad="152400" dist="25400" dir="5400000">
+              <a:srgbClr val="8FA0B8">
+                <a:alpha val="20000"/>
+              </a:srgbClr>
+            </a:outerShdw>
+          </a:effectLst>
+        </p:spPr>
+      </p:sp>
+      <p:sp>
+        <p:nvSpPr>
+          <p:cNvPr id="220" name="Text 218"/>
+          <p:cNvSpPr txBox="1"/>
+          <p:nvPr/>
+        </p:nvSpPr>
+        <p:spPr>
+          <a:xfrm>
+            <a:off x="6949440" y="1965960"/>
+            <a:ext cx="4480560" cy="292608"/>
+          </a:xfrm>
+          <a:prstGeom prst="rect">
+            <a:avLst/>
+          </a:prstGeom>
+          <a:noFill/>
+          <a:ln/>
+        </p:spPr>
+        <p:txBody>
+          <a:bodyPr wrap="square" lIns="0" tIns="0" rIns="0" bIns="0" rtlCol="0" anchor="ctr"/>
+          <a:lstStyle/>
+          <a:p>
+            <a:pPr indent="0" marL="0">
+              <a:buNone/>
+            </a:pPr>
+            <a:r>
+              <a:rPr lang="en-US" sz="1450" b="1" dirty="0">
+                <a:solidFill>
+                  <a:srgbClr val="1B2A44"/>
+                </a:solidFill>
+                <a:latin typeface="Cambria" pitchFamily="34" charset="0"/>
+                <a:ea typeface="Cambria" pitchFamily="34" charset="-122"/>
+                <a:cs typeface="Cambria" pitchFamily="34" charset="-120"/>
+              </a:rPr>
+              <a:t>Two suites, two different shapes of test</a:t>
+            </a:r>
+            <a:endParaRPr lang="en-US" sz="1450" dirty="0"/>
+          </a:p>
+        </p:txBody>
+      </p:sp>
+      <p:sp>
+        <p:nvSpPr>
+          <p:cNvPr id="221" name="Text 219"/>
+          <p:cNvSpPr txBox="1"/>
+          <p:nvPr/>
+        </p:nvSpPr>
+        <p:spPr>
+          <a:xfrm>
+            <a:off x="6949440" y="2295144"/>
+            <a:ext cx="4434840" cy="713232"/>
+          </a:xfrm>
+          <a:prstGeom prst="rect">
+            <a:avLst/>
+          </a:prstGeom>
+          <a:noFill/>
+          <a:ln/>
+        </p:spPr>
+        <p:txBody>
+          <a:bodyPr wrap="square" lIns="0" tIns="0" rIns="0" bIns="0" rtlCol="0" anchor="ctr"/>
+          <a:lstStyle/>
+          <a:p>
+            <a:pPr indent="0" marL="0">
+              <a:lnSpc>
+                <a:spcPct val="115000"/>
+              </a:lnSpc>
+              <a:buNone/>
+            </a:pPr>
+            <a:r>
+              <a:rPr lang="en-US" sz="1100" dirty="0">
+                <a:solidFill>
+                  <a:srgbClr val="53565A"/>
+                </a:solidFill>
+                <a:latin typeface="Calibri" pitchFamily="34" charset="0"/>
+                <a:ea typeface="Calibri" pitchFamily="34" charset="-122"/>
+                <a:cs typeface="Calibri" pitchFamily="34" charset="-120"/>
+              </a:rPr>
+              <a:t>OWASP Benchmark exercises Java web application classes such as injection and access control. Juliet is the NIST maintained corpus spanning a wide range of defect classes across C, C++ and Java.</a:t>
+            </a:r>
+            <a:endParaRPr lang="en-US" sz="1100" dirty="0"/>
+          </a:p>
+        </p:txBody>
+      </p:sp>
+      <p:sp>
+        <p:nvSpPr>
+          <p:cNvPr id="222" name="Shape 220"/>
+          <p:cNvSpPr/>
+          <p:nvPr/>
+        </p:nvSpPr>
+        <p:spPr>
+          <a:xfrm>
+            <a:off x="6675120" y="3227832"/>
+            <a:ext cx="4965192" cy="1298448"/>
+          </a:xfrm>
+          <a:prstGeom prst="roundRect">
+            <a:avLst>
+              <a:gd name="adj" fmla="val 5634"/>
+            </a:avLst>
+          </a:prstGeom>
+          <a:solidFill>
+            <a:srgbClr val="FFFFFF"/>
+          </a:solidFill>
+          <a:ln w="12700">
+            <a:solidFill>
+              <a:srgbClr val="DCE3EC"/>
+            </a:solidFill>
+            <a:prstDash val="solid"/>
+          </a:ln>
+          <a:effectLst>
+            <a:outerShdw sx="100000" sy="100000" kx="0" ky="0" algn="bl" rotWithShape="0" blurRad="152400" dist="25400" dir="5400000">
+              <a:srgbClr val="8FA0B8">
+                <a:alpha val="20000"/>
+              </a:srgbClr>
+            </a:outerShdw>
+          </a:effectLst>
+        </p:spPr>
+      </p:sp>
+      <p:sp>
+        <p:nvSpPr>
+          <p:cNvPr id="223" name="Text 221"/>
+          <p:cNvSpPr txBox="1"/>
+          <p:nvPr/>
+        </p:nvSpPr>
+        <p:spPr>
+          <a:xfrm>
+            <a:off x="6949440" y="3410712"/>
+            <a:ext cx="4480560" cy="292608"/>
+          </a:xfrm>
+          <a:prstGeom prst="rect">
+            <a:avLst/>
+          </a:prstGeom>
+          <a:noFill/>
+          <a:ln/>
+        </p:spPr>
+        <p:txBody>
+          <a:bodyPr wrap="square" lIns="0" tIns="0" rIns="0" bIns="0" rtlCol="0" anchor="ctr"/>
+          <a:lstStyle/>
+          <a:p>
+            <a:pPr indent="0" marL="0">
+              <a:buNone/>
+            </a:pPr>
+            <a:r>
+              <a:rPr lang="en-US" sz="1450" b="1" dirty="0">
+                <a:solidFill>
+                  <a:srgbClr val="1B2A44"/>
+                </a:solidFill>
+                <a:latin typeface="Cambria" pitchFamily="34" charset="0"/>
+                <a:ea typeface="Cambria" pitchFamily="34" charset="-122"/>
+                <a:cs typeface="Cambria" pitchFamily="34" charset="-120"/>
+              </a:rPr>
+              <a:t>Misses and false alarms, measured together</a:t>
+            </a:r>
+            <a:endParaRPr lang="en-US" sz="1450" dirty="0"/>
+          </a:p>
+        </p:txBody>
+      </p:sp>
+      <p:sp>
+        <p:nvSpPr>
+          <p:cNvPr id="224" name="Text 222"/>
+          <p:cNvSpPr txBox="1"/>
+          <p:nvPr/>
+        </p:nvSpPr>
+        <p:spPr>
+          <a:xfrm>
+            <a:off x="6949440" y="3739896"/>
+            <a:ext cx="4434840" cy="713232"/>
+          </a:xfrm>
+          <a:prstGeom prst="rect">
+            <a:avLst/>
+          </a:prstGeom>
+          <a:noFill/>
+          <a:ln/>
+        </p:spPr>
+        <p:txBody>
+          <a:bodyPr wrap="square" lIns="0" tIns="0" rIns="0" bIns="0" rtlCol="0" anchor="ctr"/>
+          <a:lstStyle/>
+          <a:p>
+            <a:pPr indent="0" marL="0">
+              <a:lnSpc>
+                <a:spcPct val="115000"/>
+              </a:lnSpc>
+              <a:buNone/>
+            </a:pPr>
+            <a:r>
+              <a:rPr lang="en-US" sz="1100" dirty="0">
+                <a:solidFill>
+                  <a:srgbClr val="53565A"/>
+                </a:solidFill>
+                <a:latin typeface="Calibri" pitchFamily="34" charset="0"/>
+                <a:ea typeface="Calibri" pitchFamily="34" charset="-122"/>
+                <a:cs typeface="Calibri" pitchFamily="34" charset="-120"/>
+              </a:rPr>
+              <a:t>Both suites pair a vulnerable case with a safe variant of the same code, so a single run scores what was missed and what was flagged in error. The harness classified both sides correctly.</a:t>
+            </a:r>
+            <a:endParaRPr lang="en-US" sz="1100" dirty="0"/>
+          </a:p>
+        </p:txBody>
+      </p:sp>
+      <p:sp>
+        <p:nvSpPr>
+          <p:cNvPr id="225" name="Shape 223"/>
+          <p:cNvSpPr/>
+          <p:nvPr/>
+        </p:nvSpPr>
+        <p:spPr>
+          <a:xfrm>
+            <a:off x="6675120" y="4672584"/>
+            <a:ext cx="4965192" cy="1298448"/>
+          </a:xfrm>
+          <a:prstGeom prst="roundRect">
+            <a:avLst>
+              <a:gd name="adj" fmla="val 5634"/>
+            </a:avLst>
+          </a:prstGeom>
+          <a:solidFill>
+            <a:srgbClr val="EAF2FB"/>
+          </a:solidFill>
+          <a:ln w="12700">
+            <a:solidFill>
+              <a:srgbClr val="C6DDF3"/>
+            </a:solidFill>
+            <a:prstDash val="solid"/>
+          </a:ln>
+          <a:effectLst>
+            <a:outerShdw sx="100000" sy="100000" kx="0" ky="0" algn="bl" rotWithShape="0" blurRad="152400" dist="25400" dir="5400000">
+              <a:srgbClr val="8FA0B8">
+                <a:alpha val="20000"/>
+              </a:srgbClr>
+            </a:outerShdw>
+          </a:effectLst>
+        </p:spPr>
+      </p:sp>
+      <p:sp>
+        <p:nvSpPr>
+          <p:cNvPr id="226" name="Text 224"/>
+          <p:cNvSpPr txBox="1"/>
+          <p:nvPr/>
+        </p:nvSpPr>
+        <p:spPr>
+          <a:xfrm>
+            <a:off x="6949440" y="4855464"/>
+            <a:ext cx="4480560" cy="292608"/>
+          </a:xfrm>
+          <a:prstGeom prst="rect">
+            <a:avLst/>
+          </a:prstGeom>
+          <a:noFill/>
+          <a:ln/>
+        </p:spPr>
+        <p:txBody>
+          <a:bodyPr wrap="square" lIns="0" tIns="0" rIns="0" bIns="0" rtlCol="0" anchor="ctr"/>
+          <a:lstStyle/>
+          <a:p>
+            <a:pPr indent="0" marL="0">
+              <a:buNone/>
+            </a:pPr>
+            <a:r>
+              <a:rPr lang="en-US" sz="1450" b="1" dirty="0">
+                <a:solidFill>
+                  <a:srgbClr val="00175A"/>
+                </a:solidFill>
+                <a:latin typeface="Cambria" pitchFamily="34" charset="0"/>
+                <a:ea typeface="Cambria" pitchFamily="34" charset="-122"/>
+                <a:cs typeface="Cambria" pitchFamily="34" charset="-120"/>
+              </a:rPr>
+              <a:t>Nothing invented along the way</a:t>
+            </a:r>
+            <a:endParaRPr lang="en-US" sz="1450" dirty="0"/>
+          </a:p>
+        </p:txBody>
+      </p:sp>
+      <p:sp>
+        <p:nvSpPr>
+          <p:cNvPr id="227" name="Text 225"/>
+          <p:cNvSpPr txBox="1"/>
+          <p:nvPr/>
+        </p:nvSpPr>
+        <p:spPr>
+          <a:xfrm>
+            <a:off x="6949440" y="5184648"/>
+            <a:ext cx="4434840" cy="713232"/>
+          </a:xfrm>
+          <a:prstGeom prst="rect">
+            <a:avLst/>
+          </a:prstGeom>
+          <a:noFill/>
+          <a:ln/>
+        </p:spPr>
+        <p:txBody>
+          <a:bodyPr wrap="square" lIns="0" tIns="0" rIns="0" bIns="0" rtlCol="0" anchor="ctr"/>
+          <a:lstStyle/>
+          <a:p>
+            <a:pPr indent="0" marL="0">
+              <a:lnSpc>
+                <a:spcPct val="115000"/>
+              </a:lnSpc>
+              <a:buNone/>
+            </a:pPr>
+            <a:r>
+              <a:rPr lang="en-US" sz="1100" dirty="0">
+                <a:solidFill>
+                  <a:srgbClr val="53565A"/>
+                </a:solidFill>
+                <a:latin typeface="Calibri" pitchFamily="34" charset="0"/>
+                <a:ea typeface="Calibri" pitchFamily="34" charset="-122"/>
+                <a:cs typeface="Calibri" pitchFamily="34" charset="-120"/>
+              </a:rPr>
+              <a:t>Every verdict was scored against the case’s published answer. The harness did not report vulnerabilities the corpus does not contain, and did not fabricate reasoning to support a call.</a:t>
+            </a:r>
+            <a:endParaRPr lang="en-US" sz="1100" dirty="0"/>
+          </a:p>
+        </p:txBody>
+      </p:sp>
+      <p:sp>
+        <p:nvSpPr>
+          <p:cNvPr id="228" name="Shape 226"/>
+          <p:cNvSpPr/>
+          <p:nvPr/>
+        </p:nvSpPr>
+        <p:spPr>
+          <a:xfrm>
+            <a:off x="6675120" y="6144768"/>
+            <a:ext cx="4965192" cy="548640"/>
+          </a:xfrm>
+          <a:prstGeom prst="roundRect">
+            <a:avLst>
+              <a:gd name="adj" fmla="val 13333"/>
+            </a:avLst>
+          </a:prstGeom>
+          <a:solidFill>
+            <a:srgbClr val="00175A"/>
+          </a:solidFill>
+          <a:ln/>
+          <a:effectLst>
+            <a:outerShdw sx="100000" sy="100000" kx="0" ky="0" algn="bl" rotWithShape="0" blurRad="152400" dist="25400" dir="5400000">
+              <a:srgbClr val="8FA0B8">
+                <a:alpha val="20000"/>
+              </a:srgbClr>
+            </a:outerShdw>
+          </a:effectLst>
+        </p:spPr>
+      </p:sp>
+      <p:sp>
+        <p:nvSpPr>
+          <p:cNvPr id="229" name="Text 227"/>
+          <p:cNvSpPr txBox="1"/>
+          <p:nvPr/>
+        </p:nvSpPr>
+        <p:spPr>
+          <a:xfrm>
+            <a:off x="6903720" y="6144768"/>
+            <a:ext cx="4526280" cy="548640"/>
+          </a:xfrm>
+          <a:prstGeom prst="rect">
+            <a:avLst/>
+          </a:prstGeom>
+          <a:noFill/>
+          <a:ln/>
+        </p:spPr>
+        <p:txBody>
+          <a:bodyPr wrap="square" lIns="0" tIns="0" rIns="0" bIns="0" rtlCol="0" anchor="ctr"/>
+          <a:lstStyle/>
+          <a:p>
+            <a:pPr indent="0" marL="0">
+              <a:lnSpc>
+                <a:spcPct val="110000"/>
+              </a:lnSpc>
+              <a:buNone/>
+            </a:pPr>
+            <a:r>
+              <a:rPr lang="en-US" sz="1050" dirty="0">
+                <a:solidFill>
+                  <a:srgbClr val="FFFFFF"/>
+                </a:solidFill>
+                <a:latin typeface="Calibri" pitchFamily="34" charset="0"/>
+                <a:ea typeface="Calibri" pitchFamily="34" charset="-122"/>
+                <a:cs typeface="Calibri" pitchFamily="34" charset="-120"/>
+              </a:rPr>
+              <a:t>Synthetic suites with known answers. The field results that follow are the same standard on real code.</a:t>
+            </a:r>
+            <a:endParaRPr lang="en-US" sz="1050" dirty="0"/>
+          </a:p>
+        </p:txBody>
+      </p:sp>
+    </p:spTree>
+  </p:cSld>
+  <p:clrMapOvr>
+    <a:masterClrMapping/>
+  </p:clrMapOvr>
+</p:sld>
+</file>
+
+<file path=ppt/slides/slide14.xml><?xml version="1.0" encoding="utf-8"?>
 <p:sld xmlns:a="http://schemas.openxmlformats.org/drawingml/2006/main" xmlns:r="http://schemas.openxmlformats.org/officeDocument/2006/relationships" xmlns:p="http://schemas.openxmlformats.org/presentationml/2006/main">
   <p:cSld name="Slide 1">
     <p:bg>
@@ -6894,7 +12588,7 @@
 </p:sld>
 </file>
 
-<file path=ppt/slides/slide14.xml><?xml version="1.0" encoding="utf-8"?>
+<file path=ppt/slides/slide15.xml><?xml version="1.0" encoding="utf-8"?>
 <p:sld xmlns:a="http://schemas.openxmlformats.org/drawingml/2006/main" xmlns:r="http://schemas.openxmlformats.org/officeDocument/2006/relationships" xmlns:p="http://schemas.openxmlformats.org/presentationml/2006/main">
   <p:cSld name="Slide 2">
     <p:bg>
@@ -8168,7 +13862,7 @@
 </p:sld>
 </file>
 
-<file path=ppt/slides/slide15.xml><?xml version="1.0" encoding="utf-8"?>
+<file path=ppt/slides/slide16.xml><?xml version="1.0" encoding="utf-8"?>
 <p:sld xmlns:a="http://schemas.openxmlformats.org/drawingml/2006/main" xmlns:r="http://schemas.openxmlformats.org/officeDocument/2006/relationships" xmlns:p="http://schemas.openxmlformats.org/presentationml/2006/main">
   <p:cSld name="Slide 3">
     <p:bg>
@@ -8950,7 +14644,7 @@
 </p:sld>
 </file>
 
-<file path=ppt/slides/slide16.xml><?xml version="1.0" encoding="utf-8"?>
+<file path=ppt/slides/slide17.xml><?xml version="1.0" encoding="utf-8"?>
 <p:sld xmlns:a="http://schemas.openxmlformats.org/drawingml/2006/main" xmlns:r="http://schemas.openxmlformats.org/officeDocument/2006/relationships" xmlns:p="http://schemas.openxmlformats.org/presentationml/2006/main">
   <p:cSld name="Slide 4">
     <p:bg>
@@ -10041,7 +15735,7 @@
 </p:sld>
 </file>
 
-<file path=ppt/slides/slide17.xml><?xml version="1.0" encoding="utf-8"?>
+<file path=ppt/slides/slide18.xml><?xml version="1.0" encoding="utf-8"?>
 <p:sld xmlns:a="http://schemas.openxmlformats.org/drawingml/2006/main" xmlns:r="http://schemas.openxmlformats.org/officeDocument/2006/relationships" xmlns:p="http://schemas.openxmlformats.org/presentationml/2006/main">
   <p:cSld name="Slide 5">
     <p:bg>
@@ -10915,7 +16609,7 @@
 </p:sld>
 </file>
 
-<file path=ppt/slides/slide18.xml><?xml version="1.0" encoding="utf-8"?>
+<file path=ppt/slides/slide19.xml><?xml version="1.0" encoding="utf-8"?>
 <p:sld xmlns:a="http://schemas.openxmlformats.org/drawingml/2006/main" xmlns:r="http://schemas.openxmlformats.org/officeDocument/2006/relationships" xmlns:p="http://schemas.openxmlformats.org/presentationml/2006/main">
   <p:cSld name="Slide 6">
     <p:bg>
@@ -11456,765 +17150,6 @@
               <a:t>A correct finding does not become wrong because a maintainer later repairs it. Reader accuracy and live count are reported separately for that reason.</a:t>
             </a:r>
             <a:endParaRPr lang="en-US" sz="1200" dirty="0"/>
-          </a:p>
-        </p:txBody>
-      </p:sp>
-    </p:spTree>
-  </p:cSld>
-  <p:clrMapOvr>
-    <a:masterClrMapping/>
-  </p:clrMapOvr>
-</p:sld>
-</file>
-
-<file path=ppt/slides/slide19.xml><?xml version="1.0" encoding="utf-8"?>
-<p:sld xmlns:a="http://schemas.openxmlformats.org/drawingml/2006/main" xmlns:r="http://schemas.openxmlformats.org/officeDocument/2006/relationships" xmlns:p="http://schemas.openxmlformats.org/presentationml/2006/main">
-  <p:cSld name="Slide 7">
-    <p:bg>
-      <p:bgPr>
-        <a:solidFill>
-          <a:srgbClr val="FFFFFF"/>
-        </a:solidFill>
-      </p:bgPr>
-    </p:bg>
-    <p:spTree>
-      <p:nvGrpSpPr>
-        <p:cNvPr id="1" name=""/>
-        <p:cNvGrpSpPr/>
-        <p:nvPr/>
-      </p:nvGrpSpPr>
-      <p:grpSpPr>
-        <a:xfrm>
-          <a:off x="0" y="0"/>
-          <a:ext cx="0" cy="0"/>
-          <a:chOff x="0" y="0"/>
-          <a:chExt cx="0" cy="0"/>
-        </a:xfrm>
-      </p:grpSpPr>
-      <p:sp>
-        <p:nvSpPr>
-          <p:cNvPr id="2" name="Text 0"/>
-          <p:cNvSpPr txBox="1"/>
-          <p:nvPr/>
-        </p:nvSpPr>
-        <p:spPr>
-          <a:xfrm>
-            <a:off x="548640" y="329184"/>
-            <a:ext cx="11094415" cy="256032"/>
-          </a:xfrm>
-          <a:prstGeom prst="rect">
-            <a:avLst/>
-          </a:prstGeom>
-          <a:noFill/>
-          <a:ln/>
-        </p:spPr>
-        <p:txBody>
-          <a:bodyPr wrap="square" lIns="0" tIns="0" rIns="0" bIns="0" rtlCol="0" anchor="ctr"/>
-          <a:lstStyle/>
-          <a:p>
-            <a:pPr indent="0" marL="0">
-              <a:buNone/>
-            </a:pPr>
-            <a:r>
-              <a:rPr lang="en-US" sz="1100" b="1" spc="200" kern="0" dirty="0">
-                <a:solidFill>
-                  <a:srgbClr val="53565A"/>
-                </a:solidFill>
-                <a:latin typeface="Calibri" pitchFamily="34" charset="0"/>
-                <a:ea typeface="Calibri" pitchFamily="34" charset="-122"/>
-                <a:cs typeface="Calibri" pitchFamily="34" charset="-120"/>
-              </a:rPr>
-              <a:t>CAPABILITY</a:t>
-            </a:r>
-            <a:endParaRPr lang="en-US" sz="1100" dirty="0"/>
-          </a:p>
-        </p:txBody>
-      </p:sp>
-      <p:sp>
-        <p:nvSpPr>
-          <p:cNvPr id="3" name="Text 1"/>
-          <p:cNvSpPr txBox="1"/>
-          <p:nvPr/>
-        </p:nvSpPr>
-        <p:spPr>
-          <a:xfrm>
-            <a:off x="548640" y="603504"/>
-            <a:ext cx="11094415" cy="566928"/>
-          </a:xfrm>
-          <a:prstGeom prst="rect">
-            <a:avLst/>
-          </a:prstGeom>
-          <a:noFill/>
-          <a:ln/>
-        </p:spPr>
-        <p:txBody>
-          <a:bodyPr wrap="square" lIns="0" tIns="0" rIns="0" bIns="0" rtlCol="0" anchor="ctr"/>
-          <a:lstStyle/>
-          <a:p>
-            <a:pPr indent="0" marL="0">
-              <a:buNone/>
-            </a:pPr>
-            <a:r>
-              <a:rPr lang="en-US" sz="3200" b="1" dirty="0">
-                <a:solidFill>
-                  <a:srgbClr val="00175A"/>
-                </a:solidFill>
-                <a:latin typeface="Cambria" pitchFamily="34" charset="0"/>
-                <a:ea typeface="Cambria" pitchFamily="34" charset="-122"/>
-                <a:cs typeface="Cambria" pitchFamily="34" charset="-120"/>
-              </a:rPr>
-              <a:t>What this gives us</a:t>
-            </a:r>
-            <a:endParaRPr lang="en-US" sz="3200" dirty="0"/>
-          </a:p>
-        </p:txBody>
-      </p:sp>
-      <p:sp>
-        <p:nvSpPr>
-          <p:cNvPr id="4" name="Text 2"/>
-          <p:cNvSpPr txBox="1"/>
-          <p:nvPr/>
-        </p:nvSpPr>
-        <p:spPr>
-          <a:xfrm>
-            <a:off x="548640" y="1188720"/>
-            <a:ext cx="10728655" cy="384048"/>
-          </a:xfrm>
-          <a:prstGeom prst="rect">
-            <a:avLst/>
-          </a:prstGeom>
-          <a:noFill/>
-          <a:ln/>
-        </p:spPr>
-        <p:txBody>
-          <a:bodyPr wrap="square" lIns="0" tIns="0" rIns="0" bIns="0" rtlCol="0" anchor="ctr"/>
-          <a:lstStyle/>
-          <a:p>
-            <a:pPr indent="0" marL="0">
-              <a:buNone/>
-            </a:pPr>
-            <a:r>
-              <a:rPr lang="en-US" sz="1400" dirty="0">
-                <a:solidFill>
-                  <a:srgbClr val="53565A"/>
-                </a:solidFill>
-                <a:latin typeface="Calibri" pitchFamily="34" charset="0"/>
-                <a:ea typeface="Calibri" pitchFamily="34" charset="-122"/>
-                <a:cs typeface="Calibri" pitchFamily="34" charset="-120"/>
-              </a:rPr>
-              <a:t>Three things this brief demonstrates that a conventional scanning tool does not.</a:t>
-            </a:r>
-            <a:endParaRPr lang="en-US" sz="1400" dirty="0"/>
-          </a:p>
-        </p:txBody>
-      </p:sp>
-      <p:sp>
-        <p:nvSpPr>
-          <p:cNvPr id="5" name="Shape 3"/>
-          <p:cNvSpPr/>
-          <p:nvPr/>
-        </p:nvSpPr>
-        <p:spPr>
-          <a:xfrm>
-            <a:off x="548640" y="1828800"/>
-            <a:ext cx="11094415" cy="1188720"/>
-          </a:xfrm>
-          <a:prstGeom prst="roundRect">
-            <a:avLst>
-              <a:gd name="adj" fmla="val 6154"/>
-            </a:avLst>
-          </a:prstGeom>
-          <a:solidFill>
-            <a:srgbClr val="F4F7FA"/>
-          </a:solidFill>
-          <a:ln w="12700">
-            <a:solidFill>
-              <a:srgbClr val="DCEAF8"/>
-            </a:solidFill>
-            <a:prstDash val="solid"/>
-          </a:ln>
-          <a:effectLst>
-            <a:outerShdw sx="100000" sy="100000" kx="0" ky="0" algn="bl" rotWithShape="0" blurRad="127000" dist="25400" dir="5400000">
-              <a:srgbClr val="00175A">
-                <a:alpha val="10000"/>
-              </a:srgbClr>
-            </a:outerShdw>
-          </a:effectLst>
-        </p:spPr>
-      </p:sp>
-      <p:sp>
-        <p:nvSpPr>
-          <p:cNvPr id="6" name="Shape 4"/>
-          <p:cNvSpPr/>
-          <p:nvPr/>
-        </p:nvSpPr>
-        <p:spPr>
-          <a:xfrm>
-            <a:off x="868680" y="2185416"/>
-            <a:ext cx="475488" cy="475488"/>
-          </a:xfrm>
-          <a:prstGeom prst="ellipse">
-            <a:avLst/>
-          </a:prstGeom>
-          <a:solidFill>
-            <a:srgbClr val="00175A"/>
-          </a:solidFill>
-          <a:ln w="12700">
-            <a:solidFill>
-              <a:srgbClr val="00175A"/>
-            </a:solidFill>
-            <a:prstDash val="solid"/>
-          </a:ln>
-        </p:spPr>
-      </p:sp>
-      <p:sp>
-        <p:nvSpPr>
-          <p:cNvPr id="7" name="Text 5"/>
-          <p:cNvSpPr txBox="1"/>
-          <p:nvPr/>
-        </p:nvSpPr>
-        <p:spPr>
-          <a:xfrm>
-            <a:off x="868680" y="2185416"/>
-            <a:ext cx="475488" cy="475488"/>
-          </a:xfrm>
-          <a:prstGeom prst="rect">
-            <a:avLst/>
-          </a:prstGeom>
-          <a:noFill/>
-          <a:ln/>
-        </p:spPr>
-        <p:txBody>
-          <a:bodyPr wrap="square" lIns="0" tIns="0" rIns="0" bIns="0" rtlCol="0" anchor="ctr"/>
-          <a:lstStyle/>
-          <a:p>
-            <a:pPr algn="ctr" indent="0" marL="0">
-              <a:buNone/>
-            </a:pPr>
-            <a:r>
-              <a:rPr lang="en-US" sz="1600" b="1" dirty="0">
-                <a:solidFill>
-                  <a:srgbClr val="FFFFFF"/>
-                </a:solidFill>
-                <a:latin typeface="Cambria" pitchFamily="34" charset="0"/>
-                <a:ea typeface="Cambria" pitchFamily="34" charset="-122"/>
-                <a:cs typeface="Cambria" pitchFamily="34" charset="-120"/>
-              </a:rPr>
-              <a:t>1</a:t>
-            </a:r>
-            <a:endParaRPr lang="en-US" sz="1600" dirty="0"/>
-          </a:p>
-        </p:txBody>
-      </p:sp>
-      <p:sp>
-        <p:nvSpPr>
-          <p:cNvPr id="8" name="Text 6"/>
-          <p:cNvSpPr txBox="1"/>
-          <p:nvPr/>
-        </p:nvSpPr>
-        <p:spPr>
-          <a:xfrm>
-            <a:off x="1600200" y="2011680"/>
-            <a:ext cx="9692640" cy="320040"/>
-          </a:xfrm>
-          <a:prstGeom prst="rect">
-            <a:avLst/>
-          </a:prstGeom>
-          <a:noFill/>
-          <a:ln/>
-        </p:spPr>
-        <p:txBody>
-          <a:bodyPr wrap="square" lIns="0" tIns="0" rIns="0" bIns="0" rtlCol="0" anchor="ctr"/>
-          <a:lstStyle/>
-          <a:p>
-            <a:pPr indent="0" marL="0">
-              <a:buNone/>
-            </a:pPr>
-            <a:r>
-              <a:rPr lang="en-US" sz="1700" b="1" dirty="0">
-                <a:solidFill>
-                  <a:srgbClr val="00175A"/>
-                </a:solidFill>
-                <a:latin typeface="Cambria" pitchFamily="34" charset="0"/>
-                <a:ea typeface="Cambria" pitchFamily="34" charset="-122"/>
-                <a:cs typeface="Cambria" pitchFamily="34" charset="-120"/>
-              </a:rPr>
-              <a:t>Depth</a:t>
-            </a:r>
-            <a:endParaRPr lang="en-US" sz="1700" dirty="0"/>
-          </a:p>
-        </p:txBody>
-      </p:sp>
-      <p:sp>
-        <p:nvSpPr>
-          <p:cNvPr id="9" name="Text 7"/>
-          <p:cNvSpPr txBox="1"/>
-          <p:nvPr/>
-        </p:nvSpPr>
-        <p:spPr>
-          <a:xfrm>
-            <a:off x="1600200" y="2377440"/>
-            <a:ext cx="9692640" cy="548640"/>
-          </a:xfrm>
-          <a:prstGeom prst="rect">
-            <a:avLst/>
-          </a:prstGeom>
-          <a:noFill/>
-          <a:ln/>
-        </p:spPr>
-        <p:txBody>
-          <a:bodyPr wrap="square" lIns="0" tIns="0" rIns="0" bIns="0" rtlCol="0" anchor="ctr"/>
-          <a:lstStyle/>
-          <a:p>
-            <a:pPr indent="0" marL="0">
-              <a:lnSpc>
-                <a:spcPts val="1700"/>
-              </a:lnSpc>
-              <a:buNone/>
-            </a:pPr>
-            <a:r>
-              <a:rPr lang="en-US" sz="1300" dirty="0">
-                <a:solidFill>
-                  <a:srgbClr val="001233"/>
-                </a:solidFill>
-                <a:latin typeface="Calibri" pitchFamily="34" charset="0"/>
-                <a:ea typeface="Calibri" pitchFamily="34" charset="-122"/>
-                <a:cs typeface="Calibri" pitchFamily="34" charset="-120"/>
-              </a:rPr>
-              <a:t>It reaches defects that human review, existing scanners and the projects' own test suites all passed over, in one case for five years running.</a:t>
-            </a:r>
-            <a:endParaRPr lang="en-US" sz="1300" dirty="0"/>
-          </a:p>
-        </p:txBody>
-      </p:sp>
-      <p:sp>
-        <p:nvSpPr>
-          <p:cNvPr id="10" name="Shape 8"/>
-          <p:cNvSpPr/>
-          <p:nvPr/>
-        </p:nvSpPr>
-        <p:spPr>
-          <a:xfrm>
-            <a:off x="548640" y="3127248"/>
-            <a:ext cx="11094415" cy="1188720"/>
-          </a:xfrm>
-          <a:prstGeom prst="roundRect">
-            <a:avLst>
-              <a:gd name="adj" fmla="val 6154"/>
-            </a:avLst>
-          </a:prstGeom>
-          <a:solidFill>
-            <a:srgbClr val="F4F7FA"/>
-          </a:solidFill>
-          <a:ln w="12700">
-            <a:solidFill>
-              <a:srgbClr val="DCEAF8"/>
-            </a:solidFill>
-            <a:prstDash val="solid"/>
-          </a:ln>
-          <a:effectLst>
-            <a:outerShdw sx="100000" sy="100000" kx="0" ky="0" algn="bl" rotWithShape="0" blurRad="127000" dist="25400" dir="5400000">
-              <a:srgbClr val="00175A">
-                <a:alpha val="10000"/>
-              </a:srgbClr>
-            </a:outerShdw>
-          </a:effectLst>
-        </p:spPr>
-      </p:sp>
-      <p:sp>
-        <p:nvSpPr>
-          <p:cNvPr id="11" name="Shape 9"/>
-          <p:cNvSpPr/>
-          <p:nvPr/>
-        </p:nvSpPr>
-        <p:spPr>
-          <a:xfrm>
-            <a:off x="868680" y="3483864"/>
-            <a:ext cx="475488" cy="475488"/>
-          </a:xfrm>
-          <a:prstGeom prst="ellipse">
-            <a:avLst/>
-          </a:prstGeom>
-          <a:solidFill>
-            <a:srgbClr val="00175A"/>
-          </a:solidFill>
-          <a:ln w="12700">
-            <a:solidFill>
-              <a:srgbClr val="00175A"/>
-            </a:solidFill>
-            <a:prstDash val="solid"/>
-          </a:ln>
-        </p:spPr>
-      </p:sp>
-      <p:sp>
-        <p:nvSpPr>
-          <p:cNvPr id="12" name="Text 10"/>
-          <p:cNvSpPr txBox="1"/>
-          <p:nvPr/>
-        </p:nvSpPr>
-        <p:spPr>
-          <a:xfrm>
-            <a:off x="868680" y="3483864"/>
-            <a:ext cx="475488" cy="475488"/>
-          </a:xfrm>
-          <a:prstGeom prst="rect">
-            <a:avLst/>
-          </a:prstGeom>
-          <a:noFill/>
-          <a:ln/>
-        </p:spPr>
-        <p:txBody>
-          <a:bodyPr wrap="square" lIns="0" tIns="0" rIns="0" bIns="0" rtlCol="0" anchor="ctr"/>
-          <a:lstStyle/>
-          <a:p>
-            <a:pPr algn="ctr" indent="0" marL="0">
-              <a:buNone/>
-            </a:pPr>
-            <a:r>
-              <a:rPr lang="en-US" sz="1600" b="1" dirty="0">
-                <a:solidFill>
-                  <a:srgbClr val="FFFFFF"/>
-                </a:solidFill>
-                <a:latin typeface="Cambria" pitchFamily="34" charset="0"/>
-                <a:ea typeface="Cambria" pitchFamily="34" charset="-122"/>
-                <a:cs typeface="Cambria" pitchFamily="34" charset="-120"/>
-              </a:rPr>
-              <a:t>2</a:t>
-            </a:r>
-            <a:endParaRPr lang="en-US" sz="1600" dirty="0"/>
-          </a:p>
-        </p:txBody>
-      </p:sp>
-      <p:sp>
-        <p:nvSpPr>
-          <p:cNvPr id="13" name="Text 11"/>
-          <p:cNvSpPr txBox="1"/>
-          <p:nvPr/>
-        </p:nvSpPr>
-        <p:spPr>
-          <a:xfrm>
-            <a:off x="1600200" y="3310128"/>
-            <a:ext cx="9692640" cy="320040"/>
-          </a:xfrm>
-          <a:prstGeom prst="rect">
-            <a:avLst/>
-          </a:prstGeom>
-          <a:noFill/>
-          <a:ln/>
-        </p:spPr>
-        <p:txBody>
-          <a:bodyPr wrap="square" lIns="0" tIns="0" rIns="0" bIns="0" rtlCol="0" anchor="ctr"/>
-          <a:lstStyle/>
-          <a:p>
-            <a:pPr indent="0" marL="0">
-              <a:buNone/>
-            </a:pPr>
-            <a:r>
-              <a:rPr lang="en-US" sz="1700" b="1" dirty="0">
-                <a:solidFill>
-                  <a:srgbClr val="00175A"/>
-                </a:solidFill>
-                <a:latin typeface="Cambria" pitchFamily="34" charset="0"/>
-                <a:ea typeface="Cambria" pitchFamily="34" charset="-122"/>
-                <a:cs typeface="Cambria" pitchFamily="34" charset="-120"/>
-              </a:rPr>
-              <a:t>Precision</a:t>
-            </a:r>
-            <a:endParaRPr lang="en-US" sz="1700" dirty="0"/>
-          </a:p>
-        </p:txBody>
-      </p:sp>
-      <p:sp>
-        <p:nvSpPr>
-          <p:cNvPr id="14" name="Text 12"/>
-          <p:cNvSpPr txBox="1"/>
-          <p:nvPr/>
-        </p:nvSpPr>
-        <p:spPr>
-          <a:xfrm>
-            <a:off x="1600200" y="3675888"/>
-            <a:ext cx="9692640" cy="548640"/>
-          </a:xfrm>
-          <a:prstGeom prst="rect">
-            <a:avLst/>
-          </a:prstGeom>
-          <a:noFill/>
-          <a:ln/>
-        </p:spPr>
-        <p:txBody>
-          <a:bodyPr wrap="square" lIns="0" tIns="0" rIns="0" bIns="0" rtlCol="0" anchor="ctr"/>
-          <a:lstStyle/>
-          <a:p>
-            <a:pPr indent="0" marL="0">
-              <a:lnSpc>
-                <a:spcPts val="1700"/>
-              </a:lnSpc>
-              <a:buNone/>
-            </a:pPr>
-            <a:r>
-              <a:rPr lang="en-US" sz="1300" dirty="0">
-                <a:solidFill>
-                  <a:srgbClr val="001233"/>
-                </a:solidFill>
-                <a:latin typeface="Calibri" pitchFamily="34" charset="0"/>
-                <a:ea typeface="Calibri" pitchFamily="34" charset="-122"/>
-                <a:cs typeface="Calibri" pitchFamily="34" charset="-120"/>
-              </a:rPr>
-              <a:t>Every finding lands with a file, a line, a mechanism and a reproduction. A maintainer can act on it without a conversation first.</a:t>
-            </a:r>
-            <a:endParaRPr lang="en-US" sz="1300" dirty="0"/>
-          </a:p>
-        </p:txBody>
-      </p:sp>
-      <p:sp>
-        <p:nvSpPr>
-          <p:cNvPr id="15" name="Shape 13"/>
-          <p:cNvSpPr/>
-          <p:nvPr/>
-        </p:nvSpPr>
-        <p:spPr>
-          <a:xfrm>
-            <a:off x="548640" y="4425696"/>
-            <a:ext cx="11094415" cy="1188720"/>
-          </a:xfrm>
-          <a:prstGeom prst="roundRect">
-            <a:avLst>
-              <a:gd name="adj" fmla="val 6154"/>
-            </a:avLst>
-          </a:prstGeom>
-          <a:solidFill>
-            <a:srgbClr val="F4F7FA"/>
-          </a:solidFill>
-          <a:ln w="12700">
-            <a:solidFill>
-              <a:srgbClr val="DCEAF8"/>
-            </a:solidFill>
-            <a:prstDash val="solid"/>
-          </a:ln>
-          <a:effectLst>
-            <a:outerShdw sx="100000" sy="100000" kx="0" ky="0" algn="bl" rotWithShape="0" blurRad="127000" dist="25400" dir="5400000">
-              <a:srgbClr val="00175A">
-                <a:alpha val="10000"/>
-              </a:srgbClr>
-            </a:outerShdw>
-          </a:effectLst>
-        </p:spPr>
-      </p:sp>
-      <p:sp>
-        <p:nvSpPr>
-          <p:cNvPr id="16" name="Shape 14"/>
-          <p:cNvSpPr/>
-          <p:nvPr/>
-        </p:nvSpPr>
-        <p:spPr>
-          <a:xfrm>
-            <a:off x="868680" y="4782312"/>
-            <a:ext cx="475488" cy="475488"/>
-          </a:xfrm>
-          <a:prstGeom prst="ellipse">
-            <a:avLst/>
-          </a:prstGeom>
-          <a:solidFill>
-            <a:srgbClr val="00175A"/>
-          </a:solidFill>
-          <a:ln w="12700">
-            <a:solidFill>
-              <a:srgbClr val="00175A"/>
-            </a:solidFill>
-            <a:prstDash val="solid"/>
-          </a:ln>
-        </p:spPr>
-      </p:sp>
-      <p:sp>
-        <p:nvSpPr>
-          <p:cNvPr id="17" name="Text 15"/>
-          <p:cNvSpPr txBox="1"/>
-          <p:nvPr/>
-        </p:nvSpPr>
-        <p:spPr>
-          <a:xfrm>
-            <a:off x="868680" y="4782312"/>
-            <a:ext cx="475488" cy="475488"/>
-          </a:xfrm>
-          <a:prstGeom prst="rect">
-            <a:avLst/>
-          </a:prstGeom>
-          <a:noFill/>
-          <a:ln/>
-        </p:spPr>
-        <p:txBody>
-          <a:bodyPr wrap="square" lIns="0" tIns="0" rIns="0" bIns="0" rtlCol="0" anchor="ctr"/>
-          <a:lstStyle/>
-          <a:p>
-            <a:pPr algn="ctr" indent="0" marL="0">
-              <a:buNone/>
-            </a:pPr>
-            <a:r>
-              <a:rPr lang="en-US" sz="1600" b="1" dirty="0">
-                <a:solidFill>
-                  <a:srgbClr val="FFFFFF"/>
-                </a:solidFill>
-                <a:latin typeface="Cambria" pitchFamily="34" charset="0"/>
-                <a:ea typeface="Cambria" pitchFamily="34" charset="-122"/>
-                <a:cs typeface="Cambria" pitchFamily="34" charset="-120"/>
-              </a:rPr>
-              <a:t>3</a:t>
-            </a:r>
-            <a:endParaRPr lang="en-US" sz="1600" dirty="0"/>
-          </a:p>
-        </p:txBody>
-      </p:sp>
-      <p:sp>
-        <p:nvSpPr>
-          <p:cNvPr id="18" name="Text 16"/>
-          <p:cNvSpPr txBox="1"/>
-          <p:nvPr/>
-        </p:nvSpPr>
-        <p:spPr>
-          <a:xfrm>
-            <a:off x="1600200" y="4608576"/>
-            <a:ext cx="9692640" cy="320040"/>
-          </a:xfrm>
-          <a:prstGeom prst="rect">
-            <a:avLst/>
-          </a:prstGeom>
-          <a:noFill/>
-          <a:ln/>
-        </p:spPr>
-        <p:txBody>
-          <a:bodyPr wrap="square" lIns="0" tIns="0" rIns="0" bIns="0" rtlCol="0" anchor="ctr"/>
-          <a:lstStyle/>
-          <a:p>
-            <a:pPr indent="0" marL="0">
-              <a:buNone/>
-            </a:pPr>
-            <a:r>
-              <a:rPr lang="en-US" sz="1700" b="1" dirty="0">
-                <a:solidFill>
-                  <a:srgbClr val="00175A"/>
-                </a:solidFill>
-                <a:latin typeface="Cambria" pitchFamily="34" charset="0"/>
-                <a:ea typeface="Cambria" pitchFamily="34" charset="-122"/>
-                <a:cs typeface="Cambria" pitchFamily="34" charset="-120"/>
-              </a:rPr>
-              <a:t>Speed and reach</a:t>
-            </a:r>
-            <a:endParaRPr lang="en-US" sz="1700" dirty="0"/>
-          </a:p>
-        </p:txBody>
-      </p:sp>
-      <p:sp>
-        <p:nvSpPr>
-          <p:cNvPr id="19" name="Text 17"/>
-          <p:cNvSpPr txBox="1"/>
-          <p:nvPr/>
-        </p:nvSpPr>
-        <p:spPr>
-          <a:xfrm>
-            <a:off x="1600200" y="4974336"/>
-            <a:ext cx="9692640" cy="548640"/>
-          </a:xfrm>
-          <a:prstGeom prst="rect">
-            <a:avLst/>
-          </a:prstGeom>
-          <a:noFill/>
-          <a:ln/>
-        </p:spPr>
-        <p:txBody>
-          <a:bodyPr wrap="square" lIns="0" tIns="0" rIns="0" bIns="0" rtlCol="0" anchor="ctr"/>
-          <a:lstStyle/>
-          <a:p>
-            <a:pPr indent="0" marL="0">
-              <a:lnSpc>
-                <a:spcPts val="1700"/>
-              </a:lnSpc>
-              <a:buNone/>
-            </a:pPr>
-            <a:r>
-              <a:rPr lang="en-US" sz="1300" dirty="0">
-                <a:solidFill>
-                  <a:srgbClr val="001233"/>
-                </a:solidFill>
-                <a:latin typeface="Calibri" pitchFamily="34" charset="0"/>
-                <a:ea typeface="Calibri" pitchFamily="34" charset="-122"/>
-                <a:cs typeface="Calibri" pitchFamily="34" charset="-120"/>
-              </a:rPr>
-              <a:t>Three separate projects in three different languages, covered in a single week, with the evidence standard held constant across all of them.</a:t>
-            </a:r>
-            <a:endParaRPr lang="en-US" sz="1300" dirty="0"/>
-          </a:p>
-        </p:txBody>
-      </p:sp>
-      <p:sp>
-        <p:nvSpPr>
-          <p:cNvPr id="20" name="Shape 18"/>
-          <p:cNvSpPr/>
-          <p:nvPr/>
-        </p:nvSpPr>
-        <p:spPr>
-          <a:xfrm>
-            <a:off x="548640" y="5852160"/>
-            <a:ext cx="11094415" cy="685800"/>
-          </a:xfrm>
-          <a:prstGeom prst="roundRect">
-            <a:avLst>
-              <a:gd name="adj" fmla="val 10667"/>
-            </a:avLst>
-          </a:prstGeom>
-          <a:solidFill>
-            <a:srgbClr val="DCEAF8"/>
-          </a:solidFill>
-          <a:ln w="12700">
-            <a:solidFill>
-              <a:srgbClr val="A9CFEE"/>
-            </a:solidFill>
-            <a:prstDash val="solid"/>
-          </a:ln>
-          <a:effectLst>
-            <a:outerShdw sx="100000" sy="100000" kx="0" ky="0" algn="bl" rotWithShape="0" blurRad="127000" dist="25400" dir="5400000">
-              <a:srgbClr val="00175A">
-                <a:alpha val="10000"/>
-              </a:srgbClr>
-            </a:outerShdw>
-          </a:effectLst>
-        </p:spPr>
-      </p:sp>
-      <p:sp>
-        <p:nvSpPr>
-          <p:cNvPr id="21" name="Text 19"/>
-          <p:cNvSpPr txBox="1"/>
-          <p:nvPr/>
-        </p:nvSpPr>
-        <p:spPr>
-          <a:xfrm>
-            <a:off x="868680" y="5943600"/>
-            <a:ext cx="10454335" cy="502920"/>
-          </a:xfrm>
-          <a:prstGeom prst="rect">
-            <a:avLst/>
-          </a:prstGeom>
-          <a:noFill/>
-          <a:ln/>
-        </p:spPr>
-        <p:txBody>
-          <a:bodyPr wrap="square" lIns="0" tIns="0" rIns="0" bIns="0" rtlCol="0" anchor="ctr"/>
-          <a:lstStyle/>
-          <a:p>
-            <a:pPr indent="0" marL="0">
-              <a:buNone/>
-            </a:pPr>
-            <a:r>
-              <a:rPr lang="en-US" sz="1400" b="1" dirty="0">
-                <a:solidFill>
-                  <a:srgbClr val="006FCF"/>
-                </a:solidFill>
-                <a:latin typeface="Calibri" pitchFamily="34" charset="0"/>
-                <a:ea typeface="Calibri" pitchFamily="34" charset="-122"/>
-                <a:cs typeface="Calibri" pitchFamily="34" charset="-120"/>
-              </a:rPr>
-              <a:t>The same standard that produced these three results is the standard the harness runs at every time.</a:t>
-            </a:r>
-            <a:endParaRPr lang="en-US" sz="1400" dirty="0"/>
           </a:p>
         </p:txBody>
       </p:sp>
@@ -13821,6 +18756,765 @@
 </file>
 
 <file path=ppt/slides/slide20.xml><?xml version="1.0" encoding="utf-8"?>
+<p:sld xmlns:a="http://schemas.openxmlformats.org/drawingml/2006/main" xmlns:r="http://schemas.openxmlformats.org/officeDocument/2006/relationships" xmlns:p="http://schemas.openxmlformats.org/presentationml/2006/main">
+  <p:cSld name="Slide 7">
+    <p:bg>
+      <p:bgPr>
+        <a:solidFill>
+          <a:srgbClr val="FFFFFF"/>
+        </a:solidFill>
+      </p:bgPr>
+    </p:bg>
+    <p:spTree>
+      <p:nvGrpSpPr>
+        <p:cNvPr id="1" name=""/>
+        <p:cNvGrpSpPr/>
+        <p:nvPr/>
+      </p:nvGrpSpPr>
+      <p:grpSpPr>
+        <a:xfrm>
+          <a:off x="0" y="0"/>
+          <a:ext cx="0" cy="0"/>
+          <a:chOff x="0" y="0"/>
+          <a:chExt cx="0" cy="0"/>
+        </a:xfrm>
+      </p:grpSpPr>
+      <p:sp>
+        <p:nvSpPr>
+          <p:cNvPr id="2" name="Text 0"/>
+          <p:cNvSpPr txBox="1"/>
+          <p:nvPr/>
+        </p:nvSpPr>
+        <p:spPr>
+          <a:xfrm>
+            <a:off x="548640" y="329184"/>
+            <a:ext cx="11094415" cy="256032"/>
+          </a:xfrm>
+          <a:prstGeom prst="rect">
+            <a:avLst/>
+          </a:prstGeom>
+          <a:noFill/>
+          <a:ln/>
+        </p:spPr>
+        <p:txBody>
+          <a:bodyPr wrap="square" lIns="0" tIns="0" rIns="0" bIns="0" rtlCol="0" anchor="ctr"/>
+          <a:lstStyle/>
+          <a:p>
+            <a:pPr indent="0" marL="0">
+              <a:buNone/>
+            </a:pPr>
+            <a:r>
+              <a:rPr lang="en-US" sz="1100" b="1" spc="200" kern="0" dirty="0">
+                <a:solidFill>
+                  <a:srgbClr val="53565A"/>
+                </a:solidFill>
+                <a:latin typeface="Calibri" pitchFamily="34" charset="0"/>
+                <a:ea typeface="Calibri" pitchFamily="34" charset="-122"/>
+                <a:cs typeface="Calibri" pitchFamily="34" charset="-120"/>
+              </a:rPr>
+              <a:t>CAPABILITY</a:t>
+            </a:r>
+            <a:endParaRPr lang="en-US" sz="1100" dirty="0"/>
+          </a:p>
+        </p:txBody>
+      </p:sp>
+      <p:sp>
+        <p:nvSpPr>
+          <p:cNvPr id="3" name="Text 1"/>
+          <p:cNvSpPr txBox="1"/>
+          <p:nvPr/>
+        </p:nvSpPr>
+        <p:spPr>
+          <a:xfrm>
+            <a:off x="548640" y="603504"/>
+            <a:ext cx="11094415" cy="566928"/>
+          </a:xfrm>
+          <a:prstGeom prst="rect">
+            <a:avLst/>
+          </a:prstGeom>
+          <a:noFill/>
+          <a:ln/>
+        </p:spPr>
+        <p:txBody>
+          <a:bodyPr wrap="square" lIns="0" tIns="0" rIns="0" bIns="0" rtlCol="0" anchor="ctr"/>
+          <a:lstStyle/>
+          <a:p>
+            <a:pPr indent="0" marL="0">
+              <a:buNone/>
+            </a:pPr>
+            <a:r>
+              <a:rPr lang="en-US" sz="3200" b="1" dirty="0">
+                <a:solidFill>
+                  <a:srgbClr val="00175A"/>
+                </a:solidFill>
+                <a:latin typeface="Cambria" pitchFamily="34" charset="0"/>
+                <a:ea typeface="Cambria" pitchFamily="34" charset="-122"/>
+                <a:cs typeface="Cambria" pitchFamily="34" charset="-120"/>
+              </a:rPr>
+              <a:t>What this gives us</a:t>
+            </a:r>
+            <a:endParaRPr lang="en-US" sz="3200" dirty="0"/>
+          </a:p>
+        </p:txBody>
+      </p:sp>
+      <p:sp>
+        <p:nvSpPr>
+          <p:cNvPr id="4" name="Text 2"/>
+          <p:cNvSpPr txBox="1"/>
+          <p:nvPr/>
+        </p:nvSpPr>
+        <p:spPr>
+          <a:xfrm>
+            <a:off x="548640" y="1188720"/>
+            <a:ext cx="10728655" cy="384048"/>
+          </a:xfrm>
+          <a:prstGeom prst="rect">
+            <a:avLst/>
+          </a:prstGeom>
+          <a:noFill/>
+          <a:ln/>
+        </p:spPr>
+        <p:txBody>
+          <a:bodyPr wrap="square" lIns="0" tIns="0" rIns="0" bIns="0" rtlCol="0" anchor="ctr"/>
+          <a:lstStyle/>
+          <a:p>
+            <a:pPr indent="0" marL="0">
+              <a:buNone/>
+            </a:pPr>
+            <a:r>
+              <a:rPr lang="en-US" sz="1400" dirty="0">
+                <a:solidFill>
+                  <a:srgbClr val="53565A"/>
+                </a:solidFill>
+                <a:latin typeface="Calibri" pitchFamily="34" charset="0"/>
+                <a:ea typeface="Calibri" pitchFamily="34" charset="-122"/>
+                <a:cs typeface="Calibri" pitchFamily="34" charset="-120"/>
+              </a:rPr>
+              <a:t>Three things this brief demonstrates that a conventional scanning tool does not.</a:t>
+            </a:r>
+            <a:endParaRPr lang="en-US" sz="1400" dirty="0"/>
+          </a:p>
+        </p:txBody>
+      </p:sp>
+      <p:sp>
+        <p:nvSpPr>
+          <p:cNvPr id="5" name="Shape 3"/>
+          <p:cNvSpPr/>
+          <p:nvPr/>
+        </p:nvSpPr>
+        <p:spPr>
+          <a:xfrm>
+            <a:off x="548640" y="1828800"/>
+            <a:ext cx="11094415" cy="1188720"/>
+          </a:xfrm>
+          <a:prstGeom prst="roundRect">
+            <a:avLst>
+              <a:gd name="adj" fmla="val 6154"/>
+            </a:avLst>
+          </a:prstGeom>
+          <a:solidFill>
+            <a:srgbClr val="F4F7FA"/>
+          </a:solidFill>
+          <a:ln w="12700">
+            <a:solidFill>
+              <a:srgbClr val="DCEAF8"/>
+            </a:solidFill>
+            <a:prstDash val="solid"/>
+          </a:ln>
+          <a:effectLst>
+            <a:outerShdw sx="100000" sy="100000" kx="0" ky="0" algn="bl" rotWithShape="0" blurRad="127000" dist="25400" dir="5400000">
+              <a:srgbClr val="00175A">
+                <a:alpha val="10000"/>
+              </a:srgbClr>
+            </a:outerShdw>
+          </a:effectLst>
+        </p:spPr>
+      </p:sp>
+      <p:sp>
+        <p:nvSpPr>
+          <p:cNvPr id="6" name="Shape 4"/>
+          <p:cNvSpPr/>
+          <p:nvPr/>
+        </p:nvSpPr>
+        <p:spPr>
+          <a:xfrm>
+            <a:off x="868680" y="2185416"/>
+            <a:ext cx="475488" cy="475488"/>
+          </a:xfrm>
+          <a:prstGeom prst="ellipse">
+            <a:avLst/>
+          </a:prstGeom>
+          <a:solidFill>
+            <a:srgbClr val="00175A"/>
+          </a:solidFill>
+          <a:ln w="12700">
+            <a:solidFill>
+              <a:srgbClr val="00175A"/>
+            </a:solidFill>
+            <a:prstDash val="solid"/>
+          </a:ln>
+        </p:spPr>
+      </p:sp>
+      <p:sp>
+        <p:nvSpPr>
+          <p:cNvPr id="7" name="Text 5"/>
+          <p:cNvSpPr txBox="1"/>
+          <p:nvPr/>
+        </p:nvSpPr>
+        <p:spPr>
+          <a:xfrm>
+            <a:off x="868680" y="2185416"/>
+            <a:ext cx="475488" cy="475488"/>
+          </a:xfrm>
+          <a:prstGeom prst="rect">
+            <a:avLst/>
+          </a:prstGeom>
+          <a:noFill/>
+          <a:ln/>
+        </p:spPr>
+        <p:txBody>
+          <a:bodyPr wrap="square" lIns="0" tIns="0" rIns="0" bIns="0" rtlCol="0" anchor="ctr"/>
+          <a:lstStyle/>
+          <a:p>
+            <a:pPr algn="ctr" indent="0" marL="0">
+              <a:buNone/>
+            </a:pPr>
+            <a:r>
+              <a:rPr lang="en-US" sz="1600" b="1" dirty="0">
+                <a:solidFill>
+                  <a:srgbClr val="FFFFFF"/>
+                </a:solidFill>
+                <a:latin typeface="Cambria" pitchFamily="34" charset="0"/>
+                <a:ea typeface="Cambria" pitchFamily="34" charset="-122"/>
+                <a:cs typeface="Cambria" pitchFamily="34" charset="-120"/>
+              </a:rPr>
+              <a:t>1</a:t>
+            </a:r>
+            <a:endParaRPr lang="en-US" sz="1600" dirty="0"/>
+          </a:p>
+        </p:txBody>
+      </p:sp>
+      <p:sp>
+        <p:nvSpPr>
+          <p:cNvPr id="8" name="Text 6"/>
+          <p:cNvSpPr txBox="1"/>
+          <p:nvPr/>
+        </p:nvSpPr>
+        <p:spPr>
+          <a:xfrm>
+            <a:off x="1600200" y="2011680"/>
+            <a:ext cx="9692640" cy="320040"/>
+          </a:xfrm>
+          <a:prstGeom prst="rect">
+            <a:avLst/>
+          </a:prstGeom>
+          <a:noFill/>
+          <a:ln/>
+        </p:spPr>
+        <p:txBody>
+          <a:bodyPr wrap="square" lIns="0" tIns="0" rIns="0" bIns="0" rtlCol="0" anchor="ctr"/>
+          <a:lstStyle/>
+          <a:p>
+            <a:pPr indent="0" marL="0">
+              <a:buNone/>
+            </a:pPr>
+            <a:r>
+              <a:rPr lang="en-US" sz="1700" b="1" dirty="0">
+                <a:solidFill>
+                  <a:srgbClr val="00175A"/>
+                </a:solidFill>
+                <a:latin typeface="Cambria" pitchFamily="34" charset="0"/>
+                <a:ea typeface="Cambria" pitchFamily="34" charset="-122"/>
+                <a:cs typeface="Cambria" pitchFamily="34" charset="-120"/>
+              </a:rPr>
+              <a:t>Depth</a:t>
+            </a:r>
+            <a:endParaRPr lang="en-US" sz="1700" dirty="0"/>
+          </a:p>
+        </p:txBody>
+      </p:sp>
+      <p:sp>
+        <p:nvSpPr>
+          <p:cNvPr id="9" name="Text 7"/>
+          <p:cNvSpPr txBox="1"/>
+          <p:nvPr/>
+        </p:nvSpPr>
+        <p:spPr>
+          <a:xfrm>
+            <a:off x="1600200" y="2377440"/>
+            <a:ext cx="9692640" cy="548640"/>
+          </a:xfrm>
+          <a:prstGeom prst="rect">
+            <a:avLst/>
+          </a:prstGeom>
+          <a:noFill/>
+          <a:ln/>
+        </p:spPr>
+        <p:txBody>
+          <a:bodyPr wrap="square" lIns="0" tIns="0" rIns="0" bIns="0" rtlCol="0" anchor="ctr"/>
+          <a:lstStyle/>
+          <a:p>
+            <a:pPr indent="0" marL="0">
+              <a:lnSpc>
+                <a:spcPts val="1700"/>
+              </a:lnSpc>
+              <a:buNone/>
+            </a:pPr>
+            <a:r>
+              <a:rPr lang="en-US" sz="1300" dirty="0">
+                <a:solidFill>
+                  <a:srgbClr val="001233"/>
+                </a:solidFill>
+                <a:latin typeface="Calibri" pitchFamily="34" charset="0"/>
+                <a:ea typeface="Calibri" pitchFamily="34" charset="-122"/>
+                <a:cs typeface="Calibri" pitchFamily="34" charset="-120"/>
+              </a:rPr>
+              <a:t>It reaches defects that human review, existing scanners and the projects' own test suites all passed over, in one case for five years running.</a:t>
+            </a:r>
+            <a:endParaRPr lang="en-US" sz="1300" dirty="0"/>
+          </a:p>
+        </p:txBody>
+      </p:sp>
+      <p:sp>
+        <p:nvSpPr>
+          <p:cNvPr id="10" name="Shape 8"/>
+          <p:cNvSpPr/>
+          <p:nvPr/>
+        </p:nvSpPr>
+        <p:spPr>
+          <a:xfrm>
+            <a:off x="548640" y="3127248"/>
+            <a:ext cx="11094415" cy="1188720"/>
+          </a:xfrm>
+          <a:prstGeom prst="roundRect">
+            <a:avLst>
+              <a:gd name="adj" fmla="val 6154"/>
+            </a:avLst>
+          </a:prstGeom>
+          <a:solidFill>
+            <a:srgbClr val="F4F7FA"/>
+          </a:solidFill>
+          <a:ln w="12700">
+            <a:solidFill>
+              <a:srgbClr val="DCEAF8"/>
+            </a:solidFill>
+            <a:prstDash val="solid"/>
+          </a:ln>
+          <a:effectLst>
+            <a:outerShdw sx="100000" sy="100000" kx="0" ky="0" algn="bl" rotWithShape="0" blurRad="127000" dist="25400" dir="5400000">
+              <a:srgbClr val="00175A">
+                <a:alpha val="10000"/>
+              </a:srgbClr>
+            </a:outerShdw>
+          </a:effectLst>
+        </p:spPr>
+      </p:sp>
+      <p:sp>
+        <p:nvSpPr>
+          <p:cNvPr id="11" name="Shape 9"/>
+          <p:cNvSpPr/>
+          <p:nvPr/>
+        </p:nvSpPr>
+        <p:spPr>
+          <a:xfrm>
+            <a:off x="868680" y="3483864"/>
+            <a:ext cx="475488" cy="475488"/>
+          </a:xfrm>
+          <a:prstGeom prst="ellipse">
+            <a:avLst/>
+          </a:prstGeom>
+          <a:solidFill>
+            <a:srgbClr val="00175A"/>
+          </a:solidFill>
+          <a:ln w="12700">
+            <a:solidFill>
+              <a:srgbClr val="00175A"/>
+            </a:solidFill>
+            <a:prstDash val="solid"/>
+          </a:ln>
+        </p:spPr>
+      </p:sp>
+      <p:sp>
+        <p:nvSpPr>
+          <p:cNvPr id="12" name="Text 10"/>
+          <p:cNvSpPr txBox="1"/>
+          <p:nvPr/>
+        </p:nvSpPr>
+        <p:spPr>
+          <a:xfrm>
+            <a:off x="868680" y="3483864"/>
+            <a:ext cx="475488" cy="475488"/>
+          </a:xfrm>
+          <a:prstGeom prst="rect">
+            <a:avLst/>
+          </a:prstGeom>
+          <a:noFill/>
+          <a:ln/>
+        </p:spPr>
+        <p:txBody>
+          <a:bodyPr wrap="square" lIns="0" tIns="0" rIns="0" bIns="0" rtlCol="0" anchor="ctr"/>
+          <a:lstStyle/>
+          <a:p>
+            <a:pPr algn="ctr" indent="0" marL="0">
+              <a:buNone/>
+            </a:pPr>
+            <a:r>
+              <a:rPr lang="en-US" sz="1600" b="1" dirty="0">
+                <a:solidFill>
+                  <a:srgbClr val="FFFFFF"/>
+                </a:solidFill>
+                <a:latin typeface="Cambria" pitchFamily="34" charset="0"/>
+                <a:ea typeface="Cambria" pitchFamily="34" charset="-122"/>
+                <a:cs typeface="Cambria" pitchFamily="34" charset="-120"/>
+              </a:rPr>
+              <a:t>2</a:t>
+            </a:r>
+            <a:endParaRPr lang="en-US" sz="1600" dirty="0"/>
+          </a:p>
+        </p:txBody>
+      </p:sp>
+      <p:sp>
+        <p:nvSpPr>
+          <p:cNvPr id="13" name="Text 11"/>
+          <p:cNvSpPr txBox="1"/>
+          <p:nvPr/>
+        </p:nvSpPr>
+        <p:spPr>
+          <a:xfrm>
+            <a:off x="1600200" y="3310128"/>
+            <a:ext cx="9692640" cy="320040"/>
+          </a:xfrm>
+          <a:prstGeom prst="rect">
+            <a:avLst/>
+          </a:prstGeom>
+          <a:noFill/>
+          <a:ln/>
+        </p:spPr>
+        <p:txBody>
+          <a:bodyPr wrap="square" lIns="0" tIns="0" rIns="0" bIns="0" rtlCol="0" anchor="ctr"/>
+          <a:lstStyle/>
+          <a:p>
+            <a:pPr indent="0" marL="0">
+              <a:buNone/>
+            </a:pPr>
+            <a:r>
+              <a:rPr lang="en-US" sz="1700" b="1" dirty="0">
+                <a:solidFill>
+                  <a:srgbClr val="00175A"/>
+                </a:solidFill>
+                <a:latin typeface="Cambria" pitchFamily="34" charset="0"/>
+                <a:ea typeface="Cambria" pitchFamily="34" charset="-122"/>
+                <a:cs typeface="Cambria" pitchFamily="34" charset="-120"/>
+              </a:rPr>
+              <a:t>Precision</a:t>
+            </a:r>
+            <a:endParaRPr lang="en-US" sz="1700" dirty="0"/>
+          </a:p>
+        </p:txBody>
+      </p:sp>
+      <p:sp>
+        <p:nvSpPr>
+          <p:cNvPr id="14" name="Text 12"/>
+          <p:cNvSpPr txBox="1"/>
+          <p:nvPr/>
+        </p:nvSpPr>
+        <p:spPr>
+          <a:xfrm>
+            <a:off x="1600200" y="3675888"/>
+            <a:ext cx="9692640" cy="548640"/>
+          </a:xfrm>
+          <a:prstGeom prst="rect">
+            <a:avLst/>
+          </a:prstGeom>
+          <a:noFill/>
+          <a:ln/>
+        </p:spPr>
+        <p:txBody>
+          <a:bodyPr wrap="square" lIns="0" tIns="0" rIns="0" bIns="0" rtlCol="0" anchor="ctr"/>
+          <a:lstStyle/>
+          <a:p>
+            <a:pPr indent="0" marL="0">
+              <a:lnSpc>
+                <a:spcPts val="1700"/>
+              </a:lnSpc>
+              <a:buNone/>
+            </a:pPr>
+            <a:r>
+              <a:rPr lang="en-US" sz="1300" dirty="0">
+                <a:solidFill>
+                  <a:srgbClr val="001233"/>
+                </a:solidFill>
+                <a:latin typeface="Calibri" pitchFamily="34" charset="0"/>
+                <a:ea typeface="Calibri" pitchFamily="34" charset="-122"/>
+                <a:cs typeface="Calibri" pitchFamily="34" charset="-120"/>
+              </a:rPr>
+              <a:t>Every finding lands with a file, a line, a mechanism and a reproduction. A maintainer can act on it without a conversation first.</a:t>
+            </a:r>
+            <a:endParaRPr lang="en-US" sz="1300" dirty="0"/>
+          </a:p>
+        </p:txBody>
+      </p:sp>
+      <p:sp>
+        <p:nvSpPr>
+          <p:cNvPr id="15" name="Shape 13"/>
+          <p:cNvSpPr/>
+          <p:nvPr/>
+        </p:nvSpPr>
+        <p:spPr>
+          <a:xfrm>
+            <a:off x="548640" y="4425696"/>
+            <a:ext cx="11094415" cy="1188720"/>
+          </a:xfrm>
+          <a:prstGeom prst="roundRect">
+            <a:avLst>
+              <a:gd name="adj" fmla="val 6154"/>
+            </a:avLst>
+          </a:prstGeom>
+          <a:solidFill>
+            <a:srgbClr val="F4F7FA"/>
+          </a:solidFill>
+          <a:ln w="12700">
+            <a:solidFill>
+              <a:srgbClr val="DCEAF8"/>
+            </a:solidFill>
+            <a:prstDash val="solid"/>
+          </a:ln>
+          <a:effectLst>
+            <a:outerShdw sx="100000" sy="100000" kx="0" ky="0" algn="bl" rotWithShape="0" blurRad="127000" dist="25400" dir="5400000">
+              <a:srgbClr val="00175A">
+                <a:alpha val="10000"/>
+              </a:srgbClr>
+            </a:outerShdw>
+          </a:effectLst>
+        </p:spPr>
+      </p:sp>
+      <p:sp>
+        <p:nvSpPr>
+          <p:cNvPr id="16" name="Shape 14"/>
+          <p:cNvSpPr/>
+          <p:nvPr/>
+        </p:nvSpPr>
+        <p:spPr>
+          <a:xfrm>
+            <a:off x="868680" y="4782312"/>
+            <a:ext cx="475488" cy="475488"/>
+          </a:xfrm>
+          <a:prstGeom prst="ellipse">
+            <a:avLst/>
+          </a:prstGeom>
+          <a:solidFill>
+            <a:srgbClr val="00175A"/>
+          </a:solidFill>
+          <a:ln w="12700">
+            <a:solidFill>
+              <a:srgbClr val="00175A"/>
+            </a:solidFill>
+            <a:prstDash val="solid"/>
+          </a:ln>
+        </p:spPr>
+      </p:sp>
+      <p:sp>
+        <p:nvSpPr>
+          <p:cNvPr id="17" name="Text 15"/>
+          <p:cNvSpPr txBox="1"/>
+          <p:nvPr/>
+        </p:nvSpPr>
+        <p:spPr>
+          <a:xfrm>
+            <a:off x="868680" y="4782312"/>
+            <a:ext cx="475488" cy="475488"/>
+          </a:xfrm>
+          <a:prstGeom prst="rect">
+            <a:avLst/>
+          </a:prstGeom>
+          <a:noFill/>
+          <a:ln/>
+        </p:spPr>
+        <p:txBody>
+          <a:bodyPr wrap="square" lIns="0" tIns="0" rIns="0" bIns="0" rtlCol="0" anchor="ctr"/>
+          <a:lstStyle/>
+          <a:p>
+            <a:pPr algn="ctr" indent="0" marL="0">
+              <a:buNone/>
+            </a:pPr>
+            <a:r>
+              <a:rPr lang="en-US" sz="1600" b="1" dirty="0">
+                <a:solidFill>
+                  <a:srgbClr val="FFFFFF"/>
+                </a:solidFill>
+                <a:latin typeface="Cambria" pitchFamily="34" charset="0"/>
+                <a:ea typeface="Cambria" pitchFamily="34" charset="-122"/>
+                <a:cs typeface="Cambria" pitchFamily="34" charset="-120"/>
+              </a:rPr>
+              <a:t>3</a:t>
+            </a:r>
+            <a:endParaRPr lang="en-US" sz="1600" dirty="0"/>
+          </a:p>
+        </p:txBody>
+      </p:sp>
+      <p:sp>
+        <p:nvSpPr>
+          <p:cNvPr id="18" name="Text 16"/>
+          <p:cNvSpPr txBox="1"/>
+          <p:nvPr/>
+        </p:nvSpPr>
+        <p:spPr>
+          <a:xfrm>
+            <a:off x="1600200" y="4608576"/>
+            <a:ext cx="9692640" cy="320040"/>
+          </a:xfrm>
+          <a:prstGeom prst="rect">
+            <a:avLst/>
+          </a:prstGeom>
+          <a:noFill/>
+          <a:ln/>
+        </p:spPr>
+        <p:txBody>
+          <a:bodyPr wrap="square" lIns="0" tIns="0" rIns="0" bIns="0" rtlCol="0" anchor="ctr"/>
+          <a:lstStyle/>
+          <a:p>
+            <a:pPr indent="0" marL="0">
+              <a:buNone/>
+            </a:pPr>
+            <a:r>
+              <a:rPr lang="en-US" sz="1700" b="1" dirty="0">
+                <a:solidFill>
+                  <a:srgbClr val="00175A"/>
+                </a:solidFill>
+                <a:latin typeface="Cambria" pitchFamily="34" charset="0"/>
+                <a:ea typeface="Cambria" pitchFamily="34" charset="-122"/>
+                <a:cs typeface="Cambria" pitchFamily="34" charset="-120"/>
+              </a:rPr>
+              <a:t>Speed and reach</a:t>
+            </a:r>
+            <a:endParaRPr lang="en-US" sz="1700" dirty="0"/>
+          </a:p>
+        </p:txBody>
+      </p:sp>
+      <p:sp>
+        <p:nvSpPr>
+          <p:cNvPr id="19" name="Text 17"/>
+          <p:cNvSpPr txBox="1"/>
+          <p:nvPr/>
+        </p:nvSpPr>
+        <p:spPr>
+          <a:xfrm>
+            <a:off x="1600200" y="4974336"/>
+            <a:ext cx="9692640" cy="548640"/>
+          </a:xfrm>
+          <a:prstGeom prst="rect">
+            <a:avLst/>
+          </a:prstGeom>
+          <a:noFill/>
+          <a:ln/>
+        </p:spPr>
+        <p:txBody>
+          <a:bodyPr wrap="square" lIns="0" tIns="0" rIns="0" bIns="0" rtlCol="0" anchor="ctr"/>
+          <a:lstStyle/>
+          <a:p>
+            <a:pPr indent="0" marL="0">
+              <a:lnSpc>
+                <a:spcPts val="1700"/>
+              </a:lnSpc>
+              <a:buNone/>
+            </a:pPr>
+            <a:r>
+              <a:rPr lang="en-US" sz="1300" dirty="0">
+                <a:solidFill>
+                  <a:srgbClr val="001233"/>
+                </a:solidFill>
+                <a:latin typeface="Calibri" pitchFamily="34" charset="0"/>
+                <a:ea typeface="Calibri" pitchFamily="34" charset="-122"/>
+                <a:cs typeface="Calibri" pitchFamily="34" charset="-120"/>
+              </a:rPr>
+              <a:t>Three separate projects in three different languages, covered in a single week, with the evidence standard held constant across all of them.</a:t>
+            </a:r>
+            <a:endParaRPr lang="en-US" sz="1300" dirty="0"/>
+          </a:p>
+        </p:txBody>
+      </p:sp>
+      <p:sp>
+        <p:nvSpPr>
+          <p:cNvPr id="20" name="Shape 18"/>
+          <p:cNvSpPr/>
+          <p:nvPr/>
+        </p:nvSpPr>
+        <p:spPr>
+          <a:xfrm>
+            <a:off x="548640" y="5852160"/>
+            <a:ext cx="11094415" cy="685800"/>
+          </a:xfrm>
+          <a:prstGeom prst="roundRect">
+            <a:avLst>
+              <a:gd name="adj" fmla="val 10667"/>
+            </a:avLst>
+          </a:prstGeom>
+          <a:solidFill>
+            <a:srgbClr val="DCEAF8"/>
+          </a:solidFill>
+          <a:ln w="12700">
+            <a:solidFill>
+              <a:srgbClr val="A9CFEE"/>
+            </a:solidFill>
+            <a:prstDash val="solid"/>
+          </a:ln>
+          <a:effectLst>
+            <a:outerShdw sx="100000" sy="100000" kx="0" ky="0" algn="bl" rotWithShape="0" blurRad="127000" dist="25400" dir="5400000">
+              <a:srgbClr val="00175A">
+                <a:alpha val="10000"/>
+              </a:srgbClr>
+            </a:outerShdw>
+          </a:effectLst>
+        </p:spPr>
+      </p:sp>
+      <p:sp>
+        <p:nvSpPr>
+          <p:cNvPr id="21" name="Text 19"/>
+          <p:cNvSpPr txBox="1"/>
+          <p:nvPr/>
+        </p:nvSpPr>
+        <p:spPr>
+          <a:xfrm>
+            <a:off x="868680" y="5943600"/>
+            <a:ext cx="10454335" cy="502920"/>
+          </a:xfrm>
+          <a:prstGeom prst="rect">
+            <a:avLst/>
+          </a:prstGeom>
+          <a:noFill/>
+          <a:ln/>
+        </p:spPr>
+        <p:txBody>
+          <a:bodyPr wrap="square" lIns="0" tIns="0" rIns="0" bIns="0" rtlCol="0" anchor="ctr"/>
+          <a:lstStyle/>
+          <a:p>
+            <a:pPr indent="0" marL="0">
+              <a:buNone/>
+            </a:pPr>
+            <a:r>
+              <a:rPr lang="en-US" sz="1400" b="1" dirty="0">
+                <a:solidFill>
+                  <a:srgbClr val="006FCF"/>
+                </a:solidFill>
+                <a:latin typeface="Calibri" pitchFamily="34" charset="0"/>
+                <a:ea typeface="Calibri" pitchFamily="34" charset="-122"/>
+                <a:cs typeface="Calibri" pitchFamily="34" charset="-120"/>
+              </a:rPr>
+              <a:t>The same standard that produced these three results is the standard the harness runs at every time.</a:t>
+            </a:r>
+            <a:endParaRPr lang="en-US" sz="1400" dirty="0"/>
+          </a:p>
+        </p:txBody>
+      </p:sp>
+    </p:spTree>
+  </p:cSld>
+  <p:clrMapOvr>
+    <a:masterClrMapping/>
+  </p:clrMapOvr>
+</p:sld>
+</file>
+
+<file path=ppt/slides/slide21.xml><?xml version="1.0" encoding="utf-8"?>
 <p:sld xmlns:a="http://schemas.openxmlformats.org/drawingml/2006/main" xmlns:r="http://schemas.openxmlformats.org/officeDocument/2006/relationships" xmlns:p="http://schemas.openxmlformats.org/presentationml/2006/main">
   <p:cSld name="Slide 8">
     <p:bg>
